--- a/proposal/[LocalGuard] JB금융그룹 Fin AI Challenge MVP제안서.pptx
+++ b/proposal/[LocalGuard] JB금융그룹 Fin AI Challenge MVP제안서.pptx
@@ -284,14 +284,14 @@
           </c:tx>
           <c:spPr>
             <a:solidFill>
-              <a:srgbClr val="CC785C"/>
+              <a:srgbClr val="0B6FB3"/>
             </a:solidFill>
           </c:spPr>
           <c:dPt>
             <c:idx val="0"/>
             <c:spPr>
               <a:solidFill>
-                <a:srgbClr val="E8E0D2"/>
+                <a:srgbClr val="D6E3F1"/>
               </a:solidFill>
             </c:spPr>
           </c:dPt>
@@ -299,7 +299,7 @@
             <c:idx val="1"/>
             <c:spPr>
               <a:solidFill>
-                <a:srgbClr val="E8E0D2"/>
+                <a:srgbClr val="D6E3F1"/>
               </a:solidFill>
             </c:spPr>
           </c:dPt>
@@ -307,7 +307,7 @@
             <c:idx val="2"/>
             <c:spPr>
               <a:solidFill>
-                <a:srgbClr val="E8E0D2"/>
+                <a:srgbClr val="D6E3F1"/>
               </a:solidFill>
             </c:spPr>
           </c:dPt>
@@ -359,9 +359,9 @@
             <a:lstStyle/>
             <a:p>
               <a:pPr>
-                <a:defRPr sz="900">
+                <a:defRPr sz="850">
                   <a:solidFill>
-                    <a:srgbClr val="141413"/>
+                    <a:srgbClr val="0F1F3A"/>
                   </a:solidFill>
                   <a:latin typeface="Pretendard"/>
                 </a:defRPr>
@@ -393,7 +393,7 @@
         <c:spPr>
           <a:ln>
             <a:solidFill>
-              <a:srgbClr val="E6DFD8"/>
+              <a:srgbClr val="D6E3F1"/>
             </a:solidFill>
           </a:ln>
         </c:spPr>
@@ -425,7 +425,7 @@
       <a:pPr>
         <a:defRPr sz="900">
           <a:solidFill>
-            <a:srgbClr val="3D3D3A"/>
+            <a:srgbClr val="637797"/>
           </a:solidFill>
           <a:latin typeface="Pretendard"/>
         </a:defRPr>
@@ -465,7 +465,7 @@
           <c:spPr>
             <a:ln w="28575">
               <a:solidFill>
-                <a:srgbClr val="A9583E"/>
+                <a:srgbClr val="07569D"/>
               </a:solidFill>
             </a:ln>
           </c:spPr>
@@ -518,9 +518,9 @@
             <a:lstStyle/>
             <a:p>
               <a:pPr>
-                <a:defRPr sz="850">
+                <a:defRPr sz="800">
                   <a:solidFill>
-                    <a:srgbClr val="141413"/>
+                    <a:srgbClr val="0F1F3A"/>
                   </a:solidFill>
                   <a:latin typeface="Pretendard"/>
                 </a:defRPr>
@@ -553,7 +553,7 @@
         <c:spPr>
           <a:ln>
             <a:solidFill>
-              <a:srgbClr val="E6DFD8"/>
+              <a:srgbClr val="D6E3F1"/>
             </a:solidFill>
           </a:ln>
         </c:spPr>
@@ -587,7 +587,7 @@
       <a:pPr>
         <a:defRPr sz="900">
           <a:solidFill>
-            <a:srgbClr val="3D3D3A"/>
+            <a:srgbClr val="637797"/>
           </a:solidFill>
           <a:latin typeface="Pretendard"/>
         </a:defRPr>
@@ -12458,7 +12458,7 @@
                       <a:r>
                         <a:rPr sz="1800" b="1">
                           <a:solidFill>
-                            <a:srgbClr val="141413"/>
+                            <a:srgbClr val="0F1F3A"/>
                           </a:solidFill>
                           <a:latin typeface="Pretendard"/>
                           <a:ea typeface="Pretendard"/>
@@ -12605,7 +12605,7 @@
                       <a:r>
                         <a:rPr sz="1800" b="1">
                           <a:solidFill>
-                            <a:srgbClr val="141413"/>
+                            <a:srgbClr val="0F1F3A"/>
                           </a:solidFill>
                           <a:latin typeface="Pretendard"/>
                           <a:ea typeface="Pretendard"/>
@@ -12931,12 +12931,12 @@
             <a:r>
               <a:rPr sz="1400" b="0">
                 <a:solidFill>
-                  <a:srgbClr val="6C6A64"/>
+                  <a:srgbClr val="637797"/>
                 </a:solidFill>
                 <a:latin typeface="Pretendard"/>
                 <a:ea typeface="Pretendard"/>
               </a:rPr>
-              <a:t>지역 금융 위험을 케이스로 만들고, AI Agent가 판단하고, 사람이 승인하는 금융안전 운영체제</a:t>
+              <a:t>지역 금융 위험을 케이스로 만들고, AI 에이전트가 판단하고, 사람이 승인하는 금융안전 운영체제</a:t>
             </a:r>
           </a:p>
         </p:txBody>
@@ -13257,7 +13257,7 @@
                       <a:r>
                         <a:rPr sz="1500" b="1">
                           <a:solidFill>
-                            <a:srgbClr val="141413"/>
+                            <a:srgbClr val="0F1F3A"/>
                           </a:solidFill>
                           <a:latin typeface="Pretendard"/>
                           <a:ea typeface="Pretendard"/>
@@ -13373,7 +13373,7 @@
                       <a:r>
                         <a:rPr sz="1500" b="0">
                           <a:solidFill>
-                            <a:srgbClr val="3D3D3A"/>
+                            <a:srgbClr val="0F1F3A"/>
                           </a:solidFill>
                           <a:latin typeface="Pretendard"/>
                           <a:ea typeface="Pretendard"/>
@@ -13495,12 +13495,12 @@
                       <a:r>
                         <a:rPr sz="1500" b="1">
                           <a:solidFill>
-                            <a:srgbClr val="3D3D3A"/>
+                            <a:srgbClr val="0F1F3A"/>
                           </a:solidFill>
                           <a:latin typeface="Pretendard"/>
                           <a:ea typeface="Pretendard"/>
                         </a:rPr>
-                        <a:t>JB LocalGuard OS  —  지역금융 안전 AI Agent 운영 콘솔</a:t>
+                        <a:t>JB LocalGuard OS  —  지역금융 안전 AI 에이전트 운영 콘솔</a:t>
                       </a:r>
                     </a:p>
                   </a:txBody>
@@ -13617,12 +13617,12 @@
                       <a:r>
                         <a:rPr sz="1500" b="0">
                           <a:solidFill>
-                            <a:srgbClr val="3D3D3A"/>
+                            <a:srgbClr val="0F1F3A"/>
                           </a:solidFill>
                           <a:latin typeface="Pretendard"/>
                           <a:ea typeface="Pretendard"/>
                         </a:rPr>
-                        <a:t>자유주제 (JB 미래사업 AI · 지역금융 리스크 대응 AI Agent OS)</a:t>
+                        <a:t>자유주제 (JB 미래사업 AI · 지역금융 리스크 대응 AI 에이전트 OS)</a:t>
                       </a:r>
                       <a:endParaRPr lang="ko-KR" altLang="en-US" sz="1400" i="1" dirty="0">
                         <a:solidFill>
@@ -13750,7 +13750,7 @@
                       <a:r>
                         <a:rPr sz="1400" b="0">
                           <a:solidFill>
-                            <a:srgbClr val="3D3D3A"/>
+                            <a:srgbClr val="0F1F3A"/>
                           </a:solidFill>
                           <a:latin typeface="Pretendard"/>
                           <a:ea typeface="Pretendard"/>
@@ -13760,27 +13760,27 @@
                       <a:r>
                         <a:rPr sz="1400" b="1">
                           <a:solidFill>
-                            <a:srgbClr val="A9583E"/>
+                            <a:srgbClr val="07569D"/>
                           </a:solidFill>
                           <a:latin typeface="Pretendard"/>
                           <a:ea typeface="Pretendard"/>
                         </a:rPr>
-                        <a:t>Case</a:t>
+                        <a:t>케이스</a:t>
                       </a:r>
                       <a:r>
                         <a:rPr sz="1400" b="0">
                           <a:solidFill>
-                            <a:srgbClr val="3D3D3A"/>
+                            <a:srgbClr val="0F1F3A"/>
                           </a:solidFill>
                           <a:latin typeface="Pretendard"/>
                           <a:ea typeface="Pretendard"/>
                         </a:rPr>
-                        <a:t>로 등록하면, 전문 AI Agent들이 </a:t>
+                        <a:t>로 등록하면, 전문 AI 에이전트들이 </a:t>
                       </a:r>
                       <a:r>
                         <a:rPr sz="1400" b="1">
                           <a:solidFill>
-                            <a:srgbClr val="A9583E"/>
+                            <a:srgbClr val="07569D"/>
                           </a:solidFill>
                           <a:latin typeface="Pretendard"/>
                           <a:ea typeface="Pretendard"/>
@@ -13790,7 +13790,7 @@
                       <a:r>
                         <a:rPr sz="1400" b="0">
                           <a:solidFill>
-                            <a:srgbClr val="3D3D3A"/>
+                            <a:srgbClr val="0F1F3A"/>
                           </a:solidFill>
                           <a:latin typeface="Pretendard"/>
                           <a:ea typeface="Pretendard"/>
@@ -14933,7 +14933,7 @@
         <p:spPr>
           <a:xfrm>
             <a:off x="868680" y="1682496"/>
-            <a:ext cx="3413759" cy="1024128"/>
+            <a:ext cx="3413759" cy="914400"/>
           </a:xfrm>
           <a:prstGeom prst="roundRect">
             <a:avLst>
@@ -14941,11 +14941,11 @@
             </a:avLst>
           </a:prstGeom>
           <a:solidFill>
-            <a:srgbClr val="F5F0E8"/>
+            <a:srgbClr val="F6F9FD"/>
           </a:solidFill>
           <a:ln w="9525">
             <a:solidFill>
-              <a:srgbClr val="E6DFD8"/>
+              <a:srgbClr val="D6E3F1"/>
             </a:solidFill>
           </a:ln>
           <a:effectLst/>
@@ -14980,8 +14980,8 @@
         </p:nvSpPr>
         <p:spPr>
           <a:xfrm>
-            <a:off x="1033271" y="1773936"/>
-            <a:ext cx="3084575" cy="384048"/>
+            <a:off x="1014983" y="1764792"/>
+            <a:ext cx="3121152" cy="310896"/>
           </a:xfrm>
           <a:prstGeom prst="rect">
             <a:avLst/>
@@ -15000,9 +15000,9 @@
               </a:spcAft>
             </a:pPr>
             <a:r>
-              <a:rPr sz="2200" b="1">
-                <a:solidFill>
-                  <a:srgbClr val="A9583E"/>
+              <a:rPr sz="1800" b="1">
+                <a:solidFill>
+                  <a:srgbClr val="07569D"/>
                 </a:solidFill>
                 <a:latin typeface="Pretendard"/>
                 <a:ea typeface="Pretendard"/>
@@ -15020,8 +15020,8 @@
         </p:nvSpPr>
         <p:spPr>
           <a:xfrm>
-            <a:off x="1033271" y="2157984"/>
-            <a:ext cx="3084575" cy="274320"/>
+            <a:off x="1014983" y="2093976"/>
+            <a:ext cx="3121152" cy="237744"/>
           </a:xfrm>
           <a:prstGeom prst="rect">
             <a:avLst/>
@@ -15040,9 +15040,9 @@
               </a:spcAft>
             </a:pPr>
             <a:r>
-              <a:rPr sz="1050" b="1">
-                <a:solidFill>
-                  <a:srgbClr val="141413"/>
+              <a:rPr sz="950" b="1">
+                <a:solidFill>
+                  <a:srgbClr val="0F1F3A"/>
                 </a:solidFill>
                 <a:latin typeface="Pretendard"/>
                 <a:ea typeface="Pretendard"/>
@@ -15060,8 +15060,8 @@
         </p:nvSpPr>
         <p:spPr>
           <a:xfrm>
-            <a:off x="1033271" y="2432304"/>
-            <a:ext cx="3084575" cy="219456"/>
+            <a:off x="1014983" y="2331720"/>
+            <a:ext cx="3121152" cy="201168"/>
           </a:xfrm>
           <a:prstGeom prst="rect">
             <a:avLst/>
@@ -15080,9 +15080,9 @@
               </a:spcAft>
             </a:pPr>
             <a:r>
-              <a:rPr sz="800" b="0">
-                <a:solidFill>
-                  <a:srgbClr val="8E8B82"/>
+              <a:rPr sz="750" b="0">
+                <a:solidFill>
+                  <a:srgbClr val="637797"/>
                 </a:solidFill>
                 <a:latin typeface="Pretendard"/>
                 <a:ea typeface="Pretendard"/>
@@ -15101,7 +15101,7 @@
         <p:spPr>
           <a:xfrm>
             <a:off x="4465320" y="1682496"/>
-            <a:ext cx="3413759" cy="1024128"/>
+            <a:ext cx="3413759" cy="914400"/>
           </a:xfrm>
           <a:prstGeom prst="roundRect">
             <a:avLst>
@@ -15109,11 +15109,11 @@
             </a:avLst>
           </a:prstGeom>
           <a:solidFill>
-            <a:srgbClr val="F5F0E8"/>
+            <a:srgbClr val="F6F9FD"/>
           </a:solidFill>
           <a:ln w="9525">
             <a:solidFill>
-              <a:srgbClr val="E6DFD8"/>
+              <a:srgbClr val="D6E3F1"/>
             </a:solidFill>
           </a:ln>
           <a:effectLst/>
@@ -15148,8 +15148,8 @@
         </p:nvSpPr>
         <p:spPr>
           <a:xfrm>
-            <a:off x="4629911" y="1773936"/>
-            <a:ext cx="3084575" cy="384048"/>
+            <a:off x="4611624" y="1764792"/>
+            <a:ext cx="3121152" cy="310896"/>
           </a:xfrm>
           <a:prstGeom prst="rect">
             <a:avLst/>
@@ -15168,9 +15168,9 @@
               </a:spcAft>
             </a:pPr>
             <a:r>
-              <a:rPr sz="2200" b="1">
-                <a:solidFill>
-                  <a:srgbClr val="A9583E"/>
+              <a:rPr sz="1800" b="1">
+                <a:solidFill>
+                  <a:srgbClr val="07569D"/>
                 </a:solidFill>
                 <a:latin typeface="Pretendard"/>
                 <a:ea typeface="Pretendard"/>
@@ -15188,8 +15188,8 @@
         </p:nvSpPr>
         <p:spPr>
           <a:xfrm>
-            <a:off x="4629911" y="2157984"/>
-            <a:ext cx="3084575" cy="274320"/>
+            <a:off x="4611624" y="2093976"/>
+            <a:ext cx="3121152" cy="237744"/>
           </a:xfrm>
           <a:prstGeom prst="rect">
             <a:avLst/>
@@ -15208,9 +15208,9 @@
               </a:spcAft>
             </a:pPr>
             <a:r>
-              <a:rPr sz="1050" b="1">
-                <a:solidFill>
-                  <a:srgbClr val="141413"/>
+              <a:rPr sz="950" b="1">
+                <a:solidFill>
+                  <a:srgbClr val="0F1F3A"/>
                 </a:solidFill>
                 <a:latin typeface="Pretendard"/>
                 <a:ea typeface="Pretendard"/>
@@ -15228,8 +15228,8 @@
         </p:nvSpPr>
         <p:spPr>
           <a:xfrm>
-            <a:off x="4629911" y="2432304"/>
-            <a:ext cx="3084575" cy="219456"/>
+            <a:off x="4611624" y="2331720"/>
+            <a:ext cx="3121152" cy="201168"/>
           </a:xfrm>
           <a:prstGeom prst="rect">
             <a:avLst/>
@@ -15248,9 +15248,9 @@
               </a:spcAft>
             </a:pPr>
             <a:r>
-              <a:rPr sz="800" b="0">
-                <a:solidFill>
-                  <a:srgbClr val="8E8B82"/>
+              <a:rPr sz="750" b="0">
+                <a:solidFill>
+                  <a:srgbClr val="637797"/>
                 </a:solidFill>
                 <a:latin typeface="Pretendard"/>
                 <a:ea typeface="Pretendard"/>
@@ -15269,7 +15269,7 @@
         <p:spPr>
           <a:xfrm>
             <a:off x="8061960" y="1682496"/>
-            <a:ext cx="3413759" cy="1024128"/>
+            <a:ext cx="3413759" cy="914400"/>
           </a:xfrm>
           <a:prstGeom prst="roundRect">
             <a:avLst>
@@ -15277,11 +15277,11 @@
             </a:avLst>
           </a:prstGeom>
           <a:solidFill>
-            <a:srgbClr val="F5F0E8"/>
+            <a:srgbClr val="F6F9FD"/>
           </a:solidFill>
           <a:ln w="9525">
             <a:solidFill>
-              <a:srgbClr val="E6DFD8"/>
+              <a:srgbClr val="D6E3F1"/>
             </a:solidFill>
           </a:ln>
           <a:effectLst/>
@@ -15316,8 +15316,8 @@
         </p:nvSpPr>
         <p:spPr>
           <a:xfrm>
-            <a:off x="8226551" y="1773936"/>
-            <a:ext cx="3084575" cy="384048"/>
+            <a:off x="8208264" y="1764792"/>
+            <a:ext cx="3121152" cy="310896"/>
           </a:xfrm>
           <a:prstGeom prst="rect">
             <a:avLst/>
@@ -15336,9 +15336,9 @@
               </a:spcAft>
             </a:pPr>
             <a:r>
-              <a:rPr sz="2200" b="1">
-                <a:solidFill>
-                  <a:srgbClr val="A9583E"/>
+              <a:rPr sz="1800" b="1">
+                <a:solidFill>
+                  <a:srgbClr val="07569D"/>
                 </a:solidFill>
                 <a:latin typeface="Pretendard"/>
                 <a:ea typeface="Pretendard"/>
@@ -15356,8 +15356,8 @@
         </p:nvSpPr>
         <p:spPr>
           <a:xfrm>
-            <a:off x="8226551" y="2157984"/>
-            <a:ext cx="3084575" cy="274320"/>
+            <a:off x="8208264" y="2093976"/>
+            <a:ext cx="3121152" cy="237744"/>
           </a:xfrm>
           <a:prstGeom prst="rect">
             <a:avLst/>
@@ -15376,9 +15376,9 @@
               </a:spcAft>
             </a:pPr>
             <a:r>
-              <a:rPr sz="1050" b="1">
-                <a:solidFill>
-                  <a:srgbClr val="141413"/>
+              <a:rPr sz="950" b="1">
+                <a:solidFill>
+                  <a:srgbClr val="0F1F3A"/>
                 </a:solidFill>
                 <a:latin typeface="Pretendard"/>
                 <a:ea typeface="Pretendard"/>
@@ -15396,8 +15396,8 @@
         </p:nvSpPr>
         <p:spPr>
           <a:xfrm>
-            <a:off x="8226551" y="2432304"/>
-            <a:ext cx="3084575" cy="219456"/>
+            <a:off x="8208264" y="2331720"/>
+            <a:ext cx="3121152" cy="201168"/>
           </a:xfrm>
           <a:prstGeom prst="rect">
             <a:avLst/>
@@ -15416,9 +15416,9 @@
               </a:spcAft>
             </a:pPr>
             <a:r>
-              <a:rPr sz="800" b="0">
-                <a:solidFill>
-                  <a:srgbClr val="8E8B82"/>
+              <a:rPr sz="750" b="0">
+                <a:solidFill>
+                  <a:srgbClr val="637797"/>
                 </a:solidFill>
                 <a:latin typeface="Pretendard"/>
                 <a:ea typeface="Pretendard"/>
@@ -15436,8 +15436,8 @@
         </p:nvSpPr>
         <p:spPr>
           <a:xfrm>
-            <a:off x="868680" y="2852928"/>
-            <a:ext cx="5166359" cy="1901952"/>
+            <a:off x="868680" y="2724912"/>
+            <a:ext cx="5166359" cy="1828800"/>
           </a:xfrm>
           <a:prstGeom prst="roundRect">
             <a:avLst>
@@ -15449,7 +15449,7 @@
           </a:solidFill>
           <a:ln w="9525">
             <a:solidFill>
-              <a:srgbClr val="E6DFD8"/>
+              <a:srgbClr val="D6E3F1"/>
             </a:solidFill>
           </a:ln>
           <a:effectLst/>
@@ -15484,8 +15484,8 @@
         </p:nvSpPr>
         <p:spPr>
           <a:xfrm>
-            <a:off x="1033271" y="2926080"/>
-            <a:ext cx="4837175" cy="228600"/>
+            <a:off x="1014983" y="2798064"/>
+            <a:ext cx="4873751" cy="201168"/>
           </a:xfrm>
           <a:prstGeom prst="rect">
             <a:avLst/>
@@ -15504,9 +15504,9 @@
               </a:spcAft>
             </a:pPr>
             <a:r>
-              <a:rPr sz="1100" b="1">
-                <a:solidFill>
-                  <a:srgbClr val="141413"/>
+              <a:rPr sz="1000" b="1">
+                <a:solidFill>
+                  <a:srgbClr val="0F1F3A"/>
                 </a:solidFill>
                 <a:latin typeface="Pretendard"/>
                 <a:ea typeface="Pretendard"/>
@@ -15525,8 +15525,8 @@
           <p:nvPr/>
         </p:nvGraphicFramePr>
         <p:xfrm>
-          <a:off x="1005839" y="3182112"/>
-          <a:ext cx="4892040" cy="1243584"/>
+          <a:off x="996695" y="3035808"/>
+          <a:ext cx="4910327" cy="1207007"/>
         </p:xfrm>
         <a:graphic>
           <a:graphicData uri="http://schemas.openxmlformats.org/drawingml/2006/chart">
@@ -15542,8 +15542,8 @@
         </p:nvSpPr>
         <p:spPr>
           <a:xfrm>
-            <a:off x="1033271" y="4480560"/>
-            <a:ext cx="4837175" cy="201168"/>
+            <a:off x="1014983" y="4297680"/>
+            <a:ext cx="4873751" cy="182880"/>
           </a:xfrm>
           <a:prstGeom prst="rect">
             <a:avLst/>
@@ -15562,9 +15562,9 @@
               </a:spcAft>
             </a:pPr>
             <a:r>
-              <a:rPr sz="800" b="0">
-                <a:solidFill>
-                  <a:srgbClr val="8E8B82"/>
+              <a:rPr sz="750" b="0">
+                <a:solidFill>
+                  <a:srgbClr val="637797"/>
                 </a:solidFill>
                 <a:latin typeface="Pretendard"/>
                 <a:ea typeface="Pretendard"/>
@@ -15582,8 +15582,8 @@
         </p:nvSpPr>
         <p:spPr>
           <a:xfrm>
-            <a:off x="6309359" y="2852928"/>
-            <a:ext cx="5166359" cy="1901952"/>
+            <a:off x="6309359" y="2724912"/>
+            <a:ext cx="5166359" cy="1828800"/>
           </a:xfrm>
           <a:prstGeom prst="roundRect">
             <a:avLst>
@@ -15595,7 +15595,7 @@
           </a:solidFill>
           <a:ln w="9525">
             <a:solidFill>
-              <a:srgbClr val="E6DFD8"/>
+              <a:srgbClr val="D6E3F1"/>
             </a:solidFill>
           </a:ln>
           <a:effectLst/>
@@ -15630,8 +15630,8 @@
         </p:nvSpPr>
         <p:spPr>
           <a:xfrm>
-            <a:off x="6473951" y="2926080"/>
-            <a:ext cx="4837175" cy="228600"/>
+            <a:off x="6455664" y="2798064"/>
+            <a:ext cx="4873751" cy="201168"/>
           </a:xfrm>
           <a:prstGeom prst="rect">
             <a:avLst/>
@@ -15650,9 +15650,9 @@
               </a:spcAft>
             </a:pPr>
             <a:r>
-              <a:rPr sz="1100" b="1">
-                <a:solidFill>
-                  <a:srgbClr val="141413"/>
+              <a:rPr sz="1000" b="1">
+                <a:solidFill>
+                  <a:srgbClr val="0F1F3A"/>
                 </a:solidFill>
                 <a:latin typeface="Pretendard"/>
                 <a:ea typeface="Pretendard"/>
@@ -15671,8 +15671,8 @@
           <p:nvPr/>
         </p:nvGraphicFramePr>
         <p:xfrm>
-          <a:off x="6446520" y="3182112"/>
-          <a:ext cx="4892040" cy="1243584"/>
+          <a:off x="6437375" y="3035808"/>
+          <a:ext cx="4910327" cy="1207007"/>
         </p:xfrm>
         <a:graphic>
           <a:graphicData uri="http://schemas.openxmlformats.org/drawingml/2006/chart">
@@ -15688,8 +15688,8 @@
         </p:nvSpPr>
         <p:spPr>
           <a:xfrm>
-            <a:off x="6473951" y="4480560"/>
-            <a:ext cx="4837175" cy="201168"/>
+            <a:off x="6455664" y="4297680"/>
+            <a:ext cx="4873751" cy="182880"/>
           </a:xfrm>
           <a:prstGeom prst="rect">
             <a:avLst/>
@@ -15708,9 +15708,9 @@
               </a:spcAft>
             </a:pPr>
             <a:r>
-              <a:rPr sz="800" b="0">
-                <a:solidFill>
-                  <a:srgbClr val="8E8B82"/>
+              <a:rPr sz="750" b="0">
+                <a:solidFill>
+                  <a:srgbClr val="637797"/>
                 </a:solidFill>
                 <a:latin typeface="Pretendard"/>
                 <a:ea typeface="Pretendard"/>
@@ -15728,8 +15728,8 @@
         </p:nvSpPr>
         <p:spPr>
           <a:xfrm>
-            <a:off x="868680" y="4901184"/>
-            <a:ext cx="10607040" cy="914400"/>
+            <a:off x="868680" y="4681728"/>
+            <a:ext cx="10607040" cy="877824"/>
           </a:xfrm>
           <a:prstGeom prst="roundRect">
             <a:avLst>
@@ -15737,7 +15737,7 @@
             </a:avLst>
           </a:prstGeom>
           <a:solidFill>
-            <a:srgbClr val="181715"/>
+            <a:srgbClr val="091C4D"/>
           </a:solidFill>
           <a:ln>
             <a:noFill/>
@@ -15774,8 +15774,8 @@
         </p:nvSpPr>
         <p:spPr>
           <a:xfrm>
-            <a:off x="1097280" y="5020056"/>
-            <a:ext cx="3261360" cy="237744"/>
+            <a:off x="1097280" y="4791456"/>
+            <a:ext cx="3261360" cy="219456"/>
           </a:xfrm>
           <a:prstGeom prst="rect">
             <a:avLst/>
@@ -15794,9 +15794,9 @@
               </a:spcAft>
             </a:pPr>
             <a:r>
-              <a:rPr sz="1050" b="1">
-                <a:solidFill>
-                  <a:srgbClr val="CC785C"/>
+              <a:rPr sz="1000" b="1">
+                <a:solidFill>
+                  <a:srgbClr val="1CA9D6"/>
                 </a:solidFill>
                 <a:latin typeface="Pretendard"/>
                 <a:ea typeface="Pretendard"/>
@@ -15814,8 +15814,8 @@
         </p:nvSpPr>
         <p:spPr>
           <a:xfrm>
-            <a:off x="1097280" y="5266944"/>
-            <a:ext cx="3261360" cy="502920"/>
+            <a:off x="1097280" y="5029200"/>
+            <a:ext cx="3261360" cy="475488"/>
           </a:xfrm>
           <a:prstGeom prst="rect">
             <a:avLst/>
@@ -15834,9 +15834,9 @@
               </a:spcAft>
             </a:pPr>
             <a:r>
-              <a:rPr sz="900" b="0">
-                <a:solidFill>
-                  <a:srgbClr val="A09D96"/>
+              <a:rPr sz="850" b="0">
+                <a:solidFill>
+                  <a:srgbClr val="9DB1CE"/>
                 </a:solidFill>
                 <a:latin typeface="Pretendard"/>
                 <a:ea typeface="Pretendard"/>
@@ -15851,9 +15851,9 @@
               </a:spcAft>
             </a:pPr>
             <a:r>
-              <a:rPr sz="900" b="0">
-                <a:solidFill>
-                  <a:srgbClr val="A09D96"/>
+              <a:rPr sz="850" b="0">
+                <a:solidFill>
+                  <a:srgbClr val="9DB1CE"/>
                 </a:solidFill>
                 <a:latin typeface="Pretendard"/>
                 <a:ea typeface="Pretendard"/>
@@ -15871,8 +15871,8 @@
         </p:nvSpPr>
         <p:spPr>
           <a:xfrm>
-            <a:off x="4541520" y="5020056"/>
-            <a:ext cx="3261360" cy="237744"/>
+            <a:off x="4541520" y="4791456"/>
+            <a:ext cx="3261360" cy="219456"/>
           </a:xfrm>
           <a:prstGeom prst="rect">
             <a:avLst/>
@@ -15891,9 +15891,9 @@
               </a:spcAft>
             </a:pPr>
             <a:r>
-              <a:rPr sz="1050" b="1">
-                <a:solidFill>
-                  <a:srgbClr val="CC785C"/>
+              <a:rPr sz="1000" b="1">
+                <a:solidFill>
+                  <a:srgbClr val="1CA9D6"/>
                 </a:solidFill>
                 <a:latin typeface="Pretendard"/>
                 <a:ea typeface="Pretendard"/>
@@ -15911,8 +15911,8 @@
         </p:nvSpPr>
         <p:spPr>
           <a:xfrm>
-            <a:off x="4541520" y="5266944"/>
-            <a:ext cx="3261360" cy="502920"/>
+            <a:off x="4541520" y="5029200"/>
+            <a:ext cx="3261360" cy="475488"/>
           </a:xfrm>
           <a:prstGeom prst="rect">
             <a:avLst/>
@@ -15931,9 +15931,9 @@
               </a:spcAft>
             </a:pPr>
             <a:r>
-              <a:rPr sz="900" b="0">
-                <a:solidFill>
-                  <a:srgbClr val="A09D96"/>
+              <a:rPr sz="850" b="0">
+                <a:solidFill>
+                  <a:srgbClr val="9DB1CE"/>
                 </a:solidFill>
                 <a:latin typeface="Pretendard"/>
                 <a:ea typeface="Pretendard"/>
@@ -15948,9 +15948,9 @@
               </a:spcAft>
             </a:pPr>
             <a:r>
-              <a:rPr sz="900" b="0">
-                <a:solidFill>
-                  <a:srgbClr val="A09D96"/>
+              <a:rPr sz="850" b="0">
+                <a:solidFill>
+                  <a:srgbClr val="9DB1CE"/>
                 </a:solidFill>
                 <a:latin typeface="Pretendard"/>
                 <a:ea typeface="Pretendard"/>
@@ -15968,8 +15968,8 @@
         </p:nvSpPr>
         <p:spPr>
           <a:xfrm>
-            <a:off x="7985759" y="5020056"/>
-            <a:ext cx="3261360" cy="237744"/>
+            <a:off x="7985759" y="4791456"/>
+            <a:ext cx="3261360" cy="219456"/>
           </a:xfrm>
           <a:prstGeom prst="rect">
             <a:avLst/>
@@ -15988,9 +15988,9 @@
               </a:spcAft>
             </a:pPr>
             <a:r>
-              <a:rPr sz="1050" b="1">
-                <a:solidFill>
-                  <a:srgbClr val="CC785C"/>
+              <a:rPr sz="1000" b="1">
+                <a:solidFill>
+                  <a:srgbClr val="1CA9D6"/>
                 </a:solidFill>
                 <a:latin typeface="Pretendard"/>
                 <a:ea typeface="Pretendard"/>
@@ -16008,8 +16008,8 @@
         </p:nvSpPr>
         <p:spPr>
           <a:xfrm>
-            <a:off x="7985759" y="5266944"/>
-            <a:ext cx="3261360" cy="502920"/>
+            <a:off x="7985759" y="5029200"/>
+            <a:ext cx="3261360" cy="475488"/>
           </a:xfrm>
           <a:prstGeom prst="rect">
             <a:avLst/>
@@ -16028,9 +16028,9 @@
               </a:spcAft>
             </a:pPr>
             <a:r>
-              <a:rPr sz="900" b="0">
-                <a:solidFill>
-                  <a:srgbClr val="A09D96"/>
+              <a:rPr sz="850" b="0">
+                <a:solidFill>
+                  <a:srgbClr val="9DB1CE"/>
                 </a:solidFill>
                 <a:latin typeface="Pretendard"/>
                 <a:ea typeface="Pretendard"/>
@@ -16045,9 +16045,9 @@
               </a:spcAft>
             </a:pPr>
             <a:r>
-              <a:rPr sz="900" b="0">
-                <a:solidFill>
-                  <a:srgbClr val="A09D96"/>
+              <a:rPr sz="850" b="0">
+                <a:solidFill>
+                  <a:srgbClr val="9DB1CE"/>
                 </a:solidFill>
                 <a:latin typeface="Pretendard"/>
                 <a:ea typeface="Pretendard"/>
@@ -16772,7 +16772,7 @@
         <p:spPr>
           <a:xfrm>
             <a:off x="868680" y="1664208"/>
-            <a:ext cx="6492240" cy="237744"/>
+            <a:ext cx="10607040" cy="219456"/>
           </a:xfrm>
           <a:prstGeom prst="rect">
             <a:avLst/>
@@ -16791,14 +16791,24 @@
               </a:spcAft>
             </a:pPr>
             <a:r>
-              <a:rPr sz="1150" b="1">
-                <a:solidFill>
-                  <a:srgbClr val="141413"/>
+              <a:rPr sz="1100" b="1">
+                <a:solidFill>
+                  <a:srgbClr val="0F1F3A"/>
                 </a:solidFill>
                 <a:latin typeface="Pretendard"/>
                 <a:ea typeface="Pretendard"/>
               </a:rPr>
-              <a:t>시스템 구성도 — Case → AgentRun → Approval → Audit 운영 루프</a:t>
+              <a:t>시스템 아키텍처  </a:t>
+            </a:r>
+            <a:r>
+              <a:rPr sz="900" b="0">
+                <a:solidFill>
+                  <a:srgbClr val="637797"/>
+                </a:solidFill>
+                <a:latin typeface="Pretendard"/>
+                <a:ea typeface="Pretendard"/>
+              </a:rPr>
+              <a:t>— UI · 케이스 런타임 · 에이전트 메시 · 스킬 저장소 · 승인 게이트 · 감사 기록 (GitHub 07_아키텍처 Mermaid 원본)</a:t>
             </a:r>
           </a:p>
         </p:txBody>
@@ -16811,8 +16821,8 @@
         </p:nvSpPr>
         <p:spPr>
           <a:xfrm>
-            <a:off x="868680" y="1956816"/>
-            <a:ext cx="6492240" cy="566928"/>
+            <a:off x="868680" y="1920240"/>
+            <a:ext cx="4983480" cy="3529584"/>
           </a:xfrm>
           <a:prstGeom prst="roundRect">
             <a:avLst>
@@ -16820,11 +16830,11 @@
             </a:avLst>
           </a:prstGeom>
           <a:solidFill>
-            <a:srgbClr val="F5F0E8"/>
+            <a:srgbClr val="FFFFFF"/>
           </a:solidFill>
           <a:ln w="9525">
             <a:solidFill>
-              <a:srgbClr val="E6DFD8"/>
+              <a:srgbClr val="D6E3F1"/>
             </a:solidFill>
           </a:ln>
           <a:effectLst/>
@@ -16851,16 +16861,40 @@
           </a:p>
         </p:txBody>
       </p:sp>
-      <p:sp>
-        <p:nvSpPr>
-          <p:cNvPr id="20" name="TextBox 19"/>
+      <p:pic>
+        <p:nvPicPr>
+          <p:cNvPr id="20" name="Picture 19" descr="system-tb.png"/>
+          <p:cNvPicPr>
+            <a:picLocks noChangeAspect="1"/>
+          </p:cNvPicPr>
+          <p:nvPr/>
+        </p:nvPicPr>
+        <p:blipFill>
+          <a:blip r:embed="rId4"/>
+          <a:stretch>
+            <a:fillRect/>
+          </a:stretch>
+        </p:blipFill>
+        <p:spPr>
+          <a:xfrm>
+            <a:off x="1228953" y="1993392"/>
+            <a:ext cx="4262932" cy="3383280"/>
+          </a:xfrm>
+          <a:prstGeom prst="rect">
+            <a:avLst/>
+          </a:prstGeom>
+        </p:spPr>
+      </p:pic>
+      <p:sp>
+        <p:nvSpPr>
+          <p:cNvPr id="21" name="TextBox 20"/>
           <p:cNvSpPr txBox="1"/>
           <p:nvPr/>
         </p:nvSpPr>
         <p:spPr>
           <a:xfrm>
-            <a:off x="978407" y="2011680"/>
-            <a:ext cx="1005840" cy="457200"/>
+            <a:off x="6126480" y="1920240"/>
+            <a:ext cx="5349240" cy="201168"/>
           </a:xfrm>
           <a:prstGeom prst="rect">
             <a:avLst/>
@@ -16868,7 +16902,7 @@
           <a:noFill/>
         </p:spPr>
         <p:txBody>
-          <a:bodyPr wrap="square" anchor="ctr" lIns="0" rIns="0" tIns="0" bIns="0">
+          <a:bodyPr wrap="square" anchor="t" lIns="0" rIns="0" tIns="0" bIns="0">
             <a:spAutoFit/>
           </a:bodyPr>
           <a:lstStyle/>
@@ -16879,40 +16913,40 @@
               </a:spcAft>
             </a:pPr>
             <a:r>
-              <a:rPr sz="950" b="1">
-                <a:solidFill>
-                  <a:srgbClr val="6C6A64"/>
+              <a:rPr sz="1050" b="1">
+                <a:solidFill>
+                  <a:srgbClr val="0F1F3A"/>
                 </a:solidFill>
                 <a:latin typeface="Pretendard"/>
                 <a:ea typeface="Pretendard"/>
               </a:rPr>
-              <a:t>입력 · 증거</a:t>
+              <a:t>운영 루프 — 케이스가 흐르는 4단계</a:t>
             </a:r>
           </a:p>
         </p:txBody>
       </p:sp>
       <p:sp>
         <p:nvSpPr>
-          <p:cNvPr id="21" name="Rounded Rectangle 20"/>
+          <p:cNvPr id="22" name="Rounded Rectangle 21"/>
           <p:cNvSpPr/>
           <p:nvPr/>
         </p:nvSpPr>
         <p:spPr>
           <a:xfrm>
-            <a:off x="2011680" y="2084832"/>
-            <a:ext cx="960120" cy="310896"/>
+            <a:off x="6126480" y="2157984"/>
+            <a:ext cx="5349240" cy="347472"/>
           </a:xfrm>
           <a:prstGeom prst="roundRect">
             <a:avLst>
-              <a:gd name="adj" fmla="val 50000"/>
+              <a:gd name="adj" fmla="val 8000"/>
             </a:avLst>
           </a:prstGeom>
           <a:solidFill>
-            <a:srgbClr val="FFFFFF"/>
+            <a:srgbClr val="F6F9FD"/>
           </a:solidFill>
           <a:ln w="9525">
             <a:solidFill>
-              <a:srgbClr val="E6DFD8"/>
+              <a:srgbClr val="D6E3F1"/>
             </a:solidFill>
           </a:ln>
           <a:effectLst/>
@@ -16932,46 +16966,32 @@
           </a:fontRef>
         </p:style>
         <p:txBody>
-          <a:bodyPr rtlCol="0" anchor="ctr" wrap="square" lIns="50800" rIns="50800" tIns="12700" bIns="12700"/>
+          <a:bodyPr rtlCol="0" anchor="ctr"/>
           <a:lstStyle/>
           <a:p>
             <a:pPr algn="ctr"/>
-            <a:r>
-              <a:rPr sz="850" b="0">
-                <a:solidFill>
-                  <a:srgbClr val="3D3D3A"/>
-                </a:solidFill>
-                <a:latin typeface="Pretendard"/>
-                <a:ea typeface="Pretendard"/>
-              </a:rPr>
-              <a:t>상담 노트</a:t>
-            </a:r>
-          </a:p>
-        </p:txBody>
-      </p:sp>
-      <p:sp>
-        <p:nvSpPr>
-          <p:cNvPr id="22" name="Rounded Rectangle 21"/>
+          </a:p>
+        </p:txBody>
+      </p:sp>
+      <p:sp>
+        <p:nvSpPr>
+          <p:cNvPr id="23" name="Oval 22"/>
           <p:cNvSpPr/>
           <p:nvPr/>
         </p:nvSpPr>
         <p:spPr>
           <a:xfrm>
-            <a:off x="3063240" y="2084832"/>
-            <a:ext cx="960120" cy="310896"/>
-          </a:xfrm>
-          <a:prstGeom prst="roundRect">
-            <a:avLst>
-              <a:gd name="adj" fmla="val 50000"/>
-            </a:avLst>
+            <a:off x="6199632" y="2226564"/>
+            <a:ext cx="210312" cy="210312"/>
+          </a:xfrm>
+          <a:prstGeom prst="ellipse">
+            <a:avLst/>
           </a:prstGeom>
           <a:solidFill>
-            <a:srgbClr val="FFFFFF"/>
+            <a:srgbClr val="0B6FB3"/>
           </a:solidFill>
-          <a:ln w="9525">
-            <a:solidFill>
-              <a:srgbClr val="E6DFD8"/>
-            </a:solidFill>
+          <a:ln>
+            <a:noFill/>
           </a:ln>
           <a:effectLst/>
         </p:spPr>
@@ -16990,45 +17010,125 @@
           </a:fontRef>
         </p:style>
         <p:txBody>
-          <a:bodyPr rtlCol="0" anchor="ctr" wrap="square" lIns="50800" rIns="50800" tIns="12700" bIns="12700"/>
+          <a:bodyPr rtlCol="0" anchor="ctr" lIns="0" rIns="0" tIns="0" bIns="0"/>
           <a:lstStyle/>
           <a:p>
             <a:pPr algn="ctr"/>
             <a:r>
-              <a:rPr sz="850" b="0">
-                <a:solidFill>
-                  <a:srgbClr val="3D3D3A"/>
+              <a:rPr sz="850" b="1">
+                <a:solidFill>
+                  <a:srgbClr val="FFFFFF"/>
                 </a:solidFill>
                 <a:latin typeface="Pretendard"/>
                 <a:ea typeface="Pretendard"/>
               </a:rPr>
-              <a:t>뉴스 · 기사</a:t>
+              <a:t>1</a:t>
             </a:r>
           </a:p>
         </p:txBody>
       </p:sp>
       <p:sp>
         <p:nvSpPr>
-          <p:cNvPr id="23" name="Rounded Rectangle 22"/>
+          <p:cNvPr id="24" name="TextBox 23"/>
+          <p:cNvSpPr txBox="1"/>
+          <p:nvPr/>
+        </p:nvSpPr>
+        <p:spPr>
+          <a:xfrm>
+            <a:off x="6510528" y="2176272"/>
+            <a:ext cx="1188720" cy="310896"/>
+          </a:xfrm>
+          <a:prstGeom prst="rect">
+            <a:avLst/>
+          </a:prstGeom>
+          <a:noFill/>
+        </p:spPr>
+        <p:txBody>
+          <a:bodyPr wrap="square" anchor="ctr" lIns="0" rIns="0" tIns="0" bIns="0">
+            <a:spAutoFit/>
+          </a:bodyPr>
+          <a:lstStyle/>
+          <a:p>
+            <a:pPr algn="l">
+              <a:spcAft>
+                <a:spcPts val="200"/>
+              </a:spcAft>
+            </a:pPr>
+            <a:r>
+              <a:rPr sz="900" b="1">
+                <a:solidFill>
+                  <a:srgbClr val="0F1F3A"/>
+                </a:solidFill>
+                <a:latin typeface="Pretendard"/>
+                <a:ea typeface="Pretendard"/>
+              </a:rPr>
+              <a:t>케이스 생성</a:t>
+            </a:r>
+          </a:p>
+        </p:txBody>
+      </p:sp>
+      <p:sp>
+        <p:nvSpPr>
+          <p:cNvPr id="25" name="TextBox 24"/>
+          <p:cNvSpPr txBox="1"/>
+          <p:nvPr/>
+        </p:nvSpPr>
+        <p:spPr>
+          <a:xfrm>
+            <a:off x="7726679" y="2176272"/>
+            <a:ext cx="3611879" cy="310896"/>
+          </a:xfrm>
+          <a:prstGeom prst="rect">
+            <a:avLst/>
+          </a:prstGeom>
+          <a:noFill/>
+        </p:spPr>
+        <p:txBody>
+          <a:bodyPr wrap="square" anchor="ctr" lIns="0" rIns="0" tIns="0" bIns="0">
+            <a:spAutoFit/>
+          </a:bodyPr>
+          <a:lstStyle/>
+          <a:p>
+            <a:pPr algn="l">
+              <a:spcAft>
+                <a:spcPts val="200"/>
+              </a:spcAft>
+            </a:pPr>
+            <a:r>
+              <a:rPr sz="800" b="0">
+                <a:solidFill>
+                  <a:srgbClr val="637797"/>
+                </a:solidFill>
+                <a:latin typeface="Pretendard"/>
+                <a:ea typeface="Pretendard"/>
+              </a:rPr>
+              <a:t>고객 위험을 케이스로 등록 (RM 또는 정기 스캔)</a:t>
+            </a:r>
+          </a:p>
+        </p:txBody>
+      </p:sp>
+      <p:sp>
+        <p:nvSpPr>
+          <p:cNvPr id="26" name="Rounded Rectangle 25"/>
           <p:cNvSpPr/>
           <p:nvPr/>
         </p:nvSpPr>
         <p:spPr>
           <a:xfrm>
-            <a:off x="4114800" y="2084832"/>
-            <a:ext cx="1691640" cy="310896"/>
+            <a:off x="6126480" y="2560320"/>
+            <a:ext cx="5349240" cy="347472"/>
           </a:xfrm>
           <a:prstGeom prst="roundRect">
             <a:avLst>
-              <a:gd name="adj" fmla="val 50000"/>
+              <a:gd name="adj" fmla="val 8000"/>
             </a:avLst>
           </a:prstGeom>
           <a:solidFill>
-            <a:srgbClr val="FFFFFF"/>
+            <a:srgbClr val="F6F9FD"/>
           </a:solidFill>
           <a:ln w="9525">
             <a:solidFill>
-              <a:srgbClr val="E6DFD8"/>
+              <a:srgbClr val="D6E3F1"/>
             </a:solidFill>
           </a:ln>
           <a:effectLst/>
@@ -17048,46 +17148,32 @@
           </a:fontRef>
         </p:style>
         <p:txBody>
-          <a:bodyPr rtlCol="0" anchor="ctr" wrap="square" lIns="50800" rIns="50800" tIns="12700" bIns="12700"/>
+          <a:bodyPr rtlCol="0" anchor="ctr"/>
           <a:lstStyle/>
           <a:p>
             <a:pPr algn="ctr"/>
-            <a:r>
-              <a:rPr sz="850" b="0">
-                <a:solidFill>
-                  <a:srgbClr val="3D3D3A"/>
-                </a:solidFill>
-                <a:latin typeface="Pretendard"/>
-                <a:ea typeface="Pretendard"/>
-              </a:rPr>
-              <a:t>공식 경보(금융위·국토부)</a:t>
-            </a:r>
-          </a:p>
-        </p:txBody>
-      </p:sp>
-      <p:sp>
-        <p:nvSpPr>
-          <p:cNvPr id="24" name="Rounded Rectangle 23"/>
+          </a:p>
+        </p:txBody>
+      </p:sp>
+      <p:sp>
+        <p:nvSpPr>
+          <p:cNvPr id="27" name="Oval 26"/>
           <p:cNvSpPr/>
           <p:nvPr/>
         </p:nvSpPr>
         <p:spPr>
           <a:xfrm>
-            <a:off x="5897880" y="2084832"/>
-            <a:ext cx="1600200" cy="310896"/>
-          </a:xfrm>
-          <a:prstGeom prst="roundRect">
-            <a:avLst>
-              <a:gd name="adj" fmla="val 50000"/>
-            </a:avLst>
+            <a:off x="6199632" y="2628900"/>
+            <a:ext cx="210312" cy="210312"/>
+          </a:xfrm>
+          <a:prstGeom prst="ellipse">
+            <a:avLst/>
           </a:prstGeom>
           <a:solidFill>
-            <a:srgbClr val="FFFFFF"/>
+            <a:srgbClr val="0B6FB3"/>
           </a:solidFill>
-          <a:ln w="9525">
-            <a:solidFill>
-              <a:srgbClr val="E6DFD8"/>
-            </a:solidFill>
+          <a:ln>
+            <a:noFill/>
           </a:ln>
           <a:effectLst/>
         </p:spPr>
@@ -17106,81 +17192,126 @@
           </a:fontRef>
         </p:style>
         <p:txBody>
-          <a:bodyPr rtlCol="0" anchor="ctr" wrap="square" lIns="50800" rIns="50800" tIns="12700" bIns="12700"/>
+          <a:bodyPr rtlCol="0" anchor="ctr" lIns="0" rIns="0" tIns="0" bIns="0"/>
           <a:lstStyle/>
           <a:p>
             <a:pPr algn="ctr"/>
             <a:r>
-              <a:rPr sz="850" b="0">
-                <a:solidFill>
-                  <a:srgbClr val="3D3D3A"/>
+              <a:rPr sz="850" b="1">
+                <a:solidFill>
+                  <a:srgbClr val="FFFFFF"/>
                 </a:solidFill>
                 <a:latin typeface="Pretendard"/>
                 <a:ea typeface="Pretendard"/>
               </a:rPr>
-              <a:t>시세 · 등기(HUG 안심전세)</a:t>
+              <a:t>2</a:t>
             </a:r>
           </a:p>
         </p:txBody>
       </p:sp>
-      <p:cxnSp>
-        <p:nvCxnSpPr>
-          <p:cNvPr id="25" name="Connector 24"/>
-          <p:cNvCxnSpPr/>
-          <p:nvPr/>
-        </p:nvCxnSpPr>
-        <p:spPr>
-          <a:xfrm>
-            <a:off x="4114800" y="2523744"/>
-            <a:ext cx="0" cy="182880"/>
-          </a:xfrm>
-          <a:prstGeom prst="line">
-            <a:avLst/>
-          </a:prstGeom>
-          <a:ln w="17780">
-            <a:solidFill>
-              <a:srgbClr val="6C6A64"/>
-            </a:solidFill>
-            <a:tailEnd type="triangle" w="med" len="med"/>
-          </a:ln>
-          <a:effectLst/>
-        </p:spPr>
-        <p:style>
-          <a:lnRef idx="2">
-            <a:schemeClr val="accent1"/>
-          </a:lnRef>
-          <a:fillRef idx="0">
-            <a:schemeClr val="accent1"/>
-          </a:fillRef>
-          <a:effectRef idx="1">
-            <a:schemeClr val="accent1"/>
-          </a:effectRef>
-          <a:fontRef idx="minor">
-            <a:schemeClr val="tx1"/>
-          </a:fontRef>
-        </p:style>
-      </p:cxnSp>
-      <p:sp>
-        <p:nvSpPr>
-          <p:cNvPr id="26" name="Rounded Rectangle 25"/>
+      <p:sp>
+        <p:nvSpPr>
+          <p:cNvPr id="28" name="TextBox 27"/>
+          <p:cNvSpPr txBox="1"/>
+          <p:nvPr/>
+        </p:nvSpPr>
+        <p:spPr>
+          <a:xfrm>
+            <a:off x="6510528" y="2578608"/>
+            <a:ext cx="1188720" cy="310896"/>
+          </a:xfrm>
+          <a:prstGeom prst="rect">
+            <a:avLst/>
+          </a:prstGeom>
+          <a:noFill/>
+        </p:spPr>
+        <p:txBody>
+          <a:bodyPr wrap="square" anchor="ctr" lIns="0" rIns="0" tIns="0" bIns="0">
+            <a:spAutoFit/>
+          </a:bodyPr>
+          <a:lstStyle/>
+          <a:p>
+            <a:pPr algn="l">
+              <a:spcAft>
+                <a:spcPts val="200"/>
+              </a:spcAft>
+            </a:pPr>
+            <a:r>
+              <a:rPr sz="900" b="1">
+                <a:solidFill>
+                  <a:srgbClr val="0F1F3A"/>
+                </a:solidFill>
+                <a:latin typeface="Pretendard"/>
+                <a:ea typeface="Pretendard"/>
+              </a:rPr>
+              <a:t>에이전트 실행</a:t>
+            </a:r>
+          </a:p>
+        </p:txBody>
+      </p:sp>
+      <p:sp>
+        <p:nvSpPr>
+          <p:cNvPr id="29" name="TextBox 28"/>
+          <p:cNvSpPr txBox="1"/>
+          <p:nvPr/>
+        </p:nvSpPr>
+        <p:spPr>
+          <a:xfrm>
+            <a:off x="7726679" y="2578608"/>
+            <a:ext cx="3611879" cy="310896"/>
+          </a:xfrm>
+          <a:prstGeom prst="rect">
+            <a:avLst/>
+          </a:prstGeom>
+          <a:noFill/>
+        </p:spPr>
+        <p:txBody>
+          <a:bodyPr wrap="square" anchor="ctr" lIns="0" rIns="0" tIns="0" bIns="0">
+            <a:spAutoFit/>
+          </a:bodyPr>
+          <a:lstStyle/>
+          <a:p>
+            <a:pPr algn="l">
+              <a:spcAft>
+                <a:spcPts val="200"/>
+              </a:spcAft>
+            </a:pPr>
+            <a:r>
+              <a:rPr sz="800" b="0">
+                <a:solidFill>
+                  <a:srgbClr val="637797"/>
+                </a:solidFill>
+                <a:latin typeface="Pretendard"/>
+                <a:ea typeface="Pretendard"/>
+              </a:rPr>
+              <a:t>스킬을 장착하고 근거 수집 · 위험 판단</a:t>
+            </a:r>
+          </a:p>
+        </p:txBody>
+      </p:sp>
+      <p:sp>
+        <p:nvSpPr>
+          <p:cNvPr id="30" name="Rounded Rectangle 29"/>
           <p:cNvSpPr/>
           <p:nvPr/>
         </p:nvSpPr>
         <p:spPr>
           <a:xfrm>
-            <a:off x="868680" y="2724912"/>
-            <a:ext cx="6492240" cy="1591056"/>
+            <a:off x="6126480" y="2962656"/>
+            <a:ext cx="5349240" cy="347472"/>
           </a:xfrm>
           <a:prstGeom prst="roundRect">
             <a:avLst>
-              <a:gd name="adj" fmla="val 6000"/>
+              <a:gd name="adj" fmla="val 8000"/>
             </a:avLst>
           </a:prstGeom>
           <a:solidFill>
-            <a:srgbClr val="181715"/>
+            <a:srgbClr val="F6F9FD"/>
           </a:solidFill>
-          <a:ln>
-            <a:noFill/>
+          <a:ln w="9525">
+            <a:solidFill>
+              <a:srgbClr val="D6E3F1"/>
+            </a:solidFill>
           </a:ln>
           <a:effectLst/>
         </p:spPr>
@@ -17208,102 +17339,20 @@
       </p:sp>
       <p:sp>
         <p:nvSpPr>
-          <p:cNvPr id="27" name="TextBox 26"/>
-          <p:cNvSpPr txBox="1"/>
-          <p:nvPr/>
-        </p:nvSpPr>
-        <p:spPr>
-          <a:xfrm>
-            <a:off x="1014983" y="2807208"/>
-            <a:ext cx="4023360" cy="219456"/>
-          </a:xfrm>
-          <a:prstGeom prst="rect">
-            <a:avLst/>
-          </a:prstGeom>
-          <a:noFill/>
-        </p:spPr>
-        <p:txBody>
-          <a:bodyPr wrap="square" anchor="t" lIns="0" rIns="0" tIns="0" bIns="0">
-            <a:spAutoFit/>
-          </a:bodyPr>
-          <a:lstStyle/>
-          <a:p>
-            <a:pPr algn="l">
-              <a:spcAft>
-                <a:spcPts val="200"/>
-              </a:spcAft>
-            </a:pPr>
-            <a:r>
-              <a:rPr sz="1050" b="1">
-                <a:solidFill>
-                  <a:srgbClr val="FAF9F5"/>
-                </a:solidFill>
-                <a:latin typeface="Pretendard"/>
-                <a:ea typeface="Pretendard"/>
-              </a:rPr>
-              <a:t>JB LocalGuard OS  ·  멀티 Agent 코어</a:t>
-            </a:r>
-          </a:p>
-        </p:txBody>
-      </p:sp>
-      <p:sp>
-        <p:nvSpPr>
-          <p:cNvPr id="28" name="TextBox 27"/>
-          <p:cNvSpPr txBox="1"/>
-          <p:nvPr/>
-        </p:nvSpPr>
-        <p:spPr>
-          <a:xfrm>
-            <a:off x="5074920" y="2816352"/>
-            <a:ext cx="2148839" cy="201168"/>
-          </a:xfrm>
-          <a:prstGeom prst="rect">
-            <a:avLst/>
-          </a:prstGeom>
-          <a:noFill/>
-        </p:spPr>
-        <p:txBody>
-          <a:bodyPr wrap="square" anchor="t" lIns="0" rIns="0" tIns="0" bIns="0">
-            <a:spAutoFit/>
-          </a:bodyPr>
-          <a:lstStyle/>
-          <a:p>
-            <a:pPr algn="r">
-              <a:spcAft>
-                <a:spcPts val="200"/>
-              </a:spcAft>
-            </a:pPr>
-            <a:r>
-              <a:rPr sz="850" b="1">
-                <a:solidFill>
-                  <a:srgbClr val="E8A55A"/>
-                </a:solidFill>
-                <a:latin typeface="Pretendard"/>
-                <a:ea typeface="Pretendard"/>
-              </a:rPr>
-              <a:t>Skill Registry 25종 장착</a:t>
-            </a:r>
-          </a:p>
-        </p:txBody>
-      </p:sp>
-      <p:sp>
-        <p:nvSpPr>
-          <p:cNvPr id="29" name="Rounded Rectangle 28"/>
+          <p:cNvPr id="31" name="Oval 30"/>
           <p:cNvSpPr/>
           <p:nvPr/>
         </p:nvSpPr>
         <p:spPr>
           <a:xfrm>
-            <a:off x="1014983" y="3090672"/>
-            <a:ext cx="2103120" cy="310896"/>
-          </a:xfrm>
-          <a:prstGeom prst="roundRect">
-            <a:avLst>
-              <a:gd name="adj" fmla="val 50000"/>
-            </a:avLst>
+            <a:off x="6199632" y="3031236"/>
+            <a:ext cx="210312" cy="210312"/>
+          </a:xfrm>
+          <a:prstGeom prst="ellipse">
+            <a:avLst/>
           </a:prstGeom>
           <a:solidFill>
-            <a:srgbClr val="252320"/>
+            <a:srgbClr val="0B6FB3"/>
           </a:solidFill>
           <a:ln>
             <a:noFill/>
@@ -17325,33 +17374,33 @@
           </a:fontRef>
         </p:style>
         <p:txBody>
-          <a:bodyPr rtlCol="0" anchor="ctr" wrap="square" lIns="50800" rIns="50800" tIns="12700" bIns="12700"/>
+          <a:bodyPr rtlCol="0" anchor="ctr" lIns="0" rIns="0" tIns="0" bIns="0"/>
           <a:lstStyle/>
           <a:p>
             <a:pPr algn="ctr"/>
             <a:r>
-              <a:rPr sz="900" b="1">
-                <a:solidFill>
-                  <a:srgbClr val="FAF9F5"/>
+              <a:rPr sz="850" b="1">
+                <a:solidFill>
+                  <a:srgbClr val="FFFFFF"/>
                 </a:solidFill>
                 <a:latin typeface="Pretendard"/>
                 <a:ea typeface="Pretendard"/>
               </a:rPr>
-              <a:t>LocalGuard Orchestrator</a:t>
+              <a:t>3</a:t>
             </a:r>
           </a:p>
         </p:txBody>
       </p:sp>
       <p:sp>
         <p:nvSpPr>
-          <p:cNvPr id="30" name="TextBox 29"/>
+          <p:cNvPr id="32" name="TextBox 31"/>
           <p:cNvSpPr txBox="1"/>
           <p:nvPr/>
         </p:nvSpPr>
         <p:spPr>
           <a:xfrm>
-            <a:off x="3172968" y="3127248"/>
-            <a:ext cx="4023359" cy="219456"/>
+            <a:off x="6510528" y="2980944"/>
+            <a:ext cx="1188720" cy="310896"/>
           </a:xfrm>
           <a:prstGeom prst="rect">
             <a:avLst/>
@@ -17359,7 +17408,7 @@
           <a:noFill/>
         </p:spPr>
         <p:txBody>
-          <a:bodyPr wrap="square" anchor="t" lIns="0" rIns="0" tIns="0" bIns="0">
+          <a:bodyPr wrap="square" anchor="ctr" lIns="0" rIns="0" tIns="0" bIns="0">
             <a:spAutoFit/>
           </a:bodyPr>
           <a:lstStyle/>
@@ -17370,39 +17419,81 @@
               </a:spcAft>
             </a:pPr>
             <a:r>
-              <a:rPr sz="850" b="0">
-                <a:solidFill>
-                  <a:srgbClr val="A09D96"/>
+              <a:rPr sz="900" b="1">
+                <a:solidFill>
+                  <a:srgbClr val="0F1F3A"/>
                 </a:solidFill>
                 <a:latin typeface="Pretendard"/>
                 <a:ea typeface="Pretendard"/>
               </a:rPr>
-              <a:t>지시 해석 · Agent 배정 · 승인 레벨(L0–L4) 산정</a:t>
+              <a:t>사람 승인</a:t>
             </a:r>
           </a:p>
         </p:txBody>
       </p:sp>
       <p:sp>
         <p:nvSpPr>
-          <p:cNvPr id="31" name="Rounded Rectangle 30"/>
+          <p:cNvPr id="33" name="TextBox 32"/>
+          <p:cNvSpPr txBox="1"/>
+          <p:nvPr/>
+        </p:nvSpPr>
+        <p:spPr>
+          <a:xfrm>
+            <a:off x="7726679" y="2980944"/>
+            <a:ext cx="3611879" cy="310896"/>
+          </a:xfrm>
+          <a:prstGeom prst="rect">
+            <a:avLst/>
+          </a:prstGeom>
+          <a:noFill/>
+        </p:spPr>
+        <p:txBody>
+          <a:bodyPr wrap="square" anchor="ctr" lIns="0" rIns="0" tIns="0" bIns="0">
+            <a:spAutoFit/>
+          </a:bodyPr>
+          <a:lstStyle/>
+          <a:p>
+            <a:pPr algn="l">
+              <a:spcAft>
+                <a:spcPts val="200"/>
+              </a:spcAft>
+            </a:pPr>
+            <a:r>
+              <a:rPr sz="800" b="0">
+                <a:solidFill>
+                  <a:srgbClr val="637797"/>
+                </a:solidFill>
+                <a:latin typeface="Pretendard"/>
+                <a:ea typeface="Pretendard"/>
+              </a:rPr>
+              <a:t>조치 초안을 사람이 검토 — 승인 / 반려</a:t>
+            </a:r>
+          </a:p>
+        </p:txBody>
+      </p:sp>
+      <p:sp>
+        <p:nvSpPr>
+          <p:cNvPr id="34" name="Rounded Rectangle 33"/>
           <p:cNvSpPr/>
           <p:nvPr/>
         </p:nvSpPr>
         <p:spPr>
           <a:xfrm>
-            <a:off x="1014983" y="3493008"/>
-            <a:ext cx="957072" cy="310896"/>
+            <a:off x="6126480" y="3364992"/>
+            <a:ext cx="5349240" cy="347472"/>
           </a:xfrm>
           <a:prstGeom prst="roundRect">
             <a:avLst>
-              <a:gd name="adj" fmla="val 50000"/>
+              <a:gd name="adj" fmla="val 8000"/>
             </a:avLst>
           </a:prstGeom>
           <a:solidFill>
-            <a:srgbClr val="252320"/>
+            <a:srgbClr val="F6F9FD"/>
           </a:solidFill>
-          <a:ln>
-            <a:noFill/>
+          <a:ln w="9525">
+            <a:solidFill>
+              <a:srgbClr val="D6E3F1"/>
+            </a:solidFill>
           </a:ln>
           <a:effectLst/>
         </p:spPr>
@@ -17421,41 +17512,29 @@
           </a:fontRef>
         </p:style>
         <p:txBody>
-          <a:bodyPr rtlCol="0" anchor="ctr" wrap="square" lIns="50800" rIns="50800" tIns="12700" bIns="12700"/>
+          <a:bodyPr rtlCol="0" anchor="ctr"/>
           <a:lstStyle/>
           <a:p>
             <a:pPr algn="ctr"/>
-            <a:r>
-              <a:rPr sz="800" b="1">
-                <a:solidFill>
-                  <a:srgbClr val="FAF9F5"/>
-                </a:solidFill>
-                <a:latin typeface="Pretendard"/>
-                <a:ea typeface="Pretendard"/>
-              </a:rPr>
-              <a:t>Pain Radar</a:t>
-            </a:r>
-          </a:p>
-        </p:txBody>
-      </p:sp>
-      <p:sp>
-        <p:nvSpPr>
-          <p:cNvPr id="32" name="Rounded Rectangle 31"/>
+          </a:p>
+        </p:txBody>
+      </p:sp>
+      <p:sp>
+        <p:nvSpPr>
+          <p:cNvPr id="35" name="Oval 34"/>
           <p:cNvSpPr/>
           <p:nvPr/>
         </p:nvSpPr>
         <p:spPr>
           <a:xfrm>
-            <a:off x="2063496" y="3493008"/>
-            <a:ext cx="957072" cy="310896"/>
-          </a:xfrm>
-          <a:prstGeom prst="roundRect">
-            <a:avLst>
-              <a:gd name="adj" fmla="val 50000"/>
-            </a:avLst>
+            <a:off x="6199632" y="3433572"/>
+            <a:ext cx="210312" cy="210312"/>
+          </a:xfrm>
+          <a:prstGeom prst="ellipse">
+            <a:avLst/>
           </a:prstGeom>
           <a:solidFill>
-            <a:srgbClr val="252320"/>
+            <a:srgbClr val="0B6FB3"/>
           </a:solidFill>
           <a:ln>
             <a:noFill/>
@@ -17477,44 +17556,176 @@
           </a:fontRef>
         </p:style>
         <p:txBody>
-          <a:bodyPr rtlCol="0" anchor="ctr" wrap="square" lIns="50800" rIns="50800" tIns="12700" bIns="12700"/>
+          <a:bodyPr rtlCol="0" anchor="ctr" lIns="0" rIns="0" tIns="0" bIns="0"/>
           <a:lstStyle/>
           <a:p>
             <a:pPr algn="ctr"/>
             <a:r>
-              <a:rPr sz="800" b="1">
-                <a:solidFill>
-                  <a:srgbClr val="FAF9F5"/>
+              <a:rPr sz="850" b="1">
+                <a:solidFill>
+                  <a:srgbClr val="FFFFFF"/>
                 </a:solidFill>
                 <a:latin typeface="Pretendard"/>
                 <a:ea typeface="Pretendard"/>
               </a:rPr>
-              <a:t>Cashflow Triage</a:t>
+              <a:t>4</a:t>
             </a:r>
           </a:p>
         </p:txBody>
       </p:sp>
       <p:sp>
         <p:nvSpPr>
-          <p:cNvPr id="33" name="Rounded Rectangle 32"/>
+          <p:cNvPr id="36" name="TextBox 35"/>
+          <p:cNvSpPr txBox="1"/>
+          <p:nvPr/>
+        </p:nvSpPr>
+        <p:spPr>
+          <a:xfrm>
+            <a:off x="6510528" y="3383280"/>
+            <a:ext cx="1188720" cy="310896"/>
+          </a:xfrm>
+          <a:prstGeom prst="rect">
+            <a:avLst/>
+          </a:prstGeom>
+          <a:noFill/>
+        </p:spPr>
+        <p:txBody>
+          <a:bodyPr wrap="square" anchor="ctr" lIns="0" rIns="0" tIns="0" bIns="0">
+            <a:spAutoFit/>
+          </a:bodyPr>
+          <a:lstStyle/>
+          <a:p>
+            <a:pPr algn="l">
+              <a:spcAft>
+                <a:spcPts val="200"/>
+              </a:spcAft>
+            </a:pPr>
+            <a:r>
+              <a:rPr sz="900" b="1">
+                <a:solidFill>
+                  <a:srgbClr val="0F1F3A"/>
+                </a:solidFill>
+                <a:latin typeface="Pretendard"/>
+                <a:ea typeface="Pretendard"/>
+              </a:rPr>
+              <a:t>감사 기록</a:t>
+            </a:r>
+          </a:p>
+        </p:txBody>
+      </p:sp>
+      <p:sp>
+        <p:nvSpPr>
+          <p:cNvPr id="37" name="TextBox 36"/>
+          <p:cNvSpPr txBox="1"/>
+          <p:nvPr/>
+        </p:nvSpPr>
+        <p:spPr>
+          <a:xfrm>
+            <a:off x="7726679" y="3383280"/>
+            <a:ext cx="3611879" cy="310896"/>
+          </a:xfrm>
+          <a:prstGeom prst="rect">
+            <a:avLst/>
+          </a:prstGeom>
+          <a:noFill/>
+        </p:spPr>
+        <p:txBody>
+          <a:bodyPr wrap="square" anchor="ctr" lIns="0" rIns="0" tIns="0" bIns="0">
+            <a:spAutoFit/>
+          </a:bodyPr>
+          <a:lstStyle/>
+          <a:p>
+            <a:pPr algn="l">
+              <a:spcAft>
+                <a:spcPts val="200"/>
+              </a:spcAft>
+            </a:pPr>
+            <a:r>
+              <a:rPr sz="800" b="0">
+                <a:solidFill>
+                  <a:srgbClr val="637797"/>
+                </a:solidFill>
+                <a:latin typeface="Pretendard"/>
+                <a:ea typeface="Pretendard"/>
+              </a:rPr>
+              <a:t>모든 판단 · 행동 · 승인이 활동 이력으로 남음</a:t>
+            </a:r>
+          </a:p>
+        </p:txBody>
+      </p:sp>
+      <p:sp>
+        <p:nvSpPr>
+          <p:cNvPr id="38" name="TextBox 37"/>
+          <p:cNvSpPr txBox="1"/>
+          <p:nvPr/>
+        </p:nvSpPr>
+        <p:spPr>
+          <a:xfrm>
+            <a:off x="6126480" y="3858768"/>
+            <a:ext cx="5349240" cy="201168"/>
+          </a:xfrm>
+          <a:prstGeom prst="rect">
+            <a:avLst/>
+          </a:prstGeom>
+          <a:noFill/>
+        </p:spPr>
+        <p:txBody>
+          <a:bodyPr wrap="square" anchor="t" lIns="0" rIns="0" tIns="0" bIns="0">
+            <a:spAutoFit/>
+          </a:bodyPr>
+          <a:lstStyle/>
+          <a:p>
+            <a:pPr algn="l">
+              <a:spcAft>
+                <a:spcPts val="200"/>
+              </a:spcAft>
+            </a:pPr>
+            <a:r>
+              <a:rPr sz="1050" b="1">
+                <a:solidFill>
+                  <a:srgbClr val="0F1F3A"/>
+                </a:solidFill>
+                <a:latin typeface="Pretendard"/>
+                <a:ea typeface="Pretendard"/>
+              </a:rPr>
+              <a:t>승인 · 통제 흐름  </a:t>
+            </a:r>
+            <a:r>
+              <a:rPr sz="850" b="0">
+                <a:solidFill>
+                  <a:srgbClr val="637797"/>
+                </a:solidFill>
+                <a:latin typeface="Pretendard"/>
+                <a:ea typeface="Pretendard"/>
+              </a:rPr>
+              <a:t>— 승인 레벨 L0–L4</a:t>
+            </a:r>
+          </a:p>
+        </p:txBody>
+      </p:sp>
+      <p:sp>
+        <p:nvSpPr>
+          <p:cNvPr id="39" name="Rounded Rectangle 38"/>
           <p:cNvSpPr/>
           <p:nvPr/>
         </p:nvSpPr>
         <p:spPr>
           <a:xfrm>
-            <a:off x="3112008" y="3493008"/>
-            <a:ext cx="957072" cy="310896"/>
+            <a:off x="6126480" y="4096511"/>
+            <a:ext cx="5349240" cy="1368108"/>
           </a:xfrm>
           <a:prstGeom prst="roundRect">
             <a:avLst>
-              <a:gd name="adj" fmla="val 50000"/>
+              <a:gd name="adj" fmla="val 8000"/>
             </a:avLst>
           </a:prstGeom>
           <a:solidFill>
-            <a:srgbClr val="252320"/>
+            <a:srgbClr val="FFFFFF"/>
           </a:solidFill>
-          <a:ln>
-            <a:noFill/>
+          <a:ln w="9525">
+            <a:solidFill>
+              <a:srgbClr val="D6E3F1"/>
+            </a:solidFill>
           </a:ln>
           <a:effectLst/>
         </p:spPr>
@@ -17533,33 +17744,47 @@
           </a:fontRef>
         </p:style>
         <p:txBody>
-          <a:bodyPr rtlCol="0" anchor="ctr" wrap="square" lIns="50800" rIns="50800" tIns="12700" bIns="12700"/>
+          <a:bodyPr rtlCol="0" anchor="ctr"/>
           <a:lstStyle/>
           <a:p>
             <a:pPr algn="ctr"/>
-            <a:r>
-              <a:rPr sz="800" b="1">
-                <a:solidFill>
-                  <a:srgbClr val="FAF9F5"/>
-                </a:solidFill>
-                <a:latin typeface="Pretendard"/>
-                <a:ea typeface="Pretendard"/>
-              </a:rPr>
-              <a:t>Policy Match</a:t>
-            </a:r>
-          </a:p>
-        </p:txBody>
-      </p:sp>
-      <p:sp>
-        <p:nvSpPr>
-          <p:cNvPr id="34" name="Rounded Rectangle 33"/>
+          </a:p>
+        </p:txBody>
+      </p:sp>
+      <p:pic>
+        <p:nvPicPr>
+          <p:cNvPr id="40" name="Picture 39" descr="approval.png"/>
+          <p:cNvPicPr>
+            <a:picLocks noChangeAspect="1"/>
+          </p:cNvPicPr>
+          <p:nvPr/>
+        </p:nvPicPr>
+        <p:blipFill>
+          <a:blip r:embed="rId5"/>
+          <a:stretch>
+            <a:fillRect/>
+          </a:stretch>
+        </p:blipFill>
+        <p:spPr>
+          <a:xfrm>
+            <a:off x="6172200" y="4142231"/>
+            <a:ext cx="5257800" cy="1254844"/>
+          </a:xfrm>
+          <a:prstGeom prst="rect">
+            <a:avLst/>
+          </a:prstGeom>
+        </p:spPr>
+      </p:pic>
+      <p:sp>
+        <p:nvSpPr>
+          <p:cNvPr id="41" name="Rounded Rectangle 40"/>
           <p:cNvSpPr/>
           <p:nvPr/>
         </p:nvSpPr>
         <p:spPr>
           <a:xfrm>
-            <a:off x="4160520" y="3493008"/>
-            <a:ext cx="957072" cy="310896"/>
+            <a:off x="868680" y="5541264"/>
+            <a:ext cx="10607040" cy="274320"/>
           </a:xfrm>
           <a:prstGeom prst="roundRect">
             <a:avLst>
@@ -17567,7 +17792,7 @@
             </a:avLst>
           </a:prstGeom>
           <a:solidFill>
-            <a:srgbClr val="252320"/>
+            <a:srgbClr val="091C4D"/>
           </a:solidFill>
           <a:ln>
             <a:noFill/>
@@ -17589,174 +17814,6 @@
           </a:fontRef>
         </p:style>
         <p:txBody>
-          <a:bodyPr rtlCol="0" anchor="ctr" wrap="square" lIns="50800" rIns="50800" tIns="12700" bIns="12700"/>
-          <a:lstStyle/>
-          <a:p>
-            <a:pPr algn="ctr"/>
-            <a:r>
-              <a:rPr sz="800" b="1">
-                <a:solidFill>
-                  <a:srgbClr val="FAF9F5"/>
-                </a:solidFill>
-                <a:latin typeface="Pretendard"/>
-                <a:ea typeface="Pretendard"/>
-              </a:rPr>
-              <a:t>Fraud Shield</a:t>
-            </a:r>
-          </a:p>
-        </p:txBody>
-      </p:sp>
-      <p:sp>
-        <p:nvSpPr>
-          <p:cNvPr id="35" name="Rounded Rectangle 34"/>
-          <p:cNvSpPr/>
-          <p:nvPr/>
-        </p:nvSpPr>
-        <p:spPr>
-          <a:xfrm>
-            <a:off x="5209032" y="3493008"/>
-            <a:ext cx="957072" cy="310896"/>
-          </a:xfrm>
-          <a:prstGeom prst="roundRect">
-            <a:avLst>
-              <a:gd name="adj" fmla="val 50000"/>
-            </a:avLst>
-          </a:prstGeom>
-          <a:solidFill>
-            <a:srgbClr val="252320"/>
-          </a:solidFill>
-          <a:ln>
-            <a:noFill/>
-          </a:ln>
-          <a:effectLst/>
-        </p:spPr>
-        <p:style>
-          <a:lnRef idx="1">
-            <a:schemeClr val="accent1"/>
-          </a:lnRef>
-          <a:fillRef idx="3">
-            <a:schemeClr val="accent1"/>
-          </a:fillRef>
-          <a:effectRef idx="2">
-            <a:schemeClr val="accent1"/>
-          </a:effectRef>
-          <a:fontRef idx="minor">
-            <a:schemeClr val="lt1"/>
-          </a:fontRef>
-        </p:style>
-        <p:txBody>
-          <a:bodyPr rtlCol="0" anchor="ctr" wrap="square" lIns="50800" rIns="50800" tIns="12700" bIns="12700"/>
-          <a:lstStyle/>
-          <a:p>
-            <a:pPr algn="ctr"/>
-            <a:r>
-              <a:rPr sz="800" b="1">
-                <a:solidFill>
-                  <a:srgbClr val="FAF9F5"/>
-                </a:solidFill>
-                <a:latin typeface="Pretendard"/>
-                <a:ea typeface="Pretendard"/>
-              </a:rPr>
-              <a:t>RM Copilot</a:t>
-            </a:r>
-          </a:p>
-        </p:txBody>
-      </p:sp>
-      <p:sp>
-        <p:nvSpPr>
-          <p:cNvPr id="36" name="Rounded Rectangle 35"/>
-          <p:cNvSpPr/>
-          <p:nvPr/>
-        </p:nvSpPr>
-        <p:spPr>
-          <a:xfrm>
-            <a:off x="6257544" y="3493008"/>
-            <a:ext cx="957072" cy="310896"/>
-          </a:xfrm>
-          <a:prstGeom prst="roundRect">
-            <a:avLst>
-              <a:gd name="adj" fmla="val 50000"/>
-            </a:avLst>
-          </a:prstGeom>
-          <a:solidFill>
-            <a:srgbClr val="252320"/>
-          </a:solidFill>
-          <a:ln>
-            <a:noFill/>
-          </a:ln>
-          <a:effectLst/>
-        </p:spPr>
-        <p:style>
-          <a:lnRef idx="1">
-            <a:schemeClr val="accent1"/>
-          </a:lnRef>
-          <a:fillRef idx="3">
-            <a:schemeClr val="accent1"/>
-          </a:fillRef>
-          <a:effectRef idx="2">
-            <a:schemeClr val="accent1"/>
-          </a:effectRef>
-          <a:fontRef idx="minor">
-            <a:schemeClr val="lt1"/>
-          </a:fontRef>
-        </p:style>
-        <p:txBody>
-          <a:bodyPr rtlCol="0" anchor="ctr" wrap="square" lIns="50800" rIns="50800" tIns="12700" bIns="12700"/>
-          <a:lstStyle/>
-          <a:p>
-            <a:pPr algn="ctr"/>
-            <a:r>
-              <a:rPr sz="800" b="1">
-                <a:solidFill>
-                  <a:srgbClr val="FAF9F5"/>
-                </a:solidFill>
-                <a:latin typeface="Pretendard"/>
-                <a:ea typeface="Pretendard"/>
-              </a:rPr>
-              <a:t>Compliance Guard</a:t>
-            </a:r>
-          </a:p>
-        </p:txBody>
-      </p:sp>
-      <p:sp>
-        <p:nvSpPr>
-          <p:cNvPr id="37" name="Rounded Rectangle 36"/>
-          <p:cNvSpPr/>
-          <p:nvPr/>
-        </p:nvSpPr>
-        <p:spPr>
-          <a:xfrm>
-            <a:off x="1014983" y="3877056"/>
-            <a:ext cx="6199631" cy="329184"/>
-          </a:xfrm>
-          <a:prstGeom prst="roundRect">
-            <a:avLst>
-              <a:gd name="adj" fmla="val 50000"/>
-            </a:avLst>
-          </a:prstGeom>
-          <a:solidFill>
-            <a:srgbClr val="252320"/>
-          </a:solidFill>
-          <a:ln>
-            <a:noFill/>
-          </a:ln>
-          <a:effectLst/>
-        </p:spPr>
-        <p:style>
-          <a:lnRef idx="1">
-            <a:schemeClr val="accent1"/>
-          </a:lnRef>
-          <a:fillRef idx="3">
-            <a:schemeClr val="accent1"/>
-          </a:fillRef>
-          <a:effectRef idx="2">
-            <a:schemeClr val="accent1"/>
-          </a:effectRef>
-          <a:fontRef idx="minor">
-            <a:schemeClr val="lt1"/>
-          </a:fontRef>
-        </p:style>
-        <p:txBody>
           <a:bodyPr rtlCol="0" anchor="ctr"/>
           <a:lstStyle/>
           <a:p>
@@ -17766,14 +17823,14 @@
       </p:sp>
       <p:sp>
         <p:nvSpPr>
-          <p:cNvPr id="38" name="TextBox 37"/>
+          <p:cNvPr id="42" name="TextBox 41"/>
           <p:cNvSpPr txBox="1"/>
           <p:nvPr/>
         </p:nvSpPr>
         <p:spPr>
           <a:xfrm>
-            <a:off x="1161288" y="3941064"/>
-            <a:ext cx="5943600" cy="219456"/>
+            <a:off x="1143000" y="5591555"/>
+            <a:ext cx="10058400" cy="201168"/>
           </a:xfrm>
           <a:prstGeom prst="rect">
             <a:avLst/>
@@ -17794,1496 +17851,22 @@
             <a:r>
               <a:rPr sz="850" b="1">
                 <a:solidFill>
-                  <a:srgbClr val="5DB8A6"/>
+                  <a:srgbClr val="1CA9D6"/>
                 </a:solidFill>
                 <a:latin typeface="Pretendard"/>
                 <a:ea typeface="Pretendard"/>
               </a:rPr>
-              <a:t>Jeonse Shield 라인 (5 Agent)  </a:t>
+              <a:t>설계 원칙  </a:t>
             </a:r>
             <a:r>
               <a:rPr sz="850" b="0">
                 <a:solidFill>
-                  <a:srgbClr val="A09D96"/>
+                  <a:srgbClr val="EDF4FB"/>
                 </a:solidFill>
                 <a:latin typeface="Pretendard"/>
                 <a:ea typeface="Pretendard"/>
               </a:rPr>
-              <a:t>전세가율 · 권리관계 · 자산 리스크 · 계약 체크리스트 · 은행 연계</a:t>
-            </a:r>
-          </a:p>
-        </p:txBody>
-      </p:sp>
-      <p:cxnSp>
-        <p:nvCxnSpPr>
-          <p:cNvPr id="39" name="Connector 38"/>
-          <p:cNvCxnSpPr/>
-          <p:nvPr/>
-        </p:nvCxnSpPr>
-        <p:spPr>
-          <a:xfrm>
-            <a:off x="4114800" y="4315968"/>
-            <a:ext cx="0" cy="182880"/>
-          </a:xfrm>
-          <a:prstGeom prst="line">
-            <a:avLst/>
-          </a:prstGeom>
-          <a:ln w="17780">
-            <a:solidFill>
-              <a:srgbClr val="6C6A64"/>
-            </a:solidFill>
-            <a:tailEnd type="triangle" w="med" len="med"/>
-          </a:ln>
-          <a:effectLst/>
-        </p:spPr>
-        <p:style>
-          <a:lnRef idx="2">
-            <a:schemeClr val="accent1"/>
-          </a:lnRef>
-          <a:fillRef idx="0">
-            <a:schemeClr val="accent1"/>
-          </a:fillRef>
-          <a:effectRef idx="1">
-            <a:schemeClr val="accent1"/>
-          </a:effectRef>
-          <a:fontRef idx="minor">
-            <a:schemeClr val="tx1"/>
-          </a:fontRef>
-        </p:style>
-      </p:cxnSp>
-      <p:sp>
-        <p:nvSpPr>
-          <p:cNvPr id="40" name="Rounded Rectangle 39"/>
-          <p:cNvSpPr/>
-          <p:nvPr/>
-        </p:nvSpPr>
-        <p:spPr>
-          <a:xfrm>
-            <a:off x="868680" y="4517136"/>
-            <a:ext cx="6492240" cy="475488"/>
-          </a:xfrm>
-          <a:prstGeom prst="roundRect">
-            <a:avLst>
-              <a:gd name="adj" fmla="val 8000"/>
-            </a:avLst>
-          </a:prstGeom>
-          <a:solidFill>
-            <a:srgbClr val="CC785C"/>
-          </a:solidFill>
-          <a:ln>
-            <a:noFill/>
-          </a:ln>
-          <a:effectLst/>
-        </p:spPr>
-        <p:style>
-          <a:lnRef idx="1">
-            <a:schemeClr val="accent1"/>
-          </a:lnRef>
-          <a:fillRef idx="3">
-            <a:schemeClr val="accent1"/>
-          </a:fillRef>
-          <a:effectRef idx="2">
-            <a:schemeClr val="accent1"/>
-          </a:effectRef>
-          <a:fontRef idx="minor">
-            <a:schemeClr val="lt1"/>
-          </a:fontRef>
-        </p:style>
-        <p:txBody>
-          <a:bodyPr rtlCol="0" anchor="ctr"/>
-          <a:lstStyle/>
-          <a:p>
-            <a:pPr algn="ctr"/>
-          </a:p>
-        </p:txBody>
-      </p:sp>
-      <p:sp>
-        <p:nvSpPr>
-          <p:cNvPr id="41" name="TextBox 40"/>
-          <p:cNvSpPr txBox="1"/>
-          <p:nvPr/>
-        </p:nvSpPr>
-        <p:spPr>
-          <a:xfrm>
-            <a:off x="1014983" y="4636007"/>
-            <a:ext cx="6199631" cy="256032"/>
-          </a:xfrm>
-          <a:prstGeom prst="rect">
-            <a:avLst/>
-          </a:prstGeom>
-          <a:noFill/>
-        </p:spPr>
-        <p:txBody>
-          <a:bodyPr wrap="square" anchor="t" lIns="0" rIns="0" tIns="0" bIns="0">
-            <a:spAutoFit/>
-          </a:bodyPr>
-          <a:lstStyle/>
-          <a:p>
-            <a:pPr algn="l">
-              <a:spcAft>
-                <a:spcPts val="200"/>
-              </a:spcAft>
-            </a:pPr>
-            <a:r>
-              <a:rPr sz="1100" b="1">
-                <a:solidFill>
-                  <a:srgbClr val="FFFFFF"/>
-                </a:solidFill>
-                <a:latin typeface="Pretendard"/>
-                <a:ea typeface="Pretendard"/>
-              </a:rPr>
-              <a:t>Approval Gate  </a:t>
-            </a:r>
-            <a:r>
-              <a:rPr sz="950" b="0">
-                <a:solidFill>
-                  <a:srgbClr val="FFFFFF"/>
-                </a:solidFill>
-                <a:latin typeface="Pretendard"/>
-                <a:ea typeface="Pretendard"/>
-              </a:rPr>
-              <a:t>고객 대상 행동 · 민감 조치는 사람(RM · 준법)이 승인해야 실행</a:t>
-            </a:r>
-          </a:p>
-        </p:txBody>
-      </p:sp>
-      <p:cxnSp>
-        <p:nvCxnSpPr>
-          <p:cNvPr id="42" name="Connector 41"/>
-          <p:cNvCxnSpPr/>
-          <p:nvPr/>
-        </p:nvCxnSpPr>
-        <p:spPr>
-          <a:xfrm>
-            <a:off x="4114800" y="4992623"/>
-            <a:ext cx="0" cy="182880"/>
-          </a:xfrm>
-          <a:prstGeom prst="line">
-            <a:avLst/>
-          </a:prstGeom>
-          <a:ln w="17780">
-            <a:solidFill>
-              <a:srgbClr val="6C6A64"/>
-            </a:solidFill>
-            <a:tailEnd type="triangle" w="med" len="med"/>
-          </a:ln>
-          <a:effectLst/>
-        </p:spPr>
-        <p:style>
-          <a:lnRef idx="2">
-            <a:schemeClr val="accent1"/>
-          </a:lnRef>
-          <a:fillRef idx="0">
-            <a:schemeClr val="accent1"/>
-          </a:fillRef>
-          <a:effectRef idx="1">
-            <a:schemeClr val="accent1"/>
-          </a:effectRef>
-          <a:fontRef idx="minor">
-            <a:schemeClr val="tx1"/>
-          </a:fontRef>
-        </p:style>
-      </p:cxnSp>
-      <p:sp>
-        <p:nvSpPr>
-          <p:cNvPr id="43" name="Rounded Rectangle 42"/>
-          <p:cNvSpPr/>
-          <p:nvPr/>
-        </p:nvSpPr>
-        <p:spPr>
-          <a:xfrm>
-            <a:off x="868680" y="5193792"/>
-            <a:ext cx="3154679" cy="493776"/>
-          </a:xfrm>
-          <a:prstGeom prst="roundRect">
-            <a:avLst>
-              <a:gd name="adj" fmla="val 8000"/>
-            </a:avLst>
-          </a:prstGeom>
-          <a:solidFill>
-            <a:srgbClr val="EFE9DE"/>
-          </a:solidFill>
-          <a:ln w="9525">
-            <a:solidFill>
-              <a:srgbClr val="E6DFD8"/>
-            </a:solidFill>
-          </a:ln>
-          <a:effectLst/>
-        </p:spPr>
-        <p:style>
-          <a:lnRef idx="1">
-            <a:schemeClr val="accent1"/>
-          </a:lnRef>
-          <a:fillRef idx="3">
-            <a:schemeClr val="accent1"/>
-          </a:fillRef>
-          <a:effectRef idx="2">
-            <a:schemeClr val="accent1"/>
-          </a:effectRef>
-          <a:fontRef idx="minor">
-            <a:schemeClr val="lt1"/>
-          </a:fontRef>
-        </p:style>
-        <p:txBody>
-          <a:bodyPr rtlCol="0" anchor="ctr"/>
-          <a:lstStyle/>
-          <a:p>
-            <a:pPr algn="ctr"/>
-          </a:p>
-        </p:txBody>
-      </p:sp>
-      <p:sp>
-        <p:nvSpPr>
-          <p:cNvPr id="44" name="TextBox 43"/>
-          <p:cNvSpPr txBox="1"/>
-          <p:nvPr/>
-        </p:nvSpPr>
-        <p:spPr>
-          <a:xfrm>
-            <a:off x="996695" y="5257800"/>
-            <a:ext cx="2898648" cy="365760"/>
-          </a:xfrm>
-          <a:prstGeom prst="rect">
-            <a:avLst/>
-          </a:prstGeom>
-          <a:noFill/>
-        </p:spPr>
-        <p:txBody>
-          <a:bodyPr wrap="square" anchor="t" lIns="0" rIns="0" tIns="0" bIns="0">
-            <a:spAutoFit/>
-          </a:bodyPr>
-          <a:lstStyle/>
-          <a:p>
-            <a:pPr algn="l">
-              <a:spcAft>
-                <a:spcPts val="0"/>
-              </a:spcAft>
-            </a:pPr>
-            <a:r>
-              <a:rPr sz="950" b="1">
-                <a:solidFill>
-                  <a:srgbClr val="141413"/>
-                </a:solidFill>
-                <a:latin typeface="Pretendard"/>
-                <a:ea typeface="Pretendard"/>
-              </a:rPr>
-              <a:t>Audit Ledger</a:t>
-            </a:r>
-          </a:p>
-          <a:p>
-            <a:pPr algn="l">
-              <a:spcAft>
-                <a:spcPts val="0"/>
-              </a:spcAft>
-            </a:pPr>
-            <a:r>
-              <a:rPr sz="800" b="0">
-                <a:solidFill>
-                  <a:srgbClr val="6C6A64"/>
-                </a:solidFill>
-                <a:latin typeface="Pretendard"/>
-                <a:ea typeface="Pretendard"/>
-              </a:rPr>
-              <a:t>근거 · 판단 · 행동 · 승인 전체 기록</a:t>
-            </a:r>
-          </a:p>
-        </p:txBody>
-      </p:sp>
-      <p:sp>
-        <p:nvSpPr>
-          <p:cNvPr id="45" name="Rounded Rectangle 44"/>
-          <p:cNvSpPr/>
-          <p:nvPr/>
-        </p:nvSpPr>
-        <p:spPr>
-          <a:xfrm>
-            <a:off x="4206240" y="5193792"/>
-            <a:ext cx="3154679" cy="493776"/>
-          </a:xfrm>
-          <a:prstGeom prst="roundRect">
-            <a:avLst>
-              <a:gd name="adj" fmla="val 8000"/>
-            </a:avLst>
-          </a:prstGeom>
-          <a:solidFill>
-            <a:srgbClr val="EFE9DE"/>
-          </a:solidFill>
-          <a:ln w="9525">
-            <a:solidFill>
-              <a:srgbClr val="E6DFD8"/>
-            </a:solidFill>
-          </a:ln>
-          <a:effectLst/>
-        </p:spPr>
-        <p:style>
-          <a:lnRef idx="1">
-            <a:schemeClr val="accent1"/>
-          </a:lnRef>
-          <a:fillRef idx="3">
-            <a:schemeClr val="accent1"/>
-          </a:fillRef>
-          <a:effectRef idx="2">
-            <a:schemeClr val="accent1"/>
-          </a:effectRef>
-          <a:fontRef idx="minor">
-            <a:schemeClr val="lt1"/>
-          </a:fontRef>
-        </p:style>
-        <p:txBody>
-          <a:bodyPr rtlCol="0" anchor="ctr"/>
-          <a:lstStyle/>
-          <a:p>
-            <a:pPr algn="ctr"/>
-          </a:p>
-        </p:txBody>
-      </p:sp>
-      <p:sp>
-        <p:nvSpPr>
-          <p:cNvPr id="46" name="TextBox 45"/>
-          <p:cNvSpPr txBox="1"/>
-          <p:nvPr/>
-        </p:nvSpPr>
-        <p:spPr>
-          <a:xfrm>
-            <a:off x="4334255" y="5257800"/>
-            <a:ext cx="2898648" cy="365760"/>
-          </a:xfrm>
-          <a:prstGeom prst="rect">
-            <a:avLst/>
-          </a:prstGeom>
-          <a:noFill/>
-        </p:spPr>
-        <p:txBody>
-          <a:bodyPr wrap="square" anchor="t" lIns="0" rIns="0" tIns="0" bIns="0">
-            <a:spAutoFit/>
-          </a:bodyPr>
-          <a:lstStyle/>
-          <a:p>
-            <a:pPr algn="l">
-              <a:spcAft>
-                <a:spcPts val="0"/>
-              </a:spcAft>
-            </a:pPr>
-            <a:r>
-              <a:rPr sz="950" b="1">
-                <a:solidFill>
-                  <a:srgbClr val="141413"/>
-                </a:solidFill>
-                <a:latin typeface="Pretendard"/>
-                <a:ea typeface="Pretendard"/>
-              </a:rPr>
-              <a:t>RM 콘솔 · 고객 안내(승인 후)</a:t>
-            </a:r>
-          </a:p>
-          <a:p>
-            <a:pPr algn="l">
-              <a:spcAft>
-                <a:spcPts val="0"/>
-              </a:spcAft>
-            </a:pPr>
-            <a:r>
-              <a:rPr sz="800" b="0">
-                <a:solidFill>
-                  <a:srgbClr val="6C6A64"/>
-                </a:solidFill>
-                <a:latin typeface="Pretendard"/>
-                <a:ea typeface="Pretendard"/>
-              </a:rPr>
-              <a:t>콜백 초안 · 체크리스트 · 은행 서비스 연계</a:t>
-            </a:r>
-          </a:p>
-        </p:txBody>
-      </p:sp>
-      <p:sp>
-        <p:nvSpPr>
-          <p:cNvPr id="47" name="TextBox 46"/>
-          <p:cNvSpPr txBox="1"/>
-          <p:nvPr/>
-        </p:nvSpPr>
-        <p:spPr>
-          <a:xfrm>
-            <a:off x="7680959" y="1664208"/>
-            <a:ext cx="3794760" cy="237744"/>
-          </a:xfrm>
-          <a:prstGeom prst="rect">
-            <a:avLst/>
-          </a:prstGeom>
-          <a:noFill/>
-        </p:spPr>
-        <p:txBody>
-          <a:bodyPr wrap="square" anchor="t" lIns="0" rIns="0" tIns="0" bIns="0">
-            <a:spAutoFit/>
-          </a:bodyPr>
-          <a:lstStyle/>
-          <a:p>
-            <a:pPr algn="l">
-              <a:spcAft>
-                <a:spcPts val="200"/>
-              </a:spcAft>
-            </a:pPr>
-            <a:r>
-              <a:rPr sz="1150" b="1">
-                <a:solidFill>
-                  <a:srgbClr val="141413"/>
-                </a:solidFill>
-                <a:latin typeface="Pretendard"/>
-                <a:ea typeface="Pretendard"/>
-              </a:rPr>
-              <a:t>서비스 구성 · 운영 시나리오</a:t>
-            </a:r>
-          </a:p>
-        </p:txBody>
-      </p:sp>
-      <p:sp>
-        <p:nvSpPr>
-          <p:cNvPr id="48" name="Rounded Rectangle 47"/>
-          <p:cNvSpPr/>
-          <p:nvPr/>
-        </p:nvSpPr>
-        <p:spPr>
-          <a:xfrm>
-            <a:off x="7680959" y="1956816"/>
-            <a:ext cx="3794760" cy="512064"/>
-          </a:xfrm>
-          <a:prstGeom prst="roundRect">
-            <a:avLst>
-              <a:gd name="adj" fmla="val 8000"/>
-            </a:avLst>
-          </a:prstGeom>
-          <a:solidFill>
-            <a:srgbClr val="FAF9F5"/>
-          </a:solidFill>
-          <a:ln w="9525">
-            <a:solidFill>
-              <a:srgbClr val="E6DFD8"/>
-            </a:solidFill>
-          </a:ln>
-          <a:effectLst/>
-        </p:spPr>
-        <p:style>
-          <a:lnRef idx="1">
-            <a:schemeClr val="accent1"/>
-          </a:lnRef>
-          <a:fillRef idx="3">
-            <a:schemeClr val="accent1"/>
-          </a:fillRef>
-          <a:effectRef idx="2">
-            <a:schemeClr val="accent1"/>
-          </a:effectRef>
-          <a:fontRef idx="minor">
-            <a:schemeClr val="lt1"/>
-          </a:fontRef>
-        </p:style>
-        <p:txBody>
-          <a:bodyPr rtlCol="0" anchor="ctr"/>
-          <a:lstStyle/>
-          <a:p>
-            <a:pPr algn="ctr"/>
-          </a:p>
-        </p:txBody>
-      </p:sp>
-      <p:sp>
-        <p:nvSpPr>
-          <p:cNvPr id="49" name="Oval 48"/>
-          <p:cNvSpPr/>
-          <p:nvPr/>
-        </p:nvSpPr>
-        <p:spPr>
-          <a:xfrm>
-            <a:off x="7772399" y="2075688"/>
-            <a:ext cx="274320" cy="274320"/>
-          </a:xfrm>
-          <a:prstGeom prst="ellipse">
-            <a:avLst/>
-          </a:prstGeom>
-          <a:solidFill>
-            <a:srgbClr val="CC785C"/>
-          </a:solidFill>
-          <a:ln>
-            <a:noFill/>
-          </a:ln>
-          <a:effectLst/>
-        </p:spPr>
-        <p:style>
-          <a:lnRef idx="1">
-            <a:schemeClr val="accent1"/>
-          </a:lnRef>
-          <a:fillRef idx="3">
-            <a:schemeClr val="accent1"/>
-          </a:fillRef>
-          <a:effectRef idx="2">
-            <a:schemeClr val="accent1"/>
-          </a:effectRef>
-          <a:fontRef idx="minor">
-            <a:schemeClr val="lt1"/>
-          </a:fontRef>
-        </p:style>
-        <p:txBody>
-          <a:bodyPr rtlCol="0" anchor="ctr" lIns="0" rIns="0" tIns="0" bIns="0"/>
-          <a:lstStyle/>
-          <a:p>
-            <a:pPr algn="ctr"/>
-            <a:r>
-              <a:rPr sz="1000" b="1">
-                <a:solidFill>
-                  <a:srgbClr val="FFFFFF"/>
-                </a:solidFill>
-                <a:latin typeface="Pretendard"/>
-                <a:ea typeface="Pretendard"/>
-              </a:rPr>
-              <a:t>1</a:t>
-            </a:r>
-          </a:p>
-        </p:txBody>
-      </p:sp>
-      <p:sp>
-        <p:nvSpPr>
-          <p:cNvPr id="50" name="TextBox 49"/>
-          <p:cNvSpPr txBox="1"/>
-          <p:nvPr/>
-        </p:nvSpPr>
-        <p:spPr>
-          <a:xfrm>
-            <a:off x="8156447" y="2011680"/>
-            <a:ext cx="3200400" cy="201168"/>
-          </a:xfrm>
-          <a:prstGeom prst="rect">
-            <a:avLst/>
-          </a:prstGeom>
-          <a:noFill/>
-        </p:spPr>
-        <p:txBody>
-          <a:bodyPr wrap="square" anchor="t" lIns="0" rIns="0" tIns="0" bIns="0">
-            <a:spAutoFit/>
-          </a:bodyPr>
-          <a:lstStyle/>
-          <a:p>
-            <a:pPr algn="l">
-              <a:spcAft>
-                <a:spcPts val="200"/>
-              </a:spcAft>
-            </a:pPr>
-            <a:r>
-              <a:rPr sz="1000" b="1">
-                <a:solidFill>
-                  <a:srgbClr val="141413"/>
-                </a:solidFill>
-                <a:latin typeface="Pretendard"/>
-                <a:ea typeface="Pretendard"/>
-              </a:rPr>
-              <a:t>Case 생성</a:t>
-            </a:r>
-          </a:p>
-        </p:txBody>
-      </p:sp>
-      <p:sp>
-        <p:nvSpPr>
-          <p:cNvPr id="51" name="TextBox 50"/>
-          <p:cNvSpPr txBox="1"/>
-          <p:nvPr/>
-        </p:nvSpPr>
-        <p:spPr>
-          <a:xfrm>
-            <a:off x="8156447" y="2212848"/>
-            <a:ext cx="3200400" cy="201168"/>
-          </a:xfrm>
-          <a:prstGeom prst="rect">
-            <a:avLst/>
-          </a:prstGeom>
-          <a:noFill/>
-        </p:spPr>
-        <p:txBody>
-          <a:bodyPr wrap="square" anchor="t" lIns="0" rIns="0" tIns="0" bIns="0">
-            <a:spAutoFit/>
-          </a:bodyPr>
-          <a:lstStyle/>
-          <a:p>
-            <a:pPr algn="l">
-              <a:spcAft>
-                <a:spcPts val="200"/>
-              </a:spcAft>
-            </a:pPr>
-            <a:r>
-              <a:rPr sz="850" b="0">
-                <a:solidFill>
-                  <a:srgbClr val="6C6A64"/>
-                </a:solidFill>
-                <a:latin typeface="Pretendard"/>
-                <a:ea typeface="Pretendard"/>
-              </a:rPr>
-              <a:t>고객 위험을 케이스로 등록 (RM 또는 정기 스캔)</a:t>
-            </a:r>
-          </a:p>
-        </p:txBody>
-      </p:sp>
-      <p:sp>
-        <p:nvSpPr>
-          <p:cNvPr id="52" name="Rounded Rectangle 51"/>
-          <p:cNvSpPr/>
-          <p:nvPr/>
-        </p:nvSpPr>
-        <p:spPr>
-          <a:xfrm>
-            <a:off x="7680959" y="2542032"/>
-            <a:ext cx="3794760" cy="512064"/>
-          </a:xfrm>
-          <a:prstGeom prst="roundRect">
-            <a:avLst>
-              <a:gd name="adj" fmla="val 8000"/>
-            </a:avLst>
-          </a:prstGeom>
-          <a:solidFill>
-            <a:srgbClr val="FAF9F5"/>
-          </a:solidFill>
-          <a:ln w="9525">
-            <a:solidFill>
-              <a:srgbClr val="E6DFD8"/>
-            </a:solidFill>
-          </a:ln>
-          <a:effectLst/>
-        </p:spPr>
-        <p:style>
-          <a:lnRef idx="1">
-            <a:schemeClr val="accent1"/>
-          </a:lnRef>
-          <a:fillRef idx="3">
-            <a:schemeClr val="accent1"/>
-          </a:fillRef>
-          <a:effectRef idx="2">
-            <a:schemeClr val="accent1"/>
-          </a:effectRef>
-          <a:fontRef idx="minor">
-            <a:schemeClr val="lt1"/>
-          </a:fontRef>
-        </p:style>
-        <p:txBody>
-          <a:bodyPr rtlCol="0" anchor="ctr"/>
-          <a:lstStyle/>
-          <a:p>
-            <a:pPr algn="ctr"/>
-          </a:p>
-        </p:txBody>
-      </p:sp>
-      <p:sp>
-        <p:nvSpPr>
-          <p:cNvPr id="53" name="Oval 52"/>
-          <p:cNvSpPr/>
-          <p:nvPr/>
-        </p:nvSpPr>
-        <p:spPr>
-          <a:xfrm>
-            <a:off x="7772399" y="2660904"/>
-            <a:ext cx="274320" cy="274320"/>
-          </a:xfrm>
-          <a:prstGeom prst="ellipse">
-            <a:avLst/>
-          </a:prstGeom>
-          <a:solidFill>
-            <a:srgbClr val="CC785C"/>
-          </a:solidFill>
-          <a:ln>
-            <a:noFill/>
-          </a:ln>
-          <a:effectLst/>
-        </p:spPr>
-        <p:style>
-          <a:lnRef idx="1">
-            <a:schemeClr val="accent1"/>
-          </a:lnRef>
-          <a:fillRef idx="3">
-            <a:schemeClr val="accent1"/>
-          </a:fillRef>
-          <a:effectRef idx="2">
-            <a:schemeClr val="accent1"/>
-          </a:effectRef>
-          <a:fontRef idx="minor">
-            <a:schemeClr val="lt1"/>
-          </a:fontRef>
-        </p:style>
-        <p:txBody>
-          <a:bodyPr rtlCol="0" anchor="ctr" lIns="0" rIns="0" tIns="0" bIns="0"/>
-          <a:lstStyle/>
-          <a:p>
-            <a:pPr algn="ctr"/>
-            <a:r>
-              <a:rPr sz="1000" b="1">
-                <a:solidFill>
-                  <a:srgbClr val="FFFFFF"/>
-                </a:solidFill>
-                <a:latin typeface="Pretendard"/>
-                <a:ea typeface="Pretendard"/>
-              </a:rPr>
-              <a:t>2</a:t>
-            </a:r>
-          </a:p>
-        </p:txBody>
-      </p:sp>
-      <p:sp>
-        <p:nvSpPr>
-          <p:cNvPr id="54" name="TextBox 53"/>
-          <p:cNvSpPr txBox="1"/>
-          <p:nvPr/>
-        </p:nvSpPr>
-        <p:spPr>
-          <a:xfrm>
-            <a:off x="8156447" y="2596896"/>
-            <a:ext cx="3200400" cy="201168"/>
-          </a:xfrm>
-          <a:prstGeom prst="rect">
-            <a:avLst/>
-          </a:prstGeom>
-          <a:noFill/>
-        </p:spPr>
-        <p:txBody>
-          <a:bodyPr wrap="square" anchor="t" lIns="0" rIns="0" tIns="0" bIns="0">
-            <a:spAutoFit/>
-          </a:bodyPr>
-          <a:lstStyle/>
-          <a:p>
-            <a:pPr algn="l">
-              <a:spcAft>
-                <a:spcPts val="200"/>
-              </a:spcAft>
-            </a:pPr>
-            <a:r>
-              <a:rPr sz="1000" b="1">
-                <a:solidFill>
-                  <a:srgbClr val="141413"/>
-                </a:solidFill>
-                <a:latin typeface="Pretendard"/>
-                <a:ea typeface="Pretendard"/>
-              </a:rPr>
-              <a:t>AgentRun</a:t>
-            </a:r>
-          </a:p>
-        </p:txBody>
-      </p:sp>
-      <p:sp>
-        <p:nvSpPr>
-          <p:cNvPr id="55" name="TextBox 54"/>
-          <p:cNvSpPr txBox="1"/>
-          <p:nvPr/>
-        </p:nvSpPr>
-        <p:spPr>
-          <a:xfrm>
-            <a:off x="8156447" y="2798064"/>
-            <a:ext cx="3200400" cy="201168"/>
-          </a:xfrm>
-          <a:prstGeom prst="rect">
-            <a:avLst/>
-          </a:prstGeom>
-          <a:noFill/>
-        </p:spPr>
-        <p:txBody>
-          <a:bodyPr wrap="square" anchor="t" lIns="0" rIns="0" tIns="0" bIns="0">
-            <a:spAutoFit/>
-          </a:bodyPr>
-          <a:lstStyle/>
-          <a:p>
-            <a:pPr algn="l">
-              <a:spcAft>
-                <a:spcPts val="200"/>
-              </a:spcAft>
-            </a:pPr>
-            <a:r>
-              <a:rPr sz="850" b="0">
-                <a:solidFill>
-                  <a:srgbClr val="6C6A64"/>
-                </a:solidFill>
-                <a:latin typeface="Pretendard"/>
-                <a:ea typeface="Pretendard"/>
-              </a:rPr>
-              <a:t>전문 Agent들이 스킬을 장착하고 근거 수집 · 위험 판단</a:t>
-            </a:r>
-          </a:p>
-        </p:txBody>
-      </p:sp>
-      <p:sp>
-        <p:nvSpPr>
-          <p:cNvPr id="56" name="Rounded Rectangle 55"/>
-          <p:cNvSpPr/>
-          <p:nvPr/>
-        </p:nvSpPr>
-        <p:spPr>
-          <a:xfrm>
-            <a:off x="7680959" y="3127248"/>
-            <a:ext cx="3794760" cy="512064"/>
-          </a:xfrm>
-          <a:prstGeom prst="roundRect">
-            <a:avLst>
-              <a:gd name="adj" fmla="val 8000"/>
-            </a:avLst>
-          </a:prstGeom>
-          <a:solidFill>
-            <a:srgbClr val="FAF9F5"/>
-          </a:solidFill>
-          <a:ln w="9525">
-            <a:solidFill>
-              <a:srgbClr val="E6DFD8"/>
-            </a:solidFill>
-          </a:ln>
-          <a:effectLst/>
-        </p:spPr>
-        <p:style>
-          <a:lnRef idx="1">
-            <a:schemeClr val="accent1"/>
-          </a:lnRef>
-          <a:fillRef idx="3">
-            <a:schemeClr val="accent1"/>
-          </a:fillRef>
-          <a:effectRef idx="2">
-            <a:schemeClr val="accent1"/>
-          </a:effectRef>
-          <a:fontRef idx="minor">
-            <a:schemeClr val="lt1"/>
-          </a:fontRef>
-        </p:style>
-        <p:txBody>
-          <a:bodyPr rtlCol="0" anchor="ctr"/>
-          <a:lstStyle/>
-          <a:p>
-            <a:pPr algn="ctr"/>
-          </a:p>
-        </p:txBody>
-      </p:sp>
-      <p:sp>
-        <p:nvSpPr>
-          <p:cNvPr id="57" name="Oval 56"/>
-          <p:cNvSpPr/>
-          <p:nvPr/>
-        </p:nvSpPr>
-        <p:spPr>
-          <a:xfrm>
-            <a:off x="7772399" y="3246120"/>
-            <a:ext cx="274320" cy="274320"/>
-          </a:xfrm>
-          <a:prstGeom prst="ellipse">
-            <a:avLst/>
-          </a:prstGeom>
-          <a:solidFill>
-            <a:srgbClr val="CC785C"/>
-          </a:solidFill>
-          <a:ln>
-            <a:noFill/>
-          </a:ln>
-          <a:effectLst/>
-        </p:spPr>
-        <p:style>
-          <a:lnRef idx="1">
-            <a:schemeClr val="accent1"/>
-          </a:lnRef>
-          <a:fillRef idx="3">
-            <a:schemeClr val="accent1"/>
-          </a:fillRef>
-          <a:effectRef idx="2">
-            <a:schemeClr val="accent1"/>
-          </a:effectRef>
-          <a:fontRef idx="minor">
-            <a:schemeClr val="lt1"/>
-          </a:fontRef>
-        </p:style>
-        <p:txBody>
-          <a:bodyPr rtlCol="0" anchor="ctr" lIns="0" rIns="0" tIns="0" bIns="0"/>
-          <a:lstStyle/>
-          <a:p>
-            <a:pPr algn="ctr"/>
-            <a:r>
-              <a:rPr sz="1000" b="1">
-                <a:solidFill>
-                  <a:srgbClr val="FFFFFF"/>
-                </a:solidFill>
-                <a:latin typeface="Pretendard"/>
-                <a:ea typeface="Pretendard"/>
-              </a:rPr>
-              <a:t>3</a:t>
-            </a:r>
-          </a:p>
-        </p:txBody>
-      </p:sp>
-      <p:sp>
-        <p:nvSpPr>
-          <p:cNvPr id="58" name="TextBox 57"/>
-          <p:cNvSpPr txBox="1"/>
-          <p:nvPr/>
-        </p:nvSpPr>
-        <p:spPr>
-          <a:xfrm>
-            <a:off x="8156447" y="3182112"/>
-            <a:ext cx="3200400" cy="201168"/>
-          </a:xfrm>
-          <a:prstGeom prst="rect">
-            <a:avLst/>
-          </a:prstGeom>
-          <a:noFill/>
-        </p:spPr>
-        <p:txBody>
-          <a:bodyPr wrap="square" anchor="t" lIns="0" rIns="0" tIns="0" bIns="0">
-            <a:spAutoFit/>
-          </a:bodyPr>
-          <a:lstStyle/>
-          <a:p>
-            <a:pPr algn="l">
-              <a:spcAft>
-                <a:spcPts val="200"/>
-              </a:spcAft>
-            </a:pPr>
-            <a:r>
-              <a:rPr sz="1000" b="1">
-                <a:solidFill>
-                  <a:srgbClr val="141413"/>
-                </a:solidFill>
-                <a:latin typeface="Pretendard"/>
-                <a:ea typeface="Pretendard"/>
-              </a:rPr>
-              <a:t>Approval</a:t>
-            </a:r>
-          </a:p>
-        </p:txBody>
-      </p:sp>
-      <p:sp>
-        <p:nvSpPr>
-          <p:cNvPr id="59" name="TextBox 58"/>
-          <p:cNvSpPr txBox="1"/>
-          <p:nvPr/>
-        </p:nvSpPr>
-        <p:spPr>
-          <a:xfrm>
-            <a:off x="8156447" y="3383280"/>
-            <a:ext cx="3200400" cy="201168"/>
-          </a:xfrm>
-          <a:prstGeom prst="rect">
-            <a:avLst/>
-          </a:prstGeom>
-          <a:noFill/>
-        </p:spPr>
-        <p:txBody>
-          <a:bodyPr wrap="square" anchor="t" lIns="0" rIns="0" tIns="0" bIns="0">
-            <a:spAutoFit/>
-          </a:bodyPr>
-          <a:lstStyle/>
-          <a:p>
-            <a:pPr algn="l">
-              <a:spcAft>
-                <a:spcPts val="200"/>
-              </a:spcAft>
-            </a:pPr>
-            <a:r>
-              <a:rPr sz="850" b="0">
-                <a:solidFill>
-                  <a:srgbClr val="6C6A64"/>
-                </a:solidFill>
-                <a:latin typeface="Pretendard"/>
-                <a:ea typeface="Pretendard"/>
-              </a:rPr>
-              <a:t>조치 초안을 사람이 검토 — Approve / Reject</a:t>
-            </a:r>
-          </a:p>
-        </p:txBody>
-      </p:sp>
-      <p:sp>
-        <p:nvSpPr>
-          <p:cNvPr id="60" name="Rounded Rectangle 59"/>
-          <p:cNvSpPr/>
-          <p:nvPr/>
-        </p:nvSpPr>
-        <p:spPr>
-          <a:xfrm>
-            <a:off x="7680959" y="3712464"/>
-            <a:ext cx="3794760" cy="512064"/>
-          </a:xfrm>
-          <a:prstGeom prst="roundRect">
-            <a:avLst>
-              <a:gd name="adj" fmla="val 8000"/>
-            </a:avLst>
-          </a:prstGeom>
-          <a:solidFill>
-            <a:srgbClr val="FAF9F5"/>
-          </a:solidFill>
-          <a:ln w="9525">
-            <a:solidFill>
-              <a:srgbClr val="E6DFD8"/>
-            </a:solidFill>
-          </a:ln>
-          <a:effectLst/>
-        </p:spPr>
-        <p:style>
-          <a:lnRef idx="1">
-            <a:schemeClr val="accent1"/>
-          </a:lnRef>
-          <a:fillRef idx="3">
-            <a:schemeClr val="accent1"/>
-          </a:fillRef>
-          <a:effectRef idx="2">
-            <a:schemeClr val="accent1"/>
-          </a:effectRef>
-          <a:fontRef idx="minor">
-            <a:schemeClr val="lt1"/>
-          </a:fontRef>
-        </p:style>
-        <p:txBody>
-          <a:bodyPr rtlCol="0" anchor="ctr"/>
-          <a:lstStyle/>
-          <a:p>
-            <a:pPr algn="ctr"/>
-          </a:p>
-        </p:txBody>
-      </p:sp>
-      <p:sp>
-        <p:nvSpPr>
-          <p:cNvPr id="61" name="Oval 60"/>
-          <p:cNvSpPr/>
-          <p:nvPr/>
-        </p:nvSpPr>
-        <p:spPr>
-          <a:xfrm>
-            <a:off x="7772399" y="3831336"/>
-            <a:ext cx="274320" cy="274320"/>
-          </a:xfrm>
-          <a:prstGeom prst="ellipse">
-            <a:avLst/>
-          </a:prstGeom>
-          <a:solidFill>
-            <a:srgbClr val="CC785C"/>
-          </a:solidFill>
-          <a:ln>
-            <a:noFill/>
-          </a:ln>
-          <a:effectLst/>
-        </p:spPr>
-        <p:style>
-          <a:lnRef idx="1">
-            <a:schemeClr val="accent1"/>
-          </a:lnRef>
-          <a:fillRef idx="3">
-            <a:schemeClr val="accent1"/>
-          </a:fillRef>
-          <a:effectRef idx="2">
-            <a:schemeClr val="accent1"/>
-          </a:effectRef>
-          <a:fontRef idx="minor">
-            <a:schemeClr val="lt1"/>
-          </a:fontRef>
-        </p:style>
-        <p:txBody>
-          <a:bodyPr rtlCol="0" anchor="ctr" lIns="0" rIns="0" tIns="0" bIns="0"/>
-          <a:lstStyle/>
-          <a:p>
-            <a:pPr algn="ctr"/>
-            <a:r>
-              <a:rPr sz="1000" b="1">
-                <a:solidFill>
-                  <a:srgbClr val="FFFFFF"/>
-                </a:solidFill>
-                <a:latin typeface="Pretendard"/>
-                <a:ea typeface="Pretendard"/>
-              </a:rPr>
-              <a:t>4</a:t>
-            </a:r>
-          </a:p>
-        </p:txBody>
-      </p:sp>
-      <p:sp>
-        <p:nvSpPr>
-          <p:cNvPr id="62" name="TextBox 61"/>
-          <p:cNvSpPr txBox="1"/>
-          <p:nvPr/>
-        </p:nvSpPr>
-        <p:spPr>
-          <a:xfrm>
-            <a:off x="8156447" y="3767328"/>
-            <a:ext cx="3200400" cy="201168"/>
-          </a:xfrm>
-          <a:prstGeom prst="rect">
-            <a:avLst/>
-          </a:prstGeom>
-          <a:noFill/>
-        </p:spPr>
-        <p:txBody>
-          <a:bodyPr wrap="square" anchor="t" lIns="0" rIns="0" tIns="0" bIns="0">
-            <a:spAutoFit/>
-          </a:bodyPr>
-          <a:lstStyle/>
-          <a:p>
-            <a:pPr algn="l">
-              <a:spcAft>
-                <a:spcPts val="200"/>
-              </a:spcAft>
-            </a:pPr>
-            <a:r>
-              <a:rPr sz="1000" b="1">
-                <a:solidFill>
-                  <a:srgbClr val="141413"/>
-                </a:solidFill>
-                <a:latin typeface="Pretendard"/>
-                <a:ea typeface="Pretendard"/>
-              </a:rPr>
-              <a:t>Audit</a:t>
-            </a:r>
-          </a:p>
-        </p:txBody>
-      </p:sp>
-      <p:sp>
-        <p:nvSpPr>
-          <p:cNvPr id="63" name="TextBox 62"/>
-          <p:cNvSpPr txBox="1"/>
-          <p:nvPr/>
-        </p:nvSpPr>
-        <p:spPr>
-          <a:xfrm>
-            <a:off x="8156447" y="3968496"/>
-            <a:ext cx="3200400" cy="201168"/>
-          </a:xfrm>
-          <a:prstGeom prst="rect">
-            <a:avLst/>
-          </a:prstGeom>
-          <a:noFill/>
-        </p:spPr>
-        <p:txBody>
-          <a:bodyPr wrap="square" anchor="t" lIns="0" rIns="0" tIns="0" bIns="0">
-            <a:spAutoFit/>
-          </a:bodyPr>
-          <a:lstStyle/>
-          <a:p>
-            <a:pPr algn="l">
-              <a:spcAft>
-                <a:spcPts val="200"/>
-              </a:spcAft>
-            </a:pPr>
-            <a:r>
-              <a:rPr sz="850" b="0">
-                <a:solidFill>
-                  <a:srgbClr val="6C6A64"/>
-                </a:solidFill>
-                <a:latin typeface="Pretendard"/>
-                <a:ea typeface="Pretendard"/>
-              </a:rPr>
-              <a:t>모든 판단 · 행동 · 승인이 감사 로그로 남음</a:t>
-            </a:r>
-          </a:p>
-        </p:txBody>
-      </p:sp>
-      <p:sp>
-        <p:nvSpPr>
-          <p:cNvPr id="64" name="Rounded Rectangle 63"/>
-          <p:cNvSpPr/>
-          <p:nvPr/>
-        </p:nvSpPr>
-        <p:spPr>
-          <a:xfrm>
-            <a:off x="7680959" y="4315968"/>
-            <a:ext cx="3794760" cy="1481328"/>
-          </a:xfrm>
-          <a:prstGeom prst="roundRect">
-            <a:avLst>
-              <a:gd name="adj" fmla="val 8000"/>
-            </a:avLst>
-          </a:prstGeom>
-          <a:solidFill>
-            <a:srgbClr val="181715"/>
-          </a:solidFill>
-          <a:ln>
-            <a:noFill/>
-          </a:ln>
-          <a:effectLst/>
-        </p:spPr>
-        <p:style>
-          <a:lnRef idx="1">
-            <a:schemeClr val="accent1"/>
-          </a:lnRef>
-          <a:fillRef idx="3">
-            <a:schemeClr val="accent1"/>
-          </a:fillRef>
-          <a:effectRef idx="2">
-            <a:schemeClr val="accent1"/>
-          </a:effectRef>
-          <a:fontRef idx="minor">
-            <a:schemeClr val="lt1"/>
-          </a:fontRef>
-        </p:style>
-        <p:txBody>
-          <a:bodyPr rtlCol="0" anchor="ctr"/>
-          <a:lstStyle/>
-          <a:p>
-            <a:pPr algn="ctr"/>
-          </a:p>
-        </p:txBody>
-      </p:sp>
-      <p:sp>
-        <p:nvSpPr>
-          <p:cNvPr id="65" name="TextBox 64"/>
-          <p:cNvSpPr txBox="1"/>
-          <p:nvPr/>
-        </p:nvSpPr>
-        <p:spPr>
-          <a:xfrm>
-            <a:off x="7827263" y="4416552"/>
-            <a:ext cx="3502152" cy="219456"/>
-          </a:xfrm>
-          <a:prstGeom prst="rect">
-            <a:avLst/>
-          </a:prstGeom>
-          <a:noFill/>
-        </p:spPr>
-        <p:txBody>
-          <a:bodyPr wrap="square" anchor="t" lIns="0" rIns="0" tIns="0" bIns="0">
-            <a:spAutoFit/>
-          </a:bodyPr>
-          <a:lstStyle/>
-          <a:p>
-            <a:pPr algn="l">
-              <a:spcAft>
-                <a:spcPts val="200"/>
-              </a:spcAft>
-            </a:pPr>
-            <a:r>
-              <a:rPr sz="1000" b="1">
-                <a:solidFill>
-                  <a:srgbClr val="CC785C"/>
-                </a:solidFill>
-                <a:latin typeface="Pretendard"/>
-                <a:ea typeface="Pretendard"/>
-              </a:rPr>
-              <a:t>핵심 설계 원칙</a:t>
-            </a:r>
-          </a:p>
-        </p:txBody>
-      </p:sp>
-      <p:sp>
-        <p:nvSpPr>
-          <p:cNvPr id="66" name="TextBox 65"/>
-          <p:cNvSpPr txBox="1"/>
-          <p:nvPr/>
-        </p:nvSpPr>
-        <p:spPr>
-          <a:xfrm>
-            <a:off x="7827263" y="4663440"/>
-            <a:ext cx="3502152" cy="201168"/>
-          </a:xfrm>
-          <a:prstGeom prst="rect">
-            <a:avLst/>
-          </a:prstGeom>
-          <a:noFill/>
-        </p:spPr>
-        <p:txBody>
-          <a:bodyPr wrap="square" anchor="t" lIns="0" rIns="0" tIns="0" bIns="0">
-            <a:spAutoFit/>
-          </a:bodyPr>
-          <a:lstStyle/>
-          <a:p>
-            <a:pPr algn="l">
-              <a:spcAft>
-                <a:spcPts val="200"/>
-              </a:spcAft>
-            </a:pPr>
-            <a:r>
-              <a:rPr sz="900" b="1">
-                <a:solidFill>
-                  <a:srgbClr val="FAF9F5"/>
-                </a:solidFill>
-                <a:latin typeface="Pretendard"/>
-                <a:ea typeface="Pretendard"/>
-              </a:rPr>
-              <a:t>· 스킬 장착형 멀티 Agent</a:t>
-            </a:r>
-          </a:p>
-        </p:txBody>
-      </p:sp>
-      <p:sp>
-        <p:nvSpPr>
-          <p:cNvPr id="67" name="TextBox 66"/>
-          <p:cNvSpPr txBox="1"/>
-          <p:nvPr/>
-        </p:nvSpPr>
-        <p:spPr>
-          <a:xfrm>
-            <a:off x="7955279" y="4846320"/>
-            <a:ext cx="3374136" cy="182880"/>
-          </a:xfrm>
-          <a:prstGeom prst="rect">
-            <a:avLst/>
-          </a:prstGeom>
-          <a:noFill/>
-        </p:spPr>
-        <p:txBody>
-          <a:bodyPr wrap="square" anchor="t" lIns="0" rIns="0" tIns="0" bIns="0">
-            <a:spAutoFit/>
-          </a:bodyPr>
-          <a:lstStyle/>
-          <a:p>
-            <a:pPr algn="l">
-              <a:spcAft>
-                <a:spcPts val="200"/>
-              </a:spcAft>
-            </a:pPr>
-            <a:r>
-              <a:rPr sz="800" b="0">
-                <a:solidFill>
-                  <a:srgbClr val="A09D96"/>
-                </a:solidFill>
-                <a:latin typeface="Pretendard"/>
-                <a:ea typeface="Pretendard"/>
-              </a:rPr>
-              <a:t>기능 추가 = 스킬 패키지 추가 (확장 용이)</a:t>
-            </a:r>
-          </a:p>
-        </p:txBody>
-      </p:sp>
-      <p:sp>
-        <p:nvSpPr>
-          <p:cNvPr id="68" name="TextBox 67"/>
-          <p:cNvSpPr txBox="1"/>
-          <p:nvPr/>
-        </p:nvSpPr>
-        <p:spPr>
-          <a:xfrm>
-            <a:off x="7827263" y="5038344"/>
-            <a:ext cx="3502152" cy="201168"/>
-          </a:xfrm>
-          <a:prstGeom prst="rect">
-            <a:avLst/>
-          </a:prstGeom>
-          <a:noFill/>
-        </p:spPr>
-        <p:txBody>
-          <a:bodyPr wrap="square" anchor="t" lIns="0" rIns="0" tIns="0" bIns="0">
-            <a:spAutoFit/>
-          </a:bodyPr>
-          <a:lstStyle/>
-          <a:p>
-            <a:pPr algn="l">
-              <a:spcAft>
-                <a:spcPts val="200"/>
-              </a:spcAft>
-            </a:pPr>
-            <a:r>
-              <a:rPr sz="900" b="1">
-                <a:solidFill>
-                  <a:srgbClr val="FAF9F5"/>
-                </a:solidFill>
-                <a:latin typeface="Pretendard"/>
-                <a:ea typeface="Pretendard"/>
-              </a:rPr>
-              <a:t>· 승인 우선 자동화 (L0–L4)</a:t>
-            </a:r>
-          </a:p>
-        </p:txBody>
-      </p:sp>
-      <p:sp>
-        <p:nvSpPr>
-          <p:cNvPr id="69" name="TextBox 68"/>
-          <p:cNvSpPr txBox="1"/>
-          <p:nvPr/>
-        </p:nvSpPr>
-        <p:spPr>
-          <a:xfrm>
-            <a:off x="7955279" y="5221224"/>
-            <a:ext cx="3374136" cy="182880"/>
-          </a:xfrm>
-          <a:prstGeom prst="rect">
-            <a:avLst/>
-          </a:prstGeom>
-          <a:noFill/>
-        </p:spPr>
-        <p:txBody>
-          <a:bodyPr wrap="square" anchor="t" lIns="0" rIns="0" tIns="0" bIns="0">
-            <a:spAutoFit/>
-          </a:bodyPr>
-          <a:lstStyle/>
-          <a:p>
-            <a:pPr algn="l">
-              <a:spcAft>
-                <a:spcPts val="200"/>
-              </a:spcAft>
-            </a:pPr>
-            <a:r>
-              <a:rPr sz="800" b="0">
-                <a:solidFill>
-                  <a:srgbClr val="A09D96"/>
-                </a:solidFill>
-                <a:latin typeface="Pretendard"/>
-                <a:ea typeface="Pretendard"/>
-              </a:rPr>
-              <a:t>완전 자동 발송 금지 · 사람이 마지막 결정</a:t>
-            </a:r>
-          </a:p>
-        </p:txBody>
-      </p:sp>
-      <p:sp>
-        <p:nvSpPr>
-          <p:cNvPr id="70" name="TextBox 69"/>
-          <p:cNvSpPr txBox="1"/>
-          <p:nvPr/>
-        </p:nvSpPr>
-        <p:spPr>
-          <a:xfrm>
-            <a:off x="7827263" y="5413248"/>
-            <a:ext cx="3502152" cy="201168"/>
-          </a:xfrm>
-          <a:prstGeom prst="rect">
-            <a:avLst/>
-          </a:prstGeom>
-          <a:noFill/>
-        </p:spPr>
-        <p:txBody>
-          <a:bodyPr wrap="square" anchor="t" lIns="0" rIns="0" tIns="0" bIns="0">
-            <a:spAutoFit/>
-          </a:bodyPr>
-          <a:lstStyle/>
-          <a:p>
-            <a:pPr algn="l">
-              <a:spcAft>
-                <a:spcPts val="200"/>
-              </a:spcAft>
-            </a:pPr>
-            <a:r>
-              <a:rPr sz="900" b="1">
-                <a:solidFill>
-                  <a:srgbClr val="FAF9F5"/>
-                </a:solidFill>
-                <a:latin typeface="Pretendard"/>
-                <a:ea typeface="Pretendard"/>
-              </a:rPr>
-              <a:t>· 근거 · 감사가 일급 객체</a:t>
-            </a:r>
-          </a:p>
-        </p:txBody>
-      </p:sp>
-      <p:sp>
-        <p:nvSpPr>
-          <p:cNvPr id="71" name="TextBox 70"/>
-          <p:cNvSpPr txBox="1"/>
-          <p:nvPr/>
-        </p:nvSpPr>
-        <p:spPr>
-          <a:xfrm>
-            <a:off x="7955279" y="5596128"/>
-            <a:ext cx="3374136" cy="182880"/>
-          </a:xfrm>
-          <a:prstGeom prst="rect">
-            <a:avLst/>
-          </a:prstGeom>
-          <a:noFill/>
-        </p:spPr>
-        <p:txBody>
-          <a:bodyPr wrap="square" anchor="t" lIns="0" rIns="0" tIns="0" bIns="0">
-            <a:spAutoFit/>
-          </a:bodyPr>
-          <a:lstStyle/>
-          <a:p>
-            <a:pPr algn="l">
-              <a:spcAft>
-                <a:spcPts val="200"/>
-              </a:spcAft>
-            </a:pPr>
-            <a:r>
-              <a:rPr sz="800" b="0">
-                <a:solidFill>
-                  <a:srgbClr val="A09D96"/>
-                </a:solidFill>
-                <a:latin typeface="Pretendard"/>
-                <a:ea typeface="Pretendard"/>
-              </a:rPr>
-              <a:t>모든 판단에 출처 링크와 감사 기록 연결</a:t>
+              <a:t>스킬 장착형 멀티 에이전트(기능 추가 = 스킬 추가) · 승인 우선 자동화(완전 자동 발송 금지) · 근거와 감사 기록은 일급 객체</a:t>
             </a:r>
           </a:p>
         </p:txBody>
@@ -20017,7 +18600,7 @@
         <p:spPr>
           <a:xfrm>
             <a:off x="868680" y="1664208"/>
-            <a:ext cx="5074920" cy="237744"/>
+            <a:ext cx="4572000" cy="219456"/>
           </a:xfrm>
           <a:prstGeom prst="rect">
             <a:avLst/>
@@ -20036,14 +18619,14 @@
               </a:spcAft>
             </a:pPr>
             <a:r>
-              <a:rPr sz="1150" b="1">
-                <a:solidFill>
-                  <a:srgbClr val="141413"/>
+              <a:rPr sz="1100" b="1">
+                <a:solidFill>
+                  <a:srgbClr val="0F1F3A"/>
                 </a:solidFill>
                 <a:latin typeface="Pretendard"/>
                 <a:ea typeface="Pretendard"/>
               </a:rPr>
-              <a:t>실제 동작하는 MVP 콘솔 (브라우저 데모)</a:t>
+              <a:t>실제 동작하는 MVP 콘솔</a:t>
             </a:r>
           </a:p>
         </p:txBody>
@@ -20064,15 +18647,15 @@
         </p:blipFill>
         <p:spPr>
           <a:xfrm>
-            <a:off x="868680" y="1956816"/>
-            <a:ext cx="5074920" cy="2854642"/>
+            <a:off x="868680" y="1938528"/>
+            <a:ext cx="4297680" cy="2417445"/>
           </a:xfrm>
           <a:prstGeom prst="rect">
             <a:avLst/>
           </a:prstGeom>
           <a:ln w="12700">
             <a:solidFill>
-              <a:srgbClr val="E6DFD8"/>
+              <a:srgbClr val="D6E3F1"/>
             </a:solidFill>
           </a:ln>
           <a:effectLst/>
@@ -20086,8 +18669,8 @@
         </p:nvSpPr>
         <p:spPr>
           <a:xfrm>
-            <a:off x="868680" y="4848034"/>
-            <a:ext cx="5074920" cy="201168"/>
+            <a:off x="868680" y="4392549"/>
+            <a:ext cx="4297680" cy="182880"/>
           </a:xfrm>
           <a:prstGeom prst="rect">
             <a:avLst/>
@@ -20106,39 +18689,221 @@
               </a:spcAft>
             </a:pPr>
             <a:r>
-              <a:rPr sz="850" b="0">
-                <a:solidFill>
-                  <a:srgbClr val="6C6A64"/>
+              <a:rPr sz="750" b="0">
+                <a:solidFill>
+                  <a:srgbClr val="637797"/>
                 </a:solidFill>
                 <a:latin typeface="Pretendard"/>
                 <a:ea typeface="Pretendard"/>
               </a:rPr>
-              <a:t>대시보드 — 지시 입력(Dispatch) · 라이브 AgentRun · 위험 지표 · 승인 큐</a:t>
+              <a:t>대시보드 — 한 줄 지시 실행 · 실시간 실행 · 처리 흐름 상태 · 우측 케이스 상세</a:t>
             </a:r>
           </a:p>
         </p:txBody>
       </p:sp>
-      <p:sp>
-        <p:nvSpPr>
-          <p:cNvPr id="21" name="Rounded Rectangle 20"/>
+      <p:pic>
+        <p:nvPicPr>
+          <p:cNvPr id="21" name="Picture 20" descr="orgchart.png"/>
+          <p:cNvPicPr>
+            <a:picLocks noChangeAspect="1"/>
+          </p:cNvPicPr>
+          <p:nvPr/>
+        </p:nvPicPr>
+        <p:blipFill>
+          <a:blip r:embed="rId5"/>
+          <a:stretch>
+            <a:fillRect/>
+          </a:stretch>
+        </p:blipFill>
+        <p:spPr>
+          <a:xfrm>
+            <a:off x="868680" y="4612005"/>
+            <a:ext cx="2084832" cy="1172718"/>
+          </a:xfrm>
+          <a:prstGeom prst="rect">
+            <a:avLst/>
+          </a:prstGeom>
+          <a:ln w="12700">
+            <a:solidFill>
+              <a:srgbClr val="D6E3F1"/>
+            </a:solidFill>
+          </a:ln>
+          <a:effectLst/>
+        </p:spPr>
+      </p:pic>
+      <p:pic>
+        <p:nvPicPr>
+          <p:cNvPr id="22" name="Picture 21" descr="skills.png"/>
+          <p:cNvPicPr>
+            <a:picLocks noChangeAspect="1"/>
+          </p:cNvPicPr>
+          <p:nvPr/>
+        </p:nvPicPr>
+        <p:blipFill>
+          <a:blip r:embed="rId6"/>
+          <a:stretch>
+            <a:fillRect/>
+          </a:stretch>
+        </p:blipFill>
+        <p:spPr>
+          <a:xfrm>
+            <a:off x="3081528" y="4612005"/>
+            <a:ext cx="2084832" cy="1172718"/>
+          </a:xfrm>
+          <a:prstGeom prst="rect">
+            <a:avLst/>
+          </a:prstGeom>
+          <a:ln w="12700">
+            <a:solidFill>
+              <a:srgbClr val="D6E3F1"/>
+            </a:solidFill>
+          </a:ln>
+          <a:effectLst/>
+        </p:spPr>
+      </p:pic>
+      <p:sp>
+        <p:nvSpPr>
+          <p:cNvPr id="23" name="TextBox 22"/>
+          <p:cNvSpPr txBox="1"/>
+          <p:nvPr/>
+        </p:nvSpPr>
+        <p:spPr>
+          <a:xfrm>
+            <a:off x="868680" y="5812155"/>
+            <a:ext cx="2084832" cy="182880"/>
+          </a:xfrm>
+          <a:prstGeom prst="rect">
+            <a:avLst/>
+          </a:prstGeom>
+          <a:noFill/>
+        </p:spPr>
+        <p:txBody>
+          <a:bodyPr wrap="square" anchor="t" lIns="0" rIns="0" tIns="0" bIns="0">
+            <a:spAutoFit/>
+          </a:bodyPr>
+          <a:lstStyle/>
+          <a:p>
+            <a:pPr algn="l">
+              <a:spcAft>
+                <a:spcPts val="200"/>
+              </a:spcAft>
+            </a:pPr>
+            <a:r>
+              <a:rPr sz="750" b="0">
+                <a:solidFill>
+                  <a:srgbClr val="637797"/>
+                </a:solidFill>
+                <a:latin typeface="Pretendard"/>
+                <a:ea typeface="Pretendard"/>
+              </a:rPr>
+              <a:t>에이전트 조직도 (14개)</a:t>
+            </a:r>
+          </a:p>
+        </p:txBody>
+      </p:sp>
+      <p:sp>
+        <p:nvSpPr>
+          <p:cNvPr id="24" name="TextBox 23"/>
+          <p:cNvSpPr txBox="1"/>
+          <p:nvPr/>
+        </p:nvSpPr>
+        <p:spPr>
+          <a:xfrm>
+            <a:off x="3081528" y="5812155"/>
+            <a:ext cx="2084832" cy="182880"/>
+          </a:xfrm>
+          <a:prstGeom prst="rect">
+            <a:avLst/>
+          </a:prstGeom>
+          <a:noFill/>
+        </p:spPr>
+        <p:txBody>
+          <a:bodyPr wrap="square" anchor="t" lIns="0" rIns="0" tIns="0" bIns="0">
+            <a:spAutoFit/>
+          </a:bodyPr>
+          <a:lstStyle/>
+          <a:p>
+            <a:pPr algn="l">
+              <a:spcAft>
+                <a:spcPts val="200"/>
+              </a:spcAft>
+            </a:pPr>
+            <a:r>
+              <a:rPr sz="750" b="0">
+                <a:solidFill>
+                  <a:srgbClr val="637797"/>
+                </a:solidFill>
+                <a:latin typeface="Pretendard"/>
+                <a:ea typeface="Pretendard"/>
+              </a:rPr>
+              <a:t>스킬 저장소 (25종)</a:t>
+            </a:r>
+          </a:p>
+        </p:txBody>
+      </p:sp>
+      <p:sp>
+        <p:nvSpPr>
+          <p:cNvPr id="25" name="TextBox 24"/>
+          <p:cNvSpPr txBox="1"/>
+          <p:nvPr/>
+        </p:nvSpPr>
+        <p:spPr>
+          <a:xfrm>
+            <a:off x="5486400" y="1664208"/>
+            <a:ext cx="5989320" cy="219456"/>
+          </a:xfrm>
+          <a:prstGeom prst="rect">
+            <a:avLst/>
+          </a:prstGeom>
+          <a:noFill/>
+        </p:spPr>
+        <p:txBody>
+          <a:bodyPr wrap="square" anchor="t" lIns="0" rIns="0" tIns="0" bIns="0">
+            <a:spAutoFit/>
+          </a:bodyPr>
+          <a:lstStyle/>
+          <a:p>
+            <a:pPr algn="l">
+              <a:spcAft>
+                <a:spcPts val="200"/>
+              </a:spcAft>
+            </a:pPr>
+            <a:r>
+              <a:rPr sz="1100" b="1">
+                <a:solidFill>
+                  <a:srgbClr val="0F1F3A"/>
+                </a:solidFill>
+                <a:latin typeface="Pretendard"/>
+                <a:ea typeface="Pretendard"/>
+              </a:rPr>
+              <a:t>핵심 기능 6가지 — 모두 MVP에서 동작 확인</a:t>
+            </a:r>
+          </a:p>
+        </p:txBody>
+      </p:sp>
+      <p:sp>
+        <p:nvSpPr>
+          <p:cNvPr id="26" name="Rounded Rectangle 25"/>
           <p:cNvSpPr/>
           <p:nvPr/>
         </p:nvSpPr>
         <p:spPr>
           <a:xfrm>
-            <a:off x="868680" y="5122354"/>
-            <a:ext cx="5074920" cy="676656"/>
+            <a:off x="5486400" y="1938528"/>
+            <a:ext cx="2921508" cy="1078992"/>
           </a:xfrm>
           <a:prstGeom prst="roundRect">
             <a:avLst>
-              <a:gd name="adj" fmla="val 10000"/>
+              <a:gd name="adj" fmla="val 8000"/>
             </a:avLst>
           </a:prstGeom>
           <a:solidFill>
-            <a:srgbClr val="181715"/>
+            <a:srgbClr val="F6F9FD"/>
           </a:solidFill>
-          <a:ln>
-            <a:noFill/>
+          <a:ln w="9525">
+            <a:solidFill>
+              <a:srgbClr val="D6E3F1"/>
+            </a:solidFill>
           </a:ln>
           <a:effectLst/>
         </p:spPr>
@@ -20166,157 +18931,25 @@
       </p:sp>
       <p:sp>
         <p:nvSpPr>
-          <p:cNvPr id="22" name="TextBox 21"/>
-          <p:cNvSpPr txBox="1"/>
-          <p:nvPr/>
-        </p:nvSpPr>
-        <p:spPr>
-          <a:xfrm>
-            <a:off x="1033271" y="5213794"/>
-            <a:ext cx="4745736" cy="219456"/>
-          </a:xfrm>
-          <a:prstGeom prst="rect">
-            <a:avLst/>
-          </a:prstGeom>
-          <a:noFill/>
-        </p:spPr>
-        <p:txBody>
-          <a:bodyPr wrap="square" anchor="t" lIns="0" rIns="0" tIns="0" bIns="0">
-            <a:spAutoFit/>
-          </a:bodyPr>
-          <a:lstStyle/>
-          <a:p>
-            <a:pPr algn="l">
-              <a:spcAft>
-                <a:spcPts val="200"/>
-              </a:spcAft>
-            </a:pPr>
-            <a:r>
-              <a:rPr sz="950" b="1">
-                <a:solidFill>
-                  <a:srgbClr val="CC785C"/>
-                </a:solidFill>
-                <a:latin typeface="Pretendard"/>
-                <a:ea typeface="Pretendard"/>
-              </a:rPr>
-              <a:t>MVP 범위: </a:t>
-            </a:r>
-            <a:r>
-              <a:rPr sz="950" b="1">
-                <a:solidFill>
-                  <a:srgbClr val="FAF9F5"/>
-                </a:solidFill>
-                <a:latin typeface="Pretendard"/>
-                <a:ea typeface="Pretendard"/>
-              </a:rPr>
-              <a:t>판단(위험 진단) → 행동(조치 초안) → 검증(승인·감사)</a:t>
-            </a:r>
-          </a:p>
-        </p:txBody>
-      </p:sp>
-      <p:sp>
-        <p:nvSpPr>
-          <p:cNvPr id="23" name="TextBox 22"/>
-          <p:cNvSpPr txBox="1"/>
-          <p:nvPr/>
-        </p:nvSpPr>
-        <p:spPr>
-          <a:xfrm>
-            <a:off x="1033271" y="5488114"/>
-            <a:ext cx="4745736" cy="219456"/>
-          </a:xfrm>
-          <a:prstGeom prst="rect">
-            <a:avLst/>
-          </a:prstGeom>
-          <a:noFill/>
-        </p:spPr>
-        <p:txBody>
-          <a:bodyPr wrap="square" anchor="t" lIns="0" rIns="0" tIns="0" bIns="0">
-            <a:spAutoFit/>
-          </a:bodyPr>
-          <a:lstStyle/>
-          <a:p>
-            <a:pPr algn="l">
-              <a:spcAft>
-                <a:spcPts val="200"/>
-              </a:spcAft>
-            </a:pPr>
-            <a:r>
-              <a:rPr sz="800" b="0">
-                <a:solidFill>
-                  <a:srgbClr val="A09D96"/>
-                </a:solidFill>
-                <a:latin typeface="Pretendard"/>
-                <a:ea typeface="Pretendard"/>
-              </a:rPr>
-              <a:t>챌린지가 요구하는 AI Agent 3요소를 한 화면에서 시연 — github.com/LSB-afk/JB-Fin-AI-Challenge</a:t>
-            </a:r>
-          </a:p>
-        </p:txBody>
-      </p:sp>
-      <p:sp>
-        <p:nvSpPr>
-          <p:cNvPr id="24" name="TextBox 23"/>
-          <p:cNvSpPr txBox="1"/>
-          <p:nvPr/>
-        </p:nvSpPr>
-        <p:spPr>
-          <a:xfrm>
-            <a:off x="6263640" y="1664208"/>
-            <a:ext cx="5212080" cy="237744"/>
-          </a:xfrm>
-          <a:prstGeom prst="rect">
-            <a:avLst/>
-          </a:prstGeom>
-          <a:noFill/>
-        </p:spPr>
-        <p:txBody>
-          <a:bodyPr wrap="square" anchor="t" lIns="0" rIns="0" tIns="0" bIns="0">
-            <a:spAutoFit/>
-          </a:bodyPr>
-          <a:lstStyle/>
-          <a:p>
-            <a:pPr algn="l">
-              <a:spcAft>
-                <a:spcPts val="200"/>
-              </a:spcAft>
-            </a:pPr>
-            <a:r>
-              <a:rPr sz="1150" b="1">
-                <a:solidFill>
-                  <a:srgbClr val="141413"/>
-                </a:solidFill>
-                <a:latin typeface="Pretendard"/>
-                <a:ea typeface="Pretendard"/>
-              </a:rPr>
-              <a:t>핵심 기능 6가지 — 모두 MVP에서 동작 확인</a:t>
-            </a:r>
-          </a:p>
-        </p:txBody>
-      </p:sp>
-      <p:sp>
-        <p:nvSpPr>
-          <p:cNvPr id="25" name="Rounded Rectangle 24"/>
+          <p:cNvPr id="27" name="Rounded Rectangle 26"/>
           <p:cNvSpPr/>
           <p:nvPr/>
         </p:nvSpPr>
         <p:spPr>
           <a:xfrm>
-            <a:off x="6263640" y="1956816"/>
-            <a:ext cx="2514600" cy="1152144"/>
+            <a:off x="7694676" y="2011680"/>
+            <a:ext cx="621792" cy="201168"/>
           </a:xfrm>
           <a:prstGeom prst="roundRect">
             <a:avLst>
-              <a:gd name="adj" fmla="val 8000"/>
+              <a:gd name="adj" fmla="val 50000"/>
             </a:avLst>
           </a:prstGeom>
           <a:solidFill>
-            <a:srgbClr val="F5F0E8"/>
+            <a:srgbClr val="E2F7F1"/>
           </a:solidFill>
-          <a:ln w="9525">
-            <a:solidFill>
-              <a:srgbClr val="E6DFD8"/>
-            </a:solidFill>
+          <a:ln>
+            <a:noFill/>
           </a:ln>
           <a:effectLst/>
         </p:spPr>
@@ -20335,34 +18968,176 @@
           </a:fontRef>
         </p:style>
         <p:txBody>
-          <a:bodyPr rtlCol="0" anchor="ctr"/>
+          <a:bodyPr rtlCol="0" anchor="ctr" wrap="square" lIns="38100" rIns="38100" tIns="12700" bIns="12700"/>
           <a:lstStyle/>
           <a:p>
             <a:pPr algn="ctr"/>
-          </a:p>
-        </p:txBody>
-      </p:sp>
-      <p:sp>
-        <p:nvSpPr>
-          <p:cNvPr id="26" name="Rounded Rectangle 25"/>
+            <a:r>
+              <a:rPr sz="700" b="1">
+                <a:solidFill>
+                  <a:srgbClr val="0F8F72"/>
+                </a:solidFill>
+                <a:latin typeface="Pretendard"/>
+                <a:ea typeface="Pretendard"/>
+              </a:rPr>
+              <a:t>구현 완료</a:t>
+            </a:r>
+          </a:p>
+        </p:txBody>
+      </p:sp>
+      <p:sp>
+        <p:nvSpPr>
+          <p:cNvPr id="28" name="TextBox 27"/>
+          <p:cNvSpPr txBox="1"/>
+          <p:nvPr/>
+        </p:nvSpPr>
+        <p:spPr>
+          <a:xfrm>
+            <a:off x="5596128" y="2002536"/>
+            <a:ext cx="2052828" cy="219456"/>
+          </a:xfrm>
+          <a:prstGeom prst="rect">
+            <a:avLst/>
+          </a:prstGeom>
+          <a:noFill/>
+        </p:spPr>
+        <p:txBody>
+          <a:bodyPr wrap="square" anchor="t" lIns="0" rIns="0" tIns="0" bIns="0">
+            <a:spAutoFit/>
+          </a:bodyPr>
+          <a:lstStyle/>
+          <a:p>
+            <a:pPr algn="l">
+              <a:spcAft>
+                <a:spcPts val="200"/>
+              </a:spcAft>
+            </a:pPr>
+            <a:r>
+              <a:rPr sz="950" b="1">
+                <a:solidFill>
+                  <a:srgbClr val="0F1F3A"/>
+                </a:solidFill>
+                <a:latin typeface="Pretendard"/>
+                <a:ea typeface="Pretendard"/>
+              </a:rPr>
+              <a:t>케이스 보드</a:t>
+            </a:r>
+          </a:p>
+        </p:txBody>
+      </p:sp>
+      <p:sp>
+        <p:nvSpPr>
+          <p:cNvPr id="29" name="TextBox 28"/>
+          <p:cNvSpPr txBox="1"/>
+          <p:nvPr/>
+        </p:nvSpPr>
+        <p:spPr>
+          <a:xfrm>
+            <a:off x="5596128" y="2249424"/>
+            <a:ext cx="2702052" cy="420624"/>
+          </a:xfrm>
+          <a:prstGeom prst="rect">
+            <a:avLst/>
+          </a:prstGeom>
+          <a:noFill/>
+        </p:spPr>
+        <p:txBody>
+          <a:bodyPr wrap="square" anchor="t" lIns="0" rIns="0" tIns="0" bIns="0">
+            <a:spAutoFit/>
+          </a:bodyPr>
+          <a:lstStyle/>
+          <a:p>
+            <a:pPr algn="l">
+              <a:spcAft>
+                <a:spcPts val="200"/>
+              </a:spcAft>
+            </a:pPr>
+            <a:r>
+              <a:rPr sz="800" b="0">
+                <a:solidFill>
+                  <a:srgbClr val="637797"/>
+                </a:solidFill>
+                <a:latin typeface="Pretendard"/>
+                <a:ea typeface="Pretendard"/>
+              </a:rPr>
+              <a:t>위험 케이스를 칸반/큐로 관리, 클릭 시 근거·담당 에이전트 연동</a:t>
+            </a:r>
+          </a:p>
+        </p:txBody>
+      </p:sp>
+      <p:sp>
+        <p:nvSpPr>
+          <p:cNvPr id="30" name="TextBox 29"/>
+          <p:cNvSpPr txBox="1"/>
+          <p:nvPr/>
+        </p:nvSpPr>
+        <p:spPr>
+          <a:xfrm>
+            <a:off x="5596128" y="2743200"/>
+            <a:ext cx="2702052" cy="219456"/>
+          </a:xfrm>
+          <a:prstGeom prst="rect">
+            <a:avLst/>
+          </a:prstGeom>
+          <a:noFill/>
+        </p:spPr>
+        <p:txBody>
+          <a:bodyPr wrap="square" anchor="t" lIns="0" rIns="0" tIns="0" bIns="0">
+            <a:spAutoFit/>
+          </a:bodyPr>
+          <a:lstStyle/>
+          <a:p>
+            <a:pPr algn="l">
+              <a:spcAft>
+                <a:spcPts val="200"/>
+              </a:spcAft>
+            </a:pPr>
+            <a:r>
+              <a:rPr sz="750" b="1">
+                <a:solidFill>
+                  <a:srgbClr val="07569D"/>
+                </a:solidFill>
+                <a:latin typeface="Pretendard"/>
+                <a:ea typeface="Pretendard"/>
+              </a:rPr>
+              <a:t>해결: </a:t>
+            </a:r>
+            <a:r>
+              <a:rPr sz="750" b="0">
+                <a:solidFill>
+                  <a:srgbClr val="637797"/>
+                </a:solidFill>
+                <a:latin typeface="Pretendard"/>
+                <a:ea typeface="Pretendard"/>
+              </a:rPr>
+              <a:t>흩어진 고객 위험의 단일 작업 화면</a:t>
+            </a:r>
+          </a:p>
+        </p:txBody>
+      </p:sp>
+      <p:sp>
+        <p:nvSpPr>
+          <p:cNvPr id="31" name="Rounded Rectangle 30"/>
           <p:cNvSpPr/>
           <p:nvPr/>
         </p:nvSpPr>
         <p:spPr>
           <a:xfrm>
-            <a:off x="7699248" y="2039112"/>
-            <a:ext cx="969264" cy="219456"/>
+            <a:off x="8554212" y="1938528"/>
+            <a:ext cx="2921508" cy="1078992"/>
           </a:xfrm>
           <a:prstGeom prst="roundRect">
             <a:avLst>
-              <a:gd name="adj" fmla="val 50000"/>
+              <a:gd name="adj" fmla="val 8000"/>
             </a:avLst>
           </a:prstGeom>
           <a:solidFill>
-            <a:srgbClr val="5DB8A6"/>
+            <a:srgbClr val="F6F9FD"/>
           </a:solidFill>
-          <a:ln>
-            <a:noFill/>
+          <a:ln w="9525">
+            <a:solidFill>
+              <a:srgbClr val="D6E3F1"/>
+            </a:solidFill>
           </a:ln>
           <a:effectLst/>
         </p:spPr>
@@ -20381,176 +19156,34 @@
           </a:fontRef>
         </p:style>
         <p:txBody>
-          <a:bodyPr rtlCol="0" anchor="ctr" wrap="square" lIns="50800" rIns="50800" tIns="12700" bIns="12700"/>
+          <a:bodyPr rtlCol="0" anchor="ctr"/>
           <a:lstStyle/>
           <a:p>
             <a:pPr algn="ctr"/>
-            <a:r>
-              <a:rPr sz="750" b="1">
-                <a:solidFill>
-                  <a:srgbClr val="FFFFFF"/>
-                </a:solidFill>
-                <a:latin typeface="Pretendard"/>
-                <a:ea typeface="Pretendard"/>
-              </a:rPr>
-              <a:t>MVP 구현 완료</a:t>
-            </a:r>
-          </a:p>
-        </p:txBody>
-      </p:sp>
-      <p:sp>
-        <p:nvSpPr>
-          <p:cNvPr id="27" name="TextBox 26"/>
-          <p:cNvSpPr txBox="1"/>
-          <p:nvPr/>
-        </p:nvSpPr>
-        <p:spPr>
-          <a:xfrm>
-            <a:off x="6382512" y="2029968"/>
-            <a:ext cx="1280160" cy="219456"/>
-          </a:xfrm>
-          <a:prstGeom prst="rect">
-            <a:avLst/>
-          </a:prstGeom>
-          <a:noFill/>
-        </p:spPr>
-        <p:txBody>
-          <a:bodyPr wrap="square" anchor="t" lIns="0" rIns="0" tIns="0" bIns="0">
-            <a:spAutoFit/>
-          </a:bodyPr>
-          <a:lstStyle/>
-          <a:p>
-            <a:pPr algn="l">
-              <a:spcAft>
-                <a:spcPts val="200"/>
-              </a:spcAft>
-            </a:pPr>
-            <a:r>
-              <a:rPr sz="1050" b="1">
-                <a:solidFill>
-                  <a:srgbClr val="141413"/>
-                </a:solidFill>
-                <a:latin typeface="Pretendard"/>
-                <a:ea typeface="Pretendard"/>
-              </a:rPr>
-              <a:t>Case 보드</a:t>
-            </a:r>
-          </a:p>
-        </p:txBody>
-      </p:sp>
-      <p:sp>
-        <p:nvSpPr>
-          <p:cNvPr id="28" name="TextBox 27"/>
-          <p:cNvSpPr txBox="1"/>
-          <p:nvPr/>
-        </p:nvSpPr>
-        <p:spPr>
-          <a:xfrm>
-            <a:off x="6382512" y="2286000"/>
-            <a:ext cx="2276856" cy="457200"/>
-          </a:xfrm>
-          <a:prstGeom prst="rect">
-            <a:avLst/>
-          </a:prstGeom>
-          <a:noFill/>
-        </p:spPr>
-        <p:txBody>
-          <a:bodyPr wrap="square" anchor="t" lIns="0" rIns="0" tIns="0" bIns="0">
-            <a:spAutoFit/>
-          </a:bodyPr>
-          <a:lstStyle/>
-          <a:p>
-            <a:pPr algn="l">
-              <a:spcAft>
-                <a:spcPts val="200"/>
-              </a:spcAft>
-            </a:pPr>
-            <a:r>
-              <a:rPr sz="850" b="0">
-                <a:solidFill>
-                  <a:srgbClr val="3D3D3A"/>
-                </a:solidFill>
-                <a:latin typeface="Pretendard"/>
-                <a:ea typeface="Pretendard"/>
-              </a:rPr>
-              <a:t>위험 케이스를 칸반/큐로 관리, 클릭 시 근거·담당 Agent 연동</a:t>
-            </a:r>
-          </a:p>
-        </p:txBody>
-      </p:sp>
-      <p:sp>
-        <p:nvSpPr>
-          <p:cNvPr id="29" name="TextBox 28"/>
-          <p:cNvSpPr txBox="1"/>
-          <p:nvPr/>
-        </p:nvSpPr>
-        <p:spPr>
-          <a:xfrm>
-            <a:off x="6382512" y="2816352"/>
-            <a:ext cx="2276856" cy="237744"/>
-          </a:xfrm>
-          <a:prstGeom prst="rect">
-            <a:avLst/>
-          </a:prstGeom>
-          <a:noFill/>
-        </p:spPr>
-        <p:txBody>
-          <a:bodyPr wrap="square" anchor="t" lIns="0" rIns="0" tIns="0" bIns="0">
-            <a:spAutoFit/>
-          </a:bodyPr>
-          <a:lstStyle/>
-          <a:p>
-            <a:pPr algn="l">
-              <a:spcAft>
-                <a:spcPts val="200"/>
-              </a:spcAft>
-            </a:pPr>
-            <a:r>
-              <a:rPr sz="800" b="1">
-                <a:solidFill>
-                  <a:srgbClr val="A9583E"/>
-                </a:solidFill>
-                <a:latin typeface="Pretendard"/>
-                <a:ea typeface="Pretendard"/>
-              </a:rPr>
-              <a:t>해결: </a:t>
-            </a:r>
-            <a:r>
-              <a:rPr sz="800" b="0">
-                <a:solidFill>
-                  <a:srgbClr val="6C6A64"/>
-                </a:solidFill>
-                <a:latin typeface="Pretendard"/>
-                <a:ea typeface="Pretendard"/>
-              </a:rPr>
-              <a:t>흩어진 고객 위험의 단일 작업 화면</a:t>
-            </a:r>
-          </a:p>
-        </p:txBody>
-      </p:sp>
-      <p:sp>
-        <p:nvSpPr>
-          <p:cNvPr id="30" name="Rounded Rectangle 29"/>
+          </a:p>
+        </p:txBody>
+      </p:sp>
+      <p:sp>
+        <p:nvSpPr>
+          <p:cNvPr id="32" name="Rounded Rectangle 31"/>
           <p:cNvSpPr/>
           <p:nvPr/>
         </p:nvSpPr>
         <p:spPr>
           <a:xfrm>
-            <a:off x="8961120" y="1956816"/>
-            <a:ext cx="2514600" cy="1152144"/>
+            <a:off x="10762488" y="2011680"/>
+            <a:ext cx="621792" cy="201168"/>
           </a:xfrm>
           <a:prstGeom prst="roundRect">
             <a:avLst>
-              <a:gd name="adj" fmla="val 8000"/>
+              <a:gd name="adj" fmla="val 50000"/>
             </a:avLst>
           </a:prstGeom>
           <a:solidFill>
-            <a:srgbClr val="F5F0E8"/>
+            <a:srgbClr val="E2F7F1"/>
           </a:solidFill>
-          <a:ln w="9525">
-            <a:solidFill>
-              <a:srgbClr val="E6DFD8"/>
-            </a:solidFill>
+          <a:ln>
+            <a:noFill/>
           </a:ln>
           <a:effectLst/>
         </p:spPr>
@@ -20569,34 +19202,176 @@
           </a:fontRef>
         </p:style>
         <p:txBody>
-          <a:bodyPr rtlCol="0" anchor="ctr"/>
+          <a:bodyPr rtlCol="0" anchor="ctr" wrap="square" lIns="38100" rIns="38100" tIns="12700" bIns="12700"/>
           <a:lstStyle/>
           <a:p>
             <a:pPr algn="ctr"/>
-          </a:p>
-        </p:txBody>
-      </p:sp>
-      <p:sp>
-        <p:nvSpPr>
-          <p:cNvPr id="31" name="Rounded Rectangle 30"/>
+            <a:r>
+              <a:rPr sz="700" b="1">
+                <a:solidFill>
+                  <a:srgbClr val="0F8F72"/>
+                </a:solidFill>
+                <a:latin typeface="Pretendard"/>
+                <a:ea typeface="Pretendard"/>
+              </a:rPr>
+              <a:t>구현 완료</a:t>
+            </a:r>
+          </a:p>
+        </p:txBody>
+      </p:sp>
+      <p:sp>
+        <p:nvSpPr>
+          <p:cNvPr id="33" name="TextBox 32"/>
+          <p:cNvSpPr txBox="1"/>
+          <p:nvPr/>
+        </p:nvSpPr>
+        <p:spPr>
+          <a:xfrm>
+            <a:off x="8663940" y="2002536"/>
+            <a:ext cx="2052828" cy="219456"/>
+          </a:xfrm>
+          <a:prstGeom prst="rect">
+            <a:avLst/>
+          </a:prstGeom>
+          <a:noFill/>
+        </p:spPr>
+        <p:txBody>
+          <a:bodyPr wrap="square" anchor="t" lIns="0" rIns="0" tIns="0" bIns="0">
+            <a:spAutoFit/>
+          </a:bodyPr>
+          <a:lstStyle/>
+          <a:p>
+            <a:pPr algn="l">
+              <a:spcAft>
+                <a:spcPts val="200"/>
+              </a:spcAft>
+            </a:pPr>
+            <a:r>
+              <a:rPr sz="950" b="1">
+                <a:solidFill>
+                  <a:srgbClr val="0F1F3A"/>
+                </a:solidFill>
+                <a:latin typeface="Pretendard"/>
+                <a:ea typeface="Pretendard"/>
+              </a:rPr>
+              <a:t>실행 이력(에이전트 로그)</a:t>
+            </a:r>
+          </a:p>
+        </p:txBody>
+      </p:sp>
+      <p:sp>
+        <p:nvSpPr>
+          <p:cNvPr id="34" name="TextBox 33"/>
+          <p:cNvSpPr txBox="1"/>
+          <p:nvPr/>
+        </p:nvSpPr>
+        <p:spPr>
+          <a:xfrm>
+            <a:off x="8663940" y="2249424"/>
+            <a:ext cx="2702052" cy="420624"/>
+          </a:xfrm>
+          <a:prstGeom prst="rect">
+            <a:avLst/>
+          </a:prstGeom>
+          <a:noFill/>
+        </p:spPr>
+        <p:txBody>
+          <a:bodyPr wrap="square" anchor="t" lIns="0" rIns="0" tIns="0" bIns="0">
+            <a:spAutoFit/>
+          </a:bodyPr>
+          <a:lstStyle/>
+          <a:p>
+            <a:pPr algn="l">
+              <a:spcAft>
+                <a:spcPts val="200"/>
+              </a:spcAft>
+            </a:pPr>
+            <a:r>
+              <a:rPr sz="800" b="0">
+                <a:solidFill>
+                  <a:srgbClr val="637797"/>
+                </a:solidFill>
+                <a:latin typeface="Pretendard"/>
+                <a:ea typeface="Pretendard"/>
+              </a:rPr>
+              <a:t>실행/지시마다 로그 생성, 상태 전이 자동 기록</a:t>
+            </a:r>
+          </a:p>
+        </p:txBody>
+      </p:sp>
+      <p:sp>
+        <p:nvSpPr>
+          <p:cNvPr id="35" name="TextBox 34"/>
+          <p:cNvSpPr txBox="1"/>
+          <p:nvPr/>
+        </p:nvSpPr>
+        <p:spPr>
+          <a:xfrm>
+            <a:off x="8663940" y="2743200"/>
+            <a:ext cx="2702052" cy="219456"/>
+          </a:xfrm>
+          <a:prstGeom prst="rect">
+            <a:avLst/>
+          </a:prstGeom>
+          <a:noFill/>
+        </p:spPr>
+        <p:txBody>
+          <a:bodyPr wrap="square" anchor="t" lIns="0" rIns="0" tIns="0" bIns="0">
+            <a:spAutoFit/>
+          </a:bodyPr>
+          <a:lstStyle/>
+          <a:p>
+            <a:pPr algn="l">
+              <a:spcAft>
+                <a:spcPts val="200"/>
+              </a:spcAft>
+            </a:pPr>
+            <a:r>
+              <a:rPr sz="750" b="1">
+                <a:solidFill>
+                  <a:srgbClr val="07569D"/>
+                </a:solidFill>
+                <a:latin typeface="Pretendard"/>
+                <a:ea typeface="Pretendard"/>
+              </a:rPr>
+              <a:t>해결: </a:t>
+            </a:r>
+            <a:r>
+              <a:rPr sz="750" b="0">
+                <a:solidFill>
+                  <a:srgbClr val="637797"/>
+                </a:solidFill>
+                <a:latin typeface="Pretendard"/>
+                <a:ea typeface="Pretendard"/>
+              </a:rPr>
+              <a:t>AI 판단 과정의 투명한 추적</a:t>
+            </a:r>
+          </a:p>
+        </p:txBody>
+      </p:sp>
+      <p:sp>
+        <p:nvSpPr>
+          <p:cNvPr id="36" name="Rounded Rectangle 35"/>
           <p:cNvSpPr/>
           <p:nvPr/>
         </p:nvSpPr>
         <p:spPr>
           <a:xfrm>
-            <a:off x="10396728" y="2039112"/>
-            <a:ext cx="969264" cy="219456"/>
+            <a:off x="5486400" y="3127248"/>
+            <a:ext cx="2921508" cy="1078992"/>
           </a:xfrm>
           <a:prstGeom prst="roundRect">
             <a:avLst>
-              <a:gd name="adj" fmla="val 50000"/>
+              <a:gd name="adj" fmla="val 8000"/>
             </a:avLst>
           </a:prstGeom>
           <a:solidFill>
-            <a:srgbClr val="5DB8A6"/>
+            <a:srgbClr val="F6F9FD"/>
           </a:solidFill>
-          <a:ln>
-            <a:noFill/>
+          <a:ln w="9525">
+            <a:solidFill>
+              <a:srgbClr val="D6E3F1"/>
+            </a:solidFill>
           </a:ln>
           <a:effectLst/>
         </p:spPr>
@@ -20615,176 +19390,34 @@
           </a:fontRef>
         </p:style>
         <p:txBody>
-          <a:bodyPr rtlCol="0" anchor="ctr" wrap="square" lIns="50800" rIns="50800" tIns="12700" bIns="12700"/>
+          <a:bodyPr rtlCol="0" anchor="ctr"/>
           <a:lstStyle/>
           <a:p>
             <a:pPr algn="ctr"/>
-            <a:r>
-              <a:rPr sz="750" b="1">
-                <a:solidFill>
-                  <a:srgbClr val="FFFFFF"/>
-                </a:solidFill>
-                <a:latin typeface="Pretendard"/>
-                <a:ea typeface="Pretendard"/>
-              </a:rPr>
-              <a:t>MVP 구현 완료</a:t>
-            </a:r>
-          </a:p>
-        </p:txBody>
-      </p:sp>
-      <p:sp>
-        <p:nvSpPr>
-          <p:cNvPr id="32" name="TextBox 31"/>
-          <p:cNvSpPr txBox="1"/>
-          <p:nvPr/>
-        </p:nvSpPr>
-        <p:spPr>
-          <a:xfrm>
-            <a:off x="9079992" y="2029968"/>
-            <a:ext cx="1280160" cy="219456"/>
-          </a:xfrm>
-          <a:prstGeom prst="rect">
-            <a:avLst/>
-          </a:prstGeom>
-          <a:noFill/>
-        </p:spPr>
-        <p:txBody>
-          <a:bodyPr wrap="square" anchor="t" lIns="0" rIns="0" tIns="0" bIns="0">
-            <a:spAutoFit/>
-          </a:bodyPr>
-          <a:lstStyle/>
-          <a:p>
-            <a:pPr algn="l">
-              <a:spcAft>
-                <a:spcPts val="200"/>
-              </a:spcAft>
-            </a:pPr>
-            <a:r>
-              <a:rPr sz="1050" b="1">
-                <a:solidFill>
-                  <a:srgbClr val="141413"/>
-                </a:solidFill>
-                <a:latin typeface="Pretendard"/>
-                <a:ea typeface="Pretendard"/>
-              </a:rPr>
-              <a:t>AgentRun 실행 로그</a:t>
-            </a:r>
-          </a:p>
-        </p:txBody>
-      </p:sp>
-      <p:sp>
-        <p:nvSpPr>
-          <p:cNvPr id="33" name="TextBox 32"/>
-          <p:cNvSpPr txBox="1"/>
-          <p:nvPr/>
-        </p:nvSpPr>
-        <p:spPr>
-          <a:xfrm>
-            <a:off x="9079992" y="2286000"/>
-            <a:ext cx="2276856" cy="457200"/>
-          </a:xfrm>
-          <a:prstGeom prst="rect">
-            <a:avLst/>
-          </a:prstGeom>
-          <a:noFill/>
-        </p:spPr>
-        <p:txBody>
-          <a:bodyPr wrap="square" anchor="t" lIns="0" rIns="0" tIns="0" bIns="0">
-            <a:spAutoFit/>
-          </a:bodyPr>
-          <a:lstStyle/>
-          <a:p>
-            <a:pPr algn="l">
-              <a:spcAft>
-                <a:spcPts val="200"/>
-              </a:spcAft>
-            </a:pPr>
-            <a:r>
-              <a:rPr sz="850" b="0">
-                <a:solidFill>
-                  <a:srgbClr val="3D3D3A"/>
-                </a:solidFill>
-                <a:latin typeface="Pretendard"/>
-                <a:ea typeface="Pretendard"/>
-              </a:rPr>
-              <a:t>Run/Dispatch마다 실행 로그 생성, 상태 전이 자동 기록</a:t>
-            </a:r>
-          </a:p>
-        </p:txBody>
-      </p:sp>
-      <p:sp>
-        <p:nvSpPr>
-          <p:cNvPr id="34" name="TextBox 33"/>
-          <p:cNvSpPr txBox="1"/>
-          <p:nvPr/>
-        </p:nvSpPr>
-        <p:spPr>
-          <a:xfrm>
-            <a:off x="9079992" y="2816352"/>
-            <a:ext cx="2276856" cy="237744"/>
-          </a:xfrm>
-          <a:prstGeom prst="rect">
-            <a:avLst/>
-          </a:prstGeom>
-          <a:noFill/>
-        </p:spPr>
-        <p:txBody>
-          <a:bodyPr wrap="square" anchor="t" lIns="0" rIns="0" tIns="0" bIns="0">
-            <a:spAutoFit/>
-          </a:bodyPr>
-          <a:lstStyle/>
-          <a:p>
-            <a:pPr algn="l">
-              <a:spcAft>
-                <a:spcPts val="200"/>
-              </a:spcAft>
-            </a:pPr>
-            <a:r>
-              <a:rPr sz="800" b="1">
-                <a:solidFill>
-                  <a:srgbClr val="A9583E"/>
-                </a:solidFill>
-                <a:latin typeface="Pretendard"/>
-                <a:ea typeface="Pretendard"/>
-              </a:rPr>
-              <a:t>해결: </a:t>
-            </a:r>
-            <a:r>
-              <a:rPr sz="800" b="0">
-                <a:solidFill>
-                  <a:srgbClr val="6C6A64"/>
-                </a:solidFill>
-                <a:latin typeface="Pretendard"/>
-                <a:ea typeface="Pretendard"/>
-              </a:rPr>
-              <a:t>AI 판단 과정의 투명한 추적</a:t>
-            </a:r>
-          </a:p>
-        </p:txBody>
-      </p:sp>
-      <p:sp>
-        <p:nvSpPr>
-          <p:cNvPr id="35" name="Rounded Rectangle 34"/>
+          </a:p>
+        </p:txBody>
+      </p:sp>
+      <p:sp>
+        <p:nvSpPr>
+          <p:cNvPr id="37" name="Rounded Rectangle 36"/>
           <p:cNvSpPr/>
           <p:nvPr/>
         </p:nvSpPr>
         <p:spPr>
           <a:xfrm>
-            <a:off x="6263640" y="3218688"/>
-            <a:ext cx="2514600" cy="1152144"/>
+            <a:off x="7694676" y="3200400"/>
+            <a:ext cx="621792" cy="201168"/>
           </a:xfrm>
           <a:prstGeom prst="roundRect">
             <a:avLst>
-              <a:gd name="adj" fmla="val 8000"/>
+              <a:gd name="adj" fmla="val 50000"/>
             </a:avLst>
           </a:prstGeom>
           <a:solidFill>
-            <a:srgbClr val="F5F0E8"/>
+            <a:srgbClr val="E2F7F1"/>
           </a:solidFill>
-          <a:ln w="9525">
-            <a:solidFill>
-              <a:srgbClr val="E6DFD8"/>
-            </a:solidFill>
+          <a:ln>
+            <a:noFill/>
           </a:ln>
           <a:effectLst/>
         </p:spPr>
@@ -20803,34 +19436,176 @@
           </a:fontRef>
         </p:style>
         <p:txBody>
-          <a:bodyPr rtlCol="0" anchor="ctr"/>
+          <a:bodyPr rtlCol="0" anchor="ctr" wrap="square" lIns="38100" rIns="38100" tIns="12700" bIns="12700"/>
           <a:lstStyle/>
           <a:p>
             <a:pPr algn="ctr"/>
-          </a:p>
-        </p:txBody>
-      </p:sp>
-      <p:sp>
-        <p:nvSpPr>
-          <p:cNvPr id="36" name="Rounded Rectangle 35"/>
+            <a:r>
+              <a:rPr sz="700" b="1">
+                <a:solidFill>
+                  <a:srgbClr val="0F8F72"/>
+                </a:solidFill>
+                <a:latin typeface="Pretendard"/>
+                <a:ea typeface="Pretendard"/>
+              </a:rPr>
+              <a:t>구현 완료</a:t>
+            </a:r>
+          </a:p>
+        </p:txBody>
+      </p:sp>
+      <p:sp>
+        <p:nvSpPr>
+          <p:cNvPr id="38" name="TextBox 37"/>
+          <p:cNvSpPr txBox="1"/>
+          <p:nvPr/>
+        </p:nvSpPr>
+        <p:spPr>
+          <a:xfrm>
+            <a:off x="5596128" y="3191256"/>
+            <a:ext cx="2052828" cy="219456"/>
+          </a:xfrm>
+          <a:prstGeom prst="rect">
+            <a:avLst/>
+          </a:prstGeom>
+          <a:noFill/>
+        </p:spPr>
+        <p:txBody>
+          <a:bodyPr wrap="square" anchor="t" lIns="0" rIns="0" tIns="0" bIns="0">
+            <a:spAutoFit/>
+          </a:bodyPr>
+          <a:lstStyle/>
+          <a:p>
+            <a:pPr algn="l">
+              <a:spcAft>
+                <a:spcPts val="200"/>
+              </a:spcAft>
+            </a:pPr>
+            <a:r>
+              <a:rPr sz="950" b="1">
+                <a:solidFill>
+                  <a:srgbClr val="0F1F3A"/>
+                </a:solidFill>
+                <a:latin typeface="Pretendard"/>
+                <a:ea typeface="Pretendard"/>
+              </a:rPr>
+              <a:t>승인 (사람 검토)</a:t>
+            </a:r>
+          </a:p>
+        </p:txBody>
+      </p:sp>
+      <p:sp>
+        <p:nvSpPr>
+          <p:cNvPr id="39" name="TextBox 38"/>
+          <p:cNvSpPr txBox="1"/>
+          <p:nvPr/>
+        </p:nvSpPr>
+        <p:spPr>
+          <a:xfrm>
+            <a:off x="5596128" y="3438144"/>
+            <a:ext cx="2702052" cy="420624"/>
+          </a:xfrm>
+          <a:prstGeom prst="rect">
+            <a:avLst/>
+          </a:prstGeom>
+          <a:noFill/>
+        </p:spPr>
+        <p:txBody>
+          <a:bodyPr wrap="square" anchor="t" lIns="0" rIns="0" tIns="0" bIns="0">
+            <a:spAutoFit/>
+          </a:bodyPr>
+          <a:lstStyle/>
+          <a:p>
+            <a:pPr algn="l">
+              <a:spcAft>
+                <a:spcPts val="200"/>
+              </a:spcAft>
+            </a:pPr>
+            <a:r>
+              <a:rPr sz="800" b="0">
+                <a:solidFill>
+                  <a:srgbClr val="637797"/>
+                </a:solidFill>
+                <a:latin typeface="Pretendard"/>
+                <a:ea typeface="Pretendard"/>
+              </a:rPr>
+              <a:t>승인/반려 클릭으로 상태·감사·큐 숫자 즉시 갱신</a:t>
+            </a:r>
+          </a:p>
+        </p:txBody>
+      </p:sp>
+      <p:sp>
+        <p:nvSpPr>
+          <p:cNvPr id="40" name="TextBox 39"/>
+          <p:cNvSpPr txBox="1"/>
+          <p:nvPr/>
+        </p:nvSpPr>
+        <p:spPr>
+          <a:xfrm>
+            <a:off x="5596128" y="3931920"/>
+            <a:ext cx="2702052" cy="219456"/>
+          </a:xfrm>
+          <a:prstGeom prst="rect">
+            <a:avLst/>
+          </a:prstGeom>
+          <a:noFill/>
+        </p:spPr>
+        <p:txBody>
+          <a:bodyPr wrap="square" anchor="t" lIns="0" rIns="0" tIns="0" bIns="0">
+            <a:spAutoFit/>
+          </a:bodyPr>
+          <a:lstStyle/>
+          <a:p>
+            <a:pPr algn="l">
+              <a:spcAft>
+                <a:spcPts val="200"/>
+              </a:spcAft>
+            </a:pPr>
+            <a:r>
+              <a:rPr sz="750" b="1">
+                <a:solidFill>
+                  <a:srgbClr val="07569D"/>
+                </a:solidFill>
+                <a:latin typeface="Pretendard"/>
+                <a:ea typeface="Pretendard"/>
+              </a:rPr>
+              <a:t>해결: </a:t>
+            </a:r>
+            <a:r>
+              <a:rPr sz="750" b="0">
+                <a:solidFill>
+                  <a:srgbClr val="637797"/>
+                </a:solidFill>
+                <a:latin typeface="Pretendard"/>
+                <a:ea typeface="Pretendard"/>
+              </a:rPr>
+              <a:t>고객 대상 행동의 사람 통제</a:t>
+            </a:r>
+          </a:p>
+        </p:txBody>
+      </p:sp>
+      <p:sp>
+        <p:nvSpPr>
+          <p:cNvPr id="41" name="Rounded Rectangle 40"/>
           <p:cNvSpPr/>
           <p:nvPr/>
         </p:nvSpPr>
         <p:spPr>
           <a:xfrm>
-            <a:off x="7699248" y="3300984"/>
-            <a:ext cx="969264" cy="219456"/>
+            <a:off x="8554212" y="3127248"/>
+            <a:ext cx="2921508" cy="1078992"/>
           </a:xfrm>
           <a:prstGeom prst="roundRect">
             <a:avLst>
-              <a:gd name="adj" fmla="val 50000"/>
+              <a:gd name="adj" fmla="val 8000"/>
             </a:avLst>
           </a:prstGeom>
           <a:solidFill>
-            <a:srgbClr val="5DB8A6"/>
+            <a:srgbClr val="F6F9FD"/>
           </a:solidFill>
-          <a:ln>
-            <a:noFill/>
+          <a:ln w="9525">
+            <a:solidFill>
+              <a:srgbClr val="D6E3F1"/>
+            </a:solidFill>
           </a:ln>
           <a:effectLst/>
         </p:spPr>
@@ -20849,176 +19624,34 @@
           </a:fontRef>
         </p:style>
         <p:txBody>
-          <a:bodyPr rtlCol="0" anchor="ctr" wrap="square" lIns="50800" rIns="50800" tIns="12700" bIns="12700"/>
+          <a:bodyPr rtlCol="0" anchor="ctr"/>
           <a:lstStyle/>
           <a:p>
             <a:pPr algn="ctr"/>
-            <a:r>
-              <a:rPr sz="750" b="1">
-                <a:solidFill>
-                  <a:srgbClr val="FFFFFF"/>
-                </a:solidFill>
-                <a:latin typeface="Pretendard"/>
-                <a:ea typeface="Pretendard"/>
-              </a:rPr>
-              <a:t>MVP 구현 완료</a:t>
-            </a:r>
-          </a:p>
-        </p:txBody>
-      </p:sp>
-      <p:sp>
-        <p:nvSpPr>
-          <p:cNvPr id="37" name="TextBox 36"/>
-          <p:cNvSpPr txBox="1"/>
-          <p:nvPr/>
-        </p:nvSpPr>
-        <p:spPr>
-          <a:xfrm>
-            <a:off x="6382512" y="3291840"/>
-            <a:ext cx="1280160" cy="219456"/>
-          </a:xfrm>
-          <a:prstGeom prst="rect">
-            <a:avLst/>
-          </a:prstGeom>
-          <a:noFill/>
-        </p:spPr>
-        <p:txBody>
-          <a:bodyPr wrap="square" anchor="t" lIns="0" rIns="0" tIns="0" bIns="0">
-            <a:spAutoFit/>
-          </a:bodyPr>
-          <a:lstStyle/>
-          <a:p>
-            <a:pPr algn="l">
-              <a:spcAft>
-                <a:spcPts val="200"/>
-              </a:spcAft>
-            </a:pPr>
-            <a:r>
-              <a:rPr sz="1050" b="1">
-                <a:solidFill>
-                  <a:srgbClr val="141413"/>
-                </a:solidFill>
-                <a:latin typeface="Pretendard"/>
-                <a:ea typeface="Pretendard"/>
-              </a:rPr>
-              <a:t>승인 큐</a:t>
-            </a:r>
-          </a:p>
-        </p:txBody>
-      </p:sp>
-      <p:sp>
-        <p:nvSpPr>
-          <p:cNvPr id="38" name="TextBox 37"/>
-          <p:cNvSpPr txBox="1"/>
-          <p:nvPr/>
-        </p:nvSpPr>
-        <p:spPr>
-          <a:xfrm>
-            <a:off x="6382512" y="3547872"/>
-            <a:ext cx="2276856" cy="457200"/>
-          </a:xfrm>
-          <a:prstGeom prst="rect">
-            <a:avLst/>
-          </a:prstGeom>
-          <a:noFill/>
-        </p:spPr>
-        <p:txBody>
-          <a:bodyPr wrap="square" anchor="t" lIns="0" rIns="0" tIns="0" bIns="0">
-            <a:spAutoFit/>
-          </a:bodyPr>
-          <a:lstStyle/>
-          <a:p>
-            <a:pPr algn="l">
-              <a:spcAft>
-                <a:spcPts val="200"/>
-              </a:spcAft>
-            </a:pPr>
-            <a:r>
-              <a:rPr sz="850" b="0">
-                <a:solidFill>
-                  <a:srgbClr val="3D3D3A"/>
-                </a:solidFill>
-                <a:latin typeface="Pretendard"/>
-                <a:ea typeface="Pretendard"/>
-              </a:rPr>
-              <a:t>Approve/Reject 클릭으로 상태·감사·큐 숫자 즉시 갱신</a:t>
-            </a:r>
-          </a:p>
-        </p:txBody>
-      </p:sp>
-      <p:sp>
-        <p:nvSpPr>
-          <p:cNvPr id="39" name="TextBox 38"/>
-          <p:cNvSpPr txBox="1"/>
-          <p:nvPr/>
-        </p:nvSpPr>
-        <p:spPr>
-          <a:xfrm>
-            <a:off x="6382512" y="4078224"/>
-            <a:ext cx="2276856" cy="237744"/>
-          </a:xfrm>
-          <a:prstGeom prst="rect">
-            <a:avLst/>
-          </a:prstGeom>
-          <a:noFill/>
-        </p:spPr>
-        <p:txBody>
-          <a:bodyPr wrap="square" anchor="t" lIns="0" rIns="0" tIns="0" bIns="0">
-            <a:spAutoFit/>
-          </a:bodyPr>
-          <a:lstStyle/>
-          <a:p>
-            <a:pPr algn="l">
-              <a:spcAft>
-                <a:spcPts val="200"/>
-              </a:spcAft>
-            </a:pPr>
-            <a:r>
-              <a:rPr sz="800" b="1">
-                <a:solidFill>
-                  <a:srgbClr val="A9583E"/>
-                </a:solidFill>
-                <a:latin typeface="Pretendard"/>
-                <a:ea typeface="Pretendard"/>
-              </a:rPr>
-              <a:t>해결: </a:t>
-            </a:r>
-            <a:r>
-              <a:rPr sz="800" b="0">
-                <a:solidFill>
-                  <a:srgbClr val="6C6A64"/>
-                </a:solidFill>
-                <a:latin typeface="Pretendard"/>
-                <a:ea typeface="Pretendard"/>
-              </a:rPr>
-              <a:t>고객 대상 행동의 사람 통제</a:t>
-            </a:r>
-          </a:p>
-        </p:txBody>
-      </p:sp>
-      <p:sp>
-        <p:nvSpPr>
-          <p:cNvPr id="40" name="Rounded Rectangle 39"/>
+          </a:p>
+        </p:txBody>
+      </p:sp>
+      <p:sp>
+        <p:nvSpPr>
+          <p:cNvPr id="42" name="Rounded Rectangle 41"/>
           <p:cNvSpPr/>
           <p:nvPr/>
         </p:nvSpPr>
         <p:spPr>
           <a:xfrm>
-            <a:off x="8961120" y="3218688"/>
-            <a:ext cx="2514600" cy="1152144"/>
+            <a:off x="10762488" y="3200400"/>
+            <a:ext cx="621792" cy="201168"/>
           </a:xfrm>
           <a:prstGeom prst="roundRect">
             <a:avLst>
-              <a:gd name="adj" fmla="val 8000"/>
+              <a:gd name="adj" fmla="val 50000"/>
             </a:avLst>
           </a:prstGeom>
           <a:solidFill>
-            <a:srgbClr val="F5F0E8"/>
+            <a:srgbClr val="E2F7F1"/>
           </a:solidFill>
-          <a:ln w="9525">
-            <a:solidFill>
-              <a:srgbClr val="E6DFD8"/>
-            </a:solidFill>
+          <a:ln>
+            <a:noFill/>
           </a:ln>
           <a:effectLst/>
         </p:spPr>
@@ -21037,34 +19670,176 @@
           </a:fontRef>
         </p:style>
         <p:txBody>
-          <a:bodyPr rtlCol="0" anchor="ctr"/>
+          <a:bodyPr rtlCol="0" anchor="ctr" wrap="square" lIns="38100" rIns="38100" tIns="12700" bIns="12700"/>
           <a:lstStyle/>
           <a:p>
             <a:pPr algn="ctr"/>
-          </a:p>
-        </p:txBody>
-      </p:sp>
-      <p:sp>
-        <p:nvSpPr>
-          <p:cNvPr id="41" name="Rounded Rectangle 40"/>
+            <a:r>
+              <a:rPr sz="700" b="1">
+                <a:solidFill>
+                  <a:srgbClr val="0F8F72"/>
+                </a:solidFill>
+                <a:latin typeface="Pretendard"/>
+                <a:ea typeface="Pretendard"/>
+              </a:rPr>
+              <a:t>구현 완료</a:t>
+            </a:r>
+          </a:p>
+        </p:txBody>
+      </p:sp>
+      <p:sp>
+        <p:nvSpPr>
+          <p:cNvPr id="43" name="TextBox 42"/>
+          <p:cNvSpPr txBox="1"/>
+          <p:nvPr/>
+        </p:nvSpPr>
+        <p:spPr>
+          <a:xfrm>
+            <a:off x="8663940" y="3191256"/>
+            <a:ext cx="2052828" cy="219456"/>
+          </a:xfrm>
+          <a:prstGeom prst="rect">
+            <a:avLst/>
+          </a:prstGeom>
+          <a:noFill/>
+        </p:spPr>
+        <p:txBody>
+          <a:bodyPr wrap="square" anchor="t" lIns="0" rIns="0" tIns="0" bIns="0">
+            <a:spAutoFit/>
+          </a:bodyPr>
+          <a:lstStyle/>
+          <a:p>
+            <a:pPr algn="l">
+              <a:spcAft>
+                <a:spcPts val="200"/>
+              </a:spcAft>
+            </a:pPr>
+            <a:r>
+              <a:rPr sz="950" b="1">
+                <a:solidFill>
+                  <a:srgbClr val="0F1F3A"/>
+                </a:solidFill>
+                <a:latin typeface="Pretendard"/>
+                <a:ea typeface="Pretendard"/>
+              </a:rPr>
+              <a:t>전세 보호</a:t>
+            </a:r>
+          </a:p>
+        </p:txBody>
+      </p:sp>
+      <p:sp>
+        <p:nvSpPr>
+          <p:cNvPr id="44" name="TextBox 43"/>
+          <p:cNvSpPr txBox="1"/>
+          <p:nvPr/>
+        </p:nvSpPr>
+        <p:spPr>
+          <a:xfrm>
+            <a:off x="8663940" y="3438144"/>
+            <a:ext cx="2702052" cy="420624"/>
+          </a:xfrm>
+          <a:prstGeom prst="rect">
+            <a:avLst/>
+          </a:prstGeom>
+          <a:noFill/>
+        </p:spPr>
+        <p:txBody>
+          <a:bodyPr wrap="square" anchor="t" lIns="0" rIns="0" tIns="0" bIns="0">
+            <a:spAutoFit/>
+          </a:bodyPr>
+          <a:lstStyle/>
+          <a:p>
+            <a:pPr algn="l">
+              <a:spcAft>
+                <a:spcPts val="200"/>
+              </a:spcAft>
+            </a:pPr>
+            <a:r>
+              <a:rPr sz="800" b="0">
+                <a:solidFill>
+                  <a:srgbClr val="637797"/>
+                </a:solidFill>
+                <a:latin typeface="Pretendard"/>
+                <a:ea typeface="Pretendard"/>
+              </a:rPr>
+              <a:t>전세가율·권리관계·자산 리스크·체크리스트·은행 연계 5대 진단</a:t>
+            </a:r>
+          </a:p>
+        </p:txBody>
+      </p:sp>
+      <p:sp>
+        <p:nvSpPr>
+          <p:cNvPr id="45" name="TextBox 44"/>
+          <p:cNvSpPr txBox="1"/>
+          <p:nvPr/>
+        </p:nvSpPr>
+        <p:spPr>
+          <a:xfrm>
+            <a:off x="8663940" y="3931920"/>
+            <a:ext cx="2702052" cy="219456"/>
+          </a:xfrm>
+          <a:prstGeom prst="rect">
+            <a:avLst/>
+          </a:prstGeom>
+          <a:noFill/>
+        </p:spPr>
+        <p:txBody>
+          <a:bodyPr wrap="square" anchor="t" lIns="0" rIns="0" tIns="0" bIns="0">
+            <a:spAutoFit/>
+          </a:bodyPr>
+          <a:lstStyle/>
+          <a:p>
+            <a:pPr algn="l">
+              <a:spcAft>
+                <a:spcPts val="200"/>
+              </a:spcAft>
+            </a:pPr>
+            <a:r>
+              <a:rPr sz="750" b="1">
+                <a:solidFill>
+                  <a:srgbClr val="07569D"/>
+                </a:solidFill>
+                <a:latin typeface="Pretendard"/>
+                <a:ea typeface="Pretendard"/>
+              </a:rPr>
+              <a:t>해결: </a:t>
+            </a:r>
+            <a:r>
+              <a:rPr sz="750" b="0">
+                <a:solidFill>
+                  <a:srgbClr val="637797"/>
+                </a:solidFill>
+                <a:latin typeface="Pretendard"/>
+                <a:ea typeface="Pretendard"/>
+              </a:rPr>
+              <a:t>전세사기 계약 전 예방</a:t>
+            </a:r>
+          </a:p>
+        </p:txBody>
+      </p:sp>
+      <p:sp>
+        <p:nvSpPr>
+          <p:cNvPr id="46" name="Rounded Rectangle 45"/>
           <p:cNvSpPr/>
           <p:nvPr/>
         </p:nvSpPr>
         <p:spPr>
           <a:xfrm>
-            <a:off x="10396728" y="3300984"/>
-            <a:ext cx="969264" cy="219456"/>
+            <a:off x="5486400" y="4315968"/>
+            <a:ext cx="2921508" cy="1078992"/>
           </a:xfrm>
           <a:prstGeom prst="roundRect">
             <a:avLst>
-              <a:gd name="adj" fmla="val 50000"/>
+              <a:gd name="adj" fmla="val 8000"/>
             </a:avLst>
           </a:prstGeom>
           <a:solidFill>
-            <a:srgbClr val="5DB8A6"/>
+            <a:srgbClr val="F6F9FD"/>
           </a:solidFill>
-          <a:ln>
-            <a:noFill/>
+          <a:ln w="9525">
+            <a:solidFill>
+              <a:srgbClr val="D6E3F1"/>
+            </a:solidFill>
           </a:ln>
           <a:effectLst/>
         </p:spPr>
@@ -21083,176 +19858,34 @@
           </a:fontRef>
         </p:style>
         <p:txBody>
-          <a:bodyPr rtlCol="0" anchor="ctr" wrap="square" lIns="50800" rIns="50800" tIns="12700" bIns="12700"/>
+          <a:bodyPr rtlCol="0" anchor="ctr"/>
           <a:lstStyle/>
           <a:p>
             <a:pPr algn="ctr"/>
-            <a:r>
-              <a:rPr sz="750" b="1">
-                <a:solidFill>
-                  <a:srgbClr val="FFFFFF"/>
-                </a:solidFill>
-                <a:latin typeface="Pretendard"/>
-                <a:ea typeface="Pretendard"/>
-              </a:rPr>
-              <a:t>MVP 구현 완료</a:t>
-            </a:r>
-          </a:p>
-        </p:txBody>
-      </p:sp>
-      <p:sp>
-        <p:nvSpPr>
-          <p:cNvPr id="42" name="TextBox 41"/>
-          <p:cNvSpPr txBox="1"/>
-          <p:nvPr/>
-        </p:nvSpPr>
-        <p:spPr>
-          <a:xfrm>
-            <a:off x="9079992" y="3291840"/>
-            <a:ext cx="1280160" cy="219456"/>
-          </a:xfrm>
-          <a:prstGeom prst="rect">
-            <a:avLst/>
-          </a:prstGeom>
-          <a:noFill/>
-        </p:spPr>
-        <p:txBody>
-          <a:bodyPr wrap="square" anchor="t" lIns="0" rIns="0" tIns="0" bIns="0">
-            <a:spAutoFit/>
-          </a:bodyPr>
-          <a:lstStyle/>
-          <a:p>
-            <a:pPr algn="l">
-              <a:spcAft>
-                <a:spcPts val="200"/>
-              </a:spcAft>
-            </a:pPr>
-            <a:r>
-              <a:rPr sz="1050" b="1">
-                <a:solidFill>
-                  <a:srgbClr val="141413"/>
-                </a:solidFill>
-                <a:latin typeface="Pretendard"/>
-                <a:ea typeface="Pretendard"/>
-              </a:rPr>
-              <a:t>전세 Shield</a:t>
-            </a:r>
-          </a:p>
-        </p:txBody>
-      </p:sp>
-      <p:sp>
-        <p:nvSpPr>
-          <p:cNvPr id="43" name="TextBox 42"/>
-          <p:cNvSpPr txBox="1"/>
-          <p:nvPr/>
-        </p:nvSpPr>
-        <p:spPr>
-          <a:xfrm>
-            <a:off x="9079992" y="3547872"/>
-            <a:ext cx="2276856" cy="457200"/>
-          </a:xfrm>
-          <a:prstGeom prst="rect">
-            <a:avLst/>
-          </a:prstGeom>
-          <a:noFill/>
-        </p:spPr>
-        <p:txBody>
-          <a:bodyPr wrap="square" anchor="t" lIns="0" rIns="0" tIns="0" bIns="0">
-            <a:spAutoFit/>
-          </a:bodyPr>
-          <a:lstStyle/>
-          <a:p>
-            <a:pPr algn="l">
-              <a:spcAft>
-                <a:spcPts val="200"/>
-              </a:spcAft>
-            </a:pPr>
-            <a:r>
-              <a:rPr sz="850" b="0">
-                <a:solidFill>
-                  <a:srgbClr val="3D3D3A"/>
-                </a:solidFill>
-                <a:latin typeface="Pretendard"/>
-                <a:ea typeface="Pretendard"/>
-              </a:rPr>
-              <a:t>전세가율·권리관계·자산리스크·체크리스트·은행연계 5대 진단</a:t>
-            </a:r>
-          </a:p>
-        </p:txBody>
-      </p:sp>
-      <p:sp>
-        <p:nvSpPr>
-          <p:cNvPr id="44" name="TextBox 43"/>
-          <p:cNvSpPr txBox="1"/>
-          <p:nvPr/>
-        </p:nvSpPr>
-        <p:spPr>
-          <a:xfrm>
-            <a:off x="9079992" y="4078224"/>
-            <a:ext cx="2276856" cy="237744"/>
-          </a:xfrm>
-          <a:prstGeom prst="rect">
-            <a:avLst/>
-          </a:prstGeom>
-          <a:noFill/>
-        </p:spPr>
-        <p:txBody>
-          <a:bodyPr wrap="square" anchor="t" lIns="0" rIns="0" tIns="0" bIns="0">
-            <a:spAutoFit/>
-          </a:bodyPr>
-          <a:lstStyle/>
-          <a:p>
-            <a:pPr algn="l">
-              <a:spcAft>
-                <a:spcPts val="200"/>
-              </a:spcAft>
-            </a:pPr>
-            <a:r>
-              <a:rPr sz="800" b="1">
-                <a:solidFill>
-                  <a:srgbClr val="A9583E"/>
-                </a:solidFill>
-                <a:latin typeface="Pretendard"/>
-                <a:ea typeface="Pretendard"/>
-              </a:rPr>
-              <a:t>해결: </a:t>
-            </a:r>
-            <a:r>
-              <a:rPr sz="800" b="0">
-                <a:solidFill>
-                  <a:srgbClr val="6C6A64"/>
-                </a:solidFill>
-                <a:latin typeface="Pretendard"/>
-                <a:ea typeface="Pretendard"/>
-              </a:rPr>
-              <a:t>전세사기 계약 전 예방</a:t>
-            </a:r>
-          </a:p>
-        </p:txBody>
-      </p:sp>
-      <p:sp>
-        <p:nvSpPr>
-          <p:cNvPr id="45" name="Rounded Rectangle 44"/>
+          </a:p>
+        </p:txBody>
+      </p:sp>
+      <p:sp>
+        <p:nvSpPr>
+          <p:cNvPr id="47" name="Rounded Rectangle 46"/>
           <p:cNvSpPr/>
           <p:nvPr/>
         </p:nvSpPr>
         <p:spPr>
           <a:xfrm>
-            <a:off x="6263640" y="4480560"/>
-            <a:ext cx="2514600" cy="1152144"/>
+            <a:off x="7694676" y="4389120"/>
+            <a:ext cx="621792" cy="201168"/>
           </a:xfrm>
           <a:prstGeom prst="roundRect">
             <a:avLst>
-              <a:gd name="adj" fmla="val 8000"/>
+              <a:gd name="adj" fmla="val 50000"/>
             </a:avLst>
           </a:prstGeom>
           <a:solidFill>
-            <a:srgbClr val="F5F0E8"/>
+            <a:srgbClr val="E2F7F1"/>
           </a:solidFill>
-          <a:ln w="9525">
-            <a:solidFill>
-              <a:srgbClr val="E6DFD8"/>
-            </a:solidFill>
+          <a:ln>
+            <a:noFill/>
           </a:ln>
           <a:effectLst/>
         </p:spPr>
@@ -21271,34 +19904,176 @@
           </a:fontRef>
         </p:style>
         <p:txBody>
-          <a:bodyPr rtlCol="0" anchor="ctr"/>
+          <a:bodyPr rtlCol="0" anchor="ctr" wrap="square" lIns="38100" rIns="38100" tIns="12700" bIns="12700"/>
           <a:lstStyle/>
           <a:p>
             <a:pPr algn="ctr"/>
-          </a:p>
-        </p:txBody>
-      </p:sp>
-      <p:sp>
-        <p:nvSpPr>
-          <p:cNvPr id="46" name="Rounded Rectangle 45"/>
+            <a:r>
+              <a:rPr sz="700" b="1">
+                <a:solidFill>
+                  <a:srgbClr val="0F8F72"/>
+                </a:solidFill>
+                <a:latin typeface="Pretendard"/>
+                <a:ea typeface="Pretendard"/>
+              </a:rPr>
+              <a:t>구현 완료</a:t>
+            </a:r>
+          </a:p>
+        </p:txBody>
+      </p:sp>
+      <p:sp>
+        <p:nvSpPr>
+          <p:cNvPr id="48" name="TextBox 47"/>
+          <p:cNvSpPr txBox="1"/>
+          <p:nvPr/>
+        </p:nvSpPr>
+        <p:spPr>
+          <a:xfrm>
+            <a:off x="5596128" y="4379976"/>
+            <a:ext cx="2052828" cy="219456"/>
+          </a:xfrm>
+          <a:prstGeom prst="rect">
+            <a:avLst/>
+          </a:prstGeom>
+          <a:noFill/>
+        </p:spPr>
+        <p:txBody>
+          <a:bodyPr wrap="square" anchor="t" lIns="0" rIns="0" tIns="0" bIns="0">
+            <a:spAutoFit/>
+          </a:bodyPr>
+          <a:lstStyle/>
+          <a:p>
+            <a:pPr algn="l">
+              <a:spcAft>
+                <a:spcPts val="200"/>
+              </a:spcAft>
+            </a:pPr>
+            <a:r>
+              <a:rPr sz="950" b="1">
+                <a:solidFill>
+                  <a:srgbClr val="0F1F3A"/>
+                </a:solidFill>
+                <a:latin typeface="Pretendard"/>
+                <a:ea typeface="Pretendard"/>
+              </a:rPr>
+              <a:t>스킬 저장소</a:t>
+            </a:r>
+          </a:p>
+        </p:txBody>
+      </p:sp>
+      <p:sp>
+        <p:nvSpPr>
+          <p:cNvPr id="49" name="TextBox 48"/>
+          <p:cNvSpPr txBox="1"/>
+          <p:nvPr/>
+        </p:nvSpPr>
+        <p:spPr>
+          <a:xfrm>
+            <a:off x="5596128" y="4626864"/>
+            <a:ext cx="2702052" cy="420624"/>
+          </a:xfrm>
+          <a:prstGeom prst="rect">
+            <a:avLst/>
+          </a:prstGeom>
+          <a:noFill/>
+        </p:spPr>
+        <p:txBody>
+          <a:bodyPr wrap="square" anchor="t" lIns="0" rIns="0" tIns="0" bIns="0">
+            <a:spAutoFit/>
+          </a:bodyPr>
+          <a:lstStyle/>
+          <a:p>
+            <a:pPr algn="l">
+              <a:spcAft>
+                <a:spcPts val="200"/>
+              </a:spcAft>
+            </a:pPr>
+            <a:r>
+              <a:rPr sz="800" b="0">
+                <a:solidFill>
+                  <a:srgbClr val="637797"/>
+                </a:solidFill>
+                <a:latin typeface="Pretendard"/>
+                <a:ea typeface="Pretendard"/>
+              </a:rPr>
+              <a:t>25종 스킬에 위험도·승인 정책 부여, 에이전트에 장착</a:t>
+            </a:r>
+          </a:p>
+        </p:txBody>
+      </p:sp>
+      <p:sp>
+        <p:nvSpPr>
+          <p:cNvPr id="50" name="TextBox 49"/>
+          <p:cNvSpPr txBox="1"/>
+          <p:nvPr/>
+        </p:nvSpPr>
+        <p:spPr>
+          <a:xfrm>
+            <a:off x="5596128" y="5120640"/>
+            <a:ext cx="2702052" cy="219456"/>
+          </a:xfrm>
+          <a:prstGeom prst="rect">
+            <a:avLst/>
+          </a:prstGeom>
+          <a:noFill/>
+        </p:spPr>
+        <p:txBody>
+          <a:bodyPr wrap="square" anchor="t" lIns="0" rIns="0" tIns="0" bIns="0">
+            <a:spAutoFit/>
+          </a:bodyPr>
+          <a:lstStyle/>
+          <a:p>
+            <a:pPr algn="l">
+              <a:spcAft>
+                <a:spcPts val="200"/>
+              </a:spcAft>
+            </a:pPr>
+            <a:r>
+              <a:rPr sz="750" b="1">
+                <a:solidFill>
+                  <a:srgbClr val="07569D"/>
+                </a:solidFill>
+                <a:latin typeface="Pretendard"/>
+                <a:ea typeface="Pretendard"/>
+              </a:rPr>
+              <a:t>해결: </a:t>
+            </a:r>
+            <a:r>
+              <a:rPr sz="750" b="0">
+                <a:solidFill>
+                  <a:srgbClr val="637797"/>
+                </a:solidFill>
+                <a:latin typeface="Pretendard"/>
+                <a:ea typeface="Pretendard"/>
+              </a:rPr>
+              <a:t>기능 확장과 내부통제의 단위화</a:t>
+            </a:r>
+          </a:p>
+        </p:txBody>
+      </p:sp>
+      <p:sp>
+        <p:nvSpPr>
+          <p:cNvPr id="51" name="Rounded Rectangle 50"/>
           <p:cNvSpPr/>
           <p:nvPr/>
         </p:nvSpPr>
         <p:spPr>
           <a:xfrm>
-            <a:off x="7699248" y="4562856"/>
-            <a:ext cx="969264" cy="219456"/>
+            <a:off x="8554212" y="4315968"/>
+            <a:ext cx="2921508" cy="1078992"/>
           </a:xfrm>
           <a:prstGeom prst="roundRect">
             <a:avLst>
-              <a:gd name="adj" fmla="val 50000"/>
+              <a:gd name="adj" fmla="val 8000"/>
             </a:avLst>
           </a:prstGeom>
           <a:solidFill>
-            <a:srgbClr val="5DB8A6"/>
+            <a:srgbClr val="F6F9FD"/>
           </a:solidFill>
-          <a:ln>
-            <a:noFill/>
+          <a:ln w="9525">
+            <a:solidFill>
+              <a:srgbClr val="D6E3F1"/>
+            </a:solidFill>
           </a:ln>
           <a:effectLst/>
         </p:spPr>
@@ -21317,176 +20092,34 @@
           </a:fontRef>
         </p:style>
         <p:txBody>
-          <a:bodyPr rtlCol="0" anchor="ctr" wrap="square" lIns="50800" rIns="50800" tIns="12700" bIns="12700"/>
+          <a:bodyPr rtlCol="0" anchor="ctr"/>
           <a:lstStyle/>
           <a:p>
             <a:pPr algn="ctr"/>
-            <a:r>
-              <a:rPr sz="750" b="1">
-                <a:solidFill>
-                  <a:srgbClr val="FFFFFF"/>
-                </a:solidFill>
-                <a:latin typeface="Pretendard"/>
-                <a:ea typeface="Pretendard"/>
-              </a:rPr>
-              <a:t>MVP 구현 완료</a:t>
-            </a:r>
-          </a:p>
-        </p:txBody>
-      </p:sp>
-      <p:sp>
-        <p:nvSpPr>
-          <p:cNvPr id="47" name="TextBox 46"/>
-          <p:cNvSpPr txBox="1"/>
-          <p:nvPr/>
-        </p:nvSpPr>
-        <p:spPr>
-          <a:xfrm>
-            <a:off x="6382512" y="4553712"/>
-            <a:ext cx="1280160" cy="219456"/>
-          </a:xfrm>
-          <a:prstGeom prst="rect">
-            <a:avLst/>
-          </a:prstGeom>
-          <a:noFill/>
-        </p:spPr>
-        <p:txBody>
-          <a:bodyPr wrap="square" anchor="t" lIns="0" rIns="0" tIns="0" bIns="0">
-            <a:spAutoFit/>
-          </a:bodyPr>
-          <a:lstStyle/>
-          <a:p>
-            <a:pPr algn="l">
-              <a:spcAft>
-                <a:spcPts val="200"/>
-              </a:spcAft>
-            </a:pPr>
-            <a:r>
-              <a:rPr sz="1050" b="1">
-                <a:solidFill>
-                  <a:srgbClr val="141413"/>
-                </a:solidFill>
-                <a:latin typeface="Pretendard"/>
-                <a:ea typeface="Pretendard"/>
-              </a:rPr>
-              <a:t>Skill Registry</a:t>
-            </a:r>
-          </a:p>
-        </p:txBody>
-      </p:sp>
-      <p:sp>
-        <p:nvSpPr>
-          <p:cNvPr id="48" name="TextBox 47"/>
-          <p:cNvSpPr txBox="1"/>
-          <p:nvPr/>
-        </p:nvSpPr>
-        <p:spPr>
-          <a:xfrm>
-            <a:off x="6382512" y="4809744"/>
-            <a:ext cx="2276856" cy="457200"/>
-          </a:xfrm>
-          <a:prstGeom prst="rect">
-            <a:avLst/>
-          </a:prstGeom>
-          <a:noFill/>
-        </p:spPr>
-        <p:txBody>
-          <a:bodyPr wrap="square" anchor="t" lIns="0" rIns="0" tIns="0" bIns="0">
-            <a:spAutoFit/>
-          </a:bodyPr>
-          <a:lstStyle/>
-          <a:p>
-            <a:pPr algn="l">
-              <a:spcAft>
-                <a:spcPts val="200"/>
-              </a:spcAft>
-            </a:pPr>
-            <a:r>
-              <a:rPr sz="850" b="0">
-                <a:solidFill>
-                  <a:srgbClr val="3D3D3A"/>
-                </a:solidFill>
-                <a:latin typeface="Pretendard"/>
-                <a:ea typeface="Pretendard"/>
-              </a:rPr>
-              <a:t>25종 스킬에 위험도·승인 정책 부여, Agent에 장착</a:t>
-            </a:r>
-          </a:p>
-        </p:txBody>
-      </p:sp>
-      <p:sp>
-        <p:nvSpPr>
-          <p:cNvPr id="49" name="TextBox 48"/>
-          <p:cNvSpPr txBox="1"/>
-          <p:nvPr/>
-        </p:nvSpPr>
-        <p:spPr>
-          <a:xfrm>
-            <a:off x="6382512" y="5340096"/>
-            <a:ext cx="2276856" cy="237744"/>
-          </a:xfrm>
-          <a:prstGeom prst="rect">
-            <a:avLst/>
-          </a:prstGeom>
-          <a:noFill/>
-        </p:spPr>
-        <p:txBody>
-          <a:bodyPr wrap="square" anchor="t" lIns="0" rIns="0" tIns="0" bIns="0">
-            <a:spAutoFit/>
-          </a:bodyPr>
-          <a:lstStyle/>
-          <a:p>
-            <a:pPr algn="l">
-              <a:spcAft>
-                <a:spcPts val="200"/>
-              </a:spcAft>
-            </a:pPr>
-            <a:r>
-              <a:rPr sz="800" b="1">
-                <a:solidFill>
-                  <a:srgbClr val="A9583E"/>
-                </a:solidFill>
-                <a:latin typeface="Pretendard"/>
-                <a:ea typeface="Pretendard"/>
-              </a:rPr>
-              <a:t>해결: </a:t>
-            </a:r>
-            <a:r>
-              <a:rPr sz="800" b="0">
-                <a:solidFill>
-                  <a:srgbClr val="6C6A64"/>
-                </a:solidFill>
-                <a:latin typeface="Pretendard"/>
-                <a:ea typeface="Pretendard"/>
-              </a:rPr>
-              <a:t>기능 확장과 내부통제의 단위화</a:t>
-            </a:r>
-          </a:p>
-        </p:txBody>
-      </p:sp>
-      <p:sp>
-        <p:nvSpPr>
-          <p:cNvPr id="50" name="Rounded Rectangle 49"/>
+          </a:p>
+        </p:txBody>
+      </p:sp>
+      <p:sp>
+        <p:nvSpPr>
+          <p:cNvPr id="52" name="Rounded Rectangle 51"/>
           <p:cNvSpPr/>
           <p:nvPr/>
         </p:nvSpPr>
         <p:spPr>
           <a:xfrm>
-            <a:off x="8961120" y="4480560"/>
-            <a:ext cx="2514600" cy="1152144"/>
+            <a:off x="10762488" y="4389120"/>
+            <a:ext cx="621792" cy="201168"/>
           </a:xfrm>
           <a:prstGeom prst="roundRect">
             <a:avLst>
-              <a:gd name="adj" fmla="val 8000"/>
+              <a:gd name="adj" fmla="val 50000"/>
             </a:avLst>
           </a:prstGeom>
           <a:solidFill>
-            <a:srgbClr val="F5F0E8"/>
+            <a:srgbClr val="E2F7F1"/>
           </a:solidFill>
-          <a:ln w="9525">
-            <a:solidFill>
-              <a:srgbClr val="E6DFD8"/>
-            </a:solidFill>
+          <a:ln>
+            <a:noFill/>
           </a:ln>
           <a:effectLst/>
         </p:spPr>
@@ -21505,23 +20138,163 @@
           </a:fontRef>
         </p:style>
         <p:txBody>
-          <a:bodyPr rtlCol="0" anchor="ctr"/>
+          <a:bodyPr rtlCol="0" anchor="ctr" wrap="square" lIns="38100" rIns="38100" tIns="12700" bIns="12700"/>
           <a:lstStyle/>
           <a:p>
             <a:pPr algn="ctr"/>
-          </a:p>
-        </p:txBody>
-      </p:sp>
-      <p:sp>
-        <p:nvSpPr>
-          <p:cNvPr id="51" name="Rounded Rectangle 50"/>
+            <a:r>
+              <a:rPr sz="700" b="1">
+                <a:solidFill>
+                  <a:srgbClr val="0F8F72"/>
+                </a:solidFill>
+                <a:latin typeface="Pretendard"/>
+                <a:ea typeface="Pretendard"/>
+              </a:rPr>
+              <a:t>구현 완료</a:t>
+            </a:r>
+          </a:p>
+        </p:txBody>
+      </p:sp>
+      <p:sp>
+        <p:nvSpPr>
+          <p:cNvPr id="53" name="TextBox 52"/>
+          <p:cNvSpPr txBox="1"/>
+          <p:nvPr/>
+        </p:nvSpPr>
+        <p:spPr>
+          <a:xfrm>
+            <a:off x="8663940" y="4379976"/>
+            <a:ext cx="2052828" cy="219456"/>
+          </a:xfrm>
+          <a:prstGeom prst="rect">
+            <a:avLst/>
+          </a:prstGeom>
+          <a:noFill/>
+        </p:spPr>
+        <p:txBody>
+          <a:bodyPr wrap="square" anchor="t" lIns="0" rIns="0" tIns="0" bIns="0">
+            <a:spAutoFit/>
+          </a:bodyPr>
+          <a:lstStyle/>
+          <a:p>
+            <a:pPr algn="l">
+              <a:spcAft>
+                <a:spcPts val="200"/>
+              </a:spcAft>
+            </a:pPr>
+            <a:r>
+              <a:rPr sz="950" b="1">
+                <a:solidFill>
+                  <a:srgbClr val="0F1F3A"/>
+                </a:solidFill>
+                <a:latin typeface="Pretendard"/>
+                <a:ea typeface="Pretendard"/>
+              </a:rPr>
+              <a:t>활동 이력(감사)</a:t>
+            </a:r>
+          </a:p>
+        </p:txBody>
+      </p:sp>
+      <p:sp>
+        <p:nvSpPr>
+          <p:cNvPr id="54" name="TextBox 53"/>
+          <p:cNvSpPr txBox="1"/>
+          <p:nvPr/>
+        </p:nvSpPr>
+        <p:spPr>
+          <a:xfrm>
+            <a:off x="8663940" y="4626864"/>
+            <a:ext cx="2702052" cy="420624"/>
+          </a:xfrm>
+          <a:prstGeom prst="rect">
+            <a:avLst/>
+          </a:prstGeom>
+          <a:noFill/>
+        </p:spPr>
+        <p:txBody>
+          <a:bodyPr wrap="square" anchor="t" lIns="0" rIns="0" tIns="0" bIns="0">
+            <a:spAutoFit/>
+          </a:bodyPr>
+          <a:lstStyle/>
+          <a:p>
+            <a:pPr algn="l">
+              <a:spcAft>
+                <a:spcPts val="200"/>
+              </a:spcAft>
+            </a:pPr>
+            <a:r>
+              <a:rPr sz="800" b="0">
+                <a:solidFill>
+                  <a:srgbClr val="637797"/>
+                </a:solidFill>
+                <a:latin typeface="Pretendard"/>
+                <a:ea typeface="Pretendard"/>
+              </a:rPr>
+              <a:t>근거→판단→행동→승인 전 과정을 시간순 기록</a:t>
+            </a:r>
+          </a:p>
+        </p:txBody>
+      </p:sp>
+      <p:sp>
+        <p:nvSpPr>
+          <p:cNvPr id="55" name="TextBox 54"/>
+          <p:cNvSpPr txBox="1"/>
+          <p:nvPr/>
+        </p:nvSpPr>
+        <p:spPr>
+          <a:xfrm>
+            <a:off x="8663940" y="5120640"/>
+            <a:ext cx="2702052" cy="219456"/>
+          </a:xfrm>
+          <a:prstGeom prst="rect">
+            <a:avLst/>
+          </a:prstGeom>
+          <a:noFill/>
+        </p:spPr>
+        <p:txBody>
+          <a:bodyPr wrap="square" anchor="t" lIns="0" rIns="0" tIns="0" bIns="0">
+            <a:spAutoFit/>
+          </a:bodyPr>
+          <a:lstStyle/>
+          <a:p>
+            <a:pPr algn="l">
+              <a:spcAft>
+                <a:spcPts val="200"/>
+              </a:spcAft>
+            </a:pPr>
+            <a:r>
+              <a:rPr sz="750" b="1">
+                <a:solidFill>
+                  <a:srgbClr val="07569D"/>
+                </a:solidFill>
+                <a:latin typeface="Pretendard"/>
+                <a:ea typeface="Pretendard"/>
+              </a:rPr>
+              <a:t>해결: </a:t>
+            </a:r>
+            <a:r>
+              <a:rPr sz="750" b="0">
+                <a:solidFill>
+                  <a:srgbClr val="637797"/>
+                </a:solidFill>
+                <a:latin typeface="Pretendard"/>
+                <a:ea typeface="Pretendard"/>
+              </a:rPr>
+              <a:t>금융권 감사·설명가능성 충족</a:t>
+            </a:r>
+          </a:p>
+        </p:txBody>
+      </p:sp>
+      <p:sp>
+        <p:nvSpPr>
+          <p:cNvPr id="56" name="Rounded Rectangle 55"/>
           <p:cNvSpPr/>
           <p:nvPr/>
         </p:nvSpPr>
         <p:spPr>
           <a:xfrm>
-            <a:off x="10396728" y="4562856"/>
-            <a:ext cx="969264" cy="219456"/>
+            <a:off x="5486400" y="5504688"/>
+            <a:ext cx="5989320" cy="384048"/>
           </a:xfrm>
           <a:prstGeom prst="roundRect">
             <a:avLst>
@@ -21529,7 +20302,7 @@
             </a:avLst>
           </a:prstGeom>
           <a:solidFill>
-            <a:srgbClr val="5DB8A6"/>
+            <a:srgbClr val="091C4D"/>
           </a:solidFill>
           <a:ln>
             <a:noFill/>
@@ -21551,33 +20324,23 @@
           </a:fontRef>
         </p:style>
         <p:txBody>
-          <a:bodyPr rtlCol="0" anchor="ctr" wrap="square" lIns="50800" rIns="50800" tIns="12700" bIns="12700"/>
+          <a:bodyPr rtlCol="0" anchor="ctr"/>
           <a:lstStyle/>
           <a:p>
             <a:pPr algn="ctr"/>
-            <a:r>
-              <a:rPr sz="750" b="1">
-                <a:solidFill>
-                  <a:srgbClr val="FFFFFF"/>
-                </a:solidFill>
-                <a:latin typeface="Pretendard"/>
-                <a:ea typeface="Pretendard"/>
-              </a:rPr>
-              <a:t>MVP 구현 완료</a:t>
-            </a:r>
-          </a:p>
-        </p:txBody>
-      </p:sp>
-      <p:sp>
-        <p:nvSpPr>
-          <p:cNvPr id="52" name="TextBox 51"/>
+          </a:p>
+        </p:txBody>
+      </p:sp>
+      <p:sp>
+        <p:nvSpPr>
+          <p:cNvPr id="57" name="TextBox 56"/>
           <p:cNvSpPr txBox="1"/>
           <p:nvPr/>
         </p:nvSpPr>
         <p:spPr>
           <a:xfrm>
-            <a:off x="9079992" y="4553712"/>
-            <a:ext cx="1280160" cy="219456"/>
+            <a:off x="5669280" y="5596128"/>
+            <a:ext cx="5623559" cy="201168"/>
           </a:xfrm>
           <a:prstGeom prst="rect">
             <a:avLst/>
@@ -21596,104 +20359,24 @@
               </a:spcAft>
             </a:pPr>
             <a:r>
-              <a:rPr sz="1050" b="1">
-                <a:solidFill>
-                  <a:srgbClr val="141413"/>
+              <a:rPr sz="850" b="1">
+                <a:solidFill>
+                  <a:srgbClr val="1CA9D6"/>
                 </a:solidFill>
                 <a:latin typeface="Pretendard"/>
                 <a:ea typeface="Pretendard"/>
               </a:rPr>
-              <a:t>Audit Ledger</a:t>
+              <a:t>MVP 범위  </a:t>
             </a:r>
-          </a:p>
-        </p:txBody>
-      </p:sp>
-      <p:sp>
-        <p:nvSpPr>
-          <p:cNvPr id="53" name="TextBox 52"/>
-          <p:cNvSpPr txBox="1"/>
-          <p:nvPr/>
-        </p:nvSpPr>
-        <p:spPr>
-          <a:xfrm>
-            <a:off x="9079992" y="4809744"/>
-            <a:ext cx="2276856" cy="457200"/>
-          </a:xfrm>
-          <a:prstGeom prst="rect">
-            <a:avLst/>
-          </a:prstGeom>
-          <a:noFill/>
-        </p:spPr>
-        <p:txBody>
-          <a:bodyPr wrap="square" anchor="t" lIns="0" rIns="0" tIns="0" bIns="0">
-            <a:spAutoFit/>
-          </a:bodyPr>
-          <a:lstStyle/>
-          <a:p>
-            <a:pPr algn="l">
-              <a:spcAft>
-                <a:spcPts val="200"/>
-              </a:spcAft>
-            </a:pPr>
             <a:r>
               <a:rPr sz="850" b="0">
                 <a:solidFill>
-                  <a:srgbClr val="3D3D3A"/>
+                  <a:srgbClr val="EDF4FB"/>
                 </a:solidFill>
                 <a:latin typeface="Pretendard"/>
                 <a:ea typeface="Pretendard"/>
               </a:rPr>
-              <a:t>근거→판단→행동→승인 전 과정을 시간순 기록</a:t>
-            </a:r>
-          </a:p>
-        </p:txBody>
-      </p:sp>
-      <p:sp>
-        <p:nvSpPr>
-          <p:cNvPr id="54" name="TextBox 53"/>
-          <p:cNvSpPr txBox="1"/>
-          <p:nvPr/>
-        </p:nvSpPr>
-        <p:spPr>
-          <a:xfrm>
-            <a:off x="9079992" y="5340096"/>
-            <a:ext cx="2276856" cy="237744"/>
-          </a:xfrm>
-          <a:prstGeom prst="rect">
-            <a:avLst/>
-          </a:prstGeom>
-          <a:noFill/>
-        </p:spPr>
-        <p:txBody>
-          <a:bodyPr wrap="square" anchor="t" lIns="0" rIns="0" tIns="0" bIns="0">
-            <a:spAutoFit/>
-          </a:bodyPr>
-          <a:lstStyle/>
-          <a:p>
-            <a:pPr algn="l">
-              <a:spcAft>
-                <a:spcPts val="200"/>
-              </a:spcAft>
-            </a:pPr>
-            <a:r>
-              <a:rPr sz="800" b="1">
-                <a:solidFill>
-                  <a:srgbClr val="A9583E"/>
-                </a:solidFill>
-                <a:latin typeface="Pretendard"/>
-                <a:ea typeface="Pretendard"/>
-              </a:rPr>
-              <a:t>해결: </a:t>
-            </a:r>
-            <a:r>
-              <a:rPr sz="800" b="0">
-                <a:solidFill>
-                  <a:srgbClr val="6C6A64"/>
-                </a:solidFill>
-                <a:latin typeface="Pretendard"/>
-                <a:ea typeface="Pretendard"/>
-              </a:rPr>
-              <a:t>금융권 감사·설명가능성 충족</a:t>
+              <a:t>판단(위험 진단) → 행동(조치 초안) → 검증(승인·감사) — github.com/LSB-afk/JB-Fin-AI-Challenge</a:t>
             </a:r>
           </a:p>
         </p:txBody>
@@ -22413,7 +21096,7 @@
         <p:spPr>
           <a:xfrm>
             <a:off x="868680" y="1664208"/>
-            <a:ext cx="5486400" cy="237744"/>
+            <a:ext cx="5486400" cy="219456"/>
           </a:xfrm>
           <a:prstGeom prst="rect">
             <a:avLst/>
@@ -22432,9 +21115,9 @@
               </a:spcAft>
             </a:pPr>
             <a:r>
-              <a:rPr sz="1150" b="1">
-                <a:solidFill>
-                  <a:srgbClr val="141413"/>
+              <a:rPr sz="1100" b="1">
+                <a:solidFill>
+                  <a:srgbClr val="0F1F3A"/>
                 </a:solidFill>
                 <a:latin typeface="Pretendard"/>
                 <a:ea typeface="Pretendard"/>
@@ -22452,8 +21135,8 @@
         </p:nvSpPr>
         <p:spPr>
           <a:xfrm>
-            <a:off x="868680" y="1956816"/>
-            <a:ext cx="5486400" cy="640080"/>
+            <a:off x="868680" y="1920240"/>
+            <a:ext cx="5486400" cy="585216"/>
           </a:xfrm>
           <a:prstGeom prst="roundRect">
             <a:avLst>
@@ -22461,11 +21144,11 @@
             </a:avLst>
           </a:prstGeom>
           <a:solidFill>
-            <a:srgbClr val="FAF9F5"/>
+            <a:srgbClr val="FFFFFF"/>
           </a:solidFill>
           <a:ln w="9525">
             <a:solidFill>
-              <a:srgbClr val="E6DFD8"/>
+              <a:srgbClr val="D6E3F1"/>
             </a:solidFill>
           </a:ln>
           <a:effectLst/>
@@ -22500,8 +21183,8 @@
         </p:nvSpPr>
         <p:spPr>
           <a:xfrm>
-            <a:off x="996695" y="2029968"/>
-            <a:ext cx="1234440" cy="457200"/>
+            <a:off x="987552" y="1984248"/>
+            <a:ext cx="1188720" cy="457200"/>
           </a:xfrm>
           <a:prstGeom prst="rect">
             <a:avLst/>
@@ -22520,9 +21203,9 @@
               </a:spcAft>
             </a:pPr>
             <a:r>
-              <a:rPr sz="950" b="1">
-                <a:solidFill>
-                  <a:srgbClr val="A9583E"/>
+              <a:rPr sz="900" b="1">
+                <a:solidFill>
+                  <a:srgbClr val="07569D"/>
                 </a:solidFill>
                 <a:latin typeface="Pretendard"/>
                 <a:ea typeface="Pretendard"/>
@@ -22540,8 +21223,8 @@
         </p:nvSpPr>
         <p:spPr>
           <a:xfrm>
-            <a:off x="2286000" y="2029968"/>
-            <a:ext cx="2743200" cy="512064"/>
+            <a:off x="2221991" y="1984248"/>
+            <a:ext cx="2880360" cy="475488"/>
           </a:xfrm>
           <a:prstGeom prst="rect">
             <a:avLst/>
@@ -22560,9 +21243,9 @@
               </a:spcAft>
             </a:pPr>
             <a:r>
-              <a:rPr sz="850" b="0">
-                <a:solidFill>
-                  <a:srgbClr val="3D3D3A"/>
+              <a:rPr sz="800" b="0">
+                <a:solidFill>
+                  <a:srgbClr val="0F1F3A"/>
                 </a:solidFill>
                 <a:latin typeface="Pretendard"/>
                 <a:ea typeface="Pretendard"/>
@@ -22580,8 +21263,8 @@
         </p:nvSpPr>
         <p:spPr>
           <a:xfrm>
-            <a:off x="5056632" y="2029968"/>
-            <a:ext cx="1188720" cy="512064"/>
+            <a:off x="5129784" y="1984248"/>
+            <a:ext cx="1115568" cy="475488"/>
           </a:xfrm>
           <a:prstGeom prst="rect">
             <a:avLst/>
@@ -22600,9 +21283,9 @@
               </a:spcAft>
             </a:pPr>
             <a:r>
-              <a:rPr sz="750" b="0">
-                <a:solidFill>
-                  <a:srgbClr val="8E8B82"/>
+              <a:rPr sz="700" b="0">
+                <a:solidFill>
+                  <a:srgbClr val="637797"/>
                 </a:solidFill>
                 <a:latin typeface="Pretendard"/>
                 <a:ea typeface="Pretendard"/>
@@ -22620,8 +21303,8 @@
         </p:nvSpPr>
         <p:spPr>
           <a:xfrm>
-            <a:off x="868680" y="2670048"/>
-            <a:ext cx="5486400" cy="640080"/>
+            <a:off x="868680" y="2578608"/>
+            <a:ext cx="5486400" cy="585216"/>
           </a:xfrm>
           <a:prstGeom prst="roundRect">
             <a:avLst>
@@ -22629,11 +21312,11 @@
             </a:avLst>
           </a:prstGeom>
           <a:solidFill>
-            <a:srgbClr val="FAF9F5"/>
+            <a:srgbClr val="FFFFFF"/>
           </a:solidFill>
           <a:ln w="9525">
             <a:solidFill>
-              <a:srgbClr val="E6DFD8"/>
+              <a:srgbClr val="D6E3F1"/>
             </a:solidFill>
           </a:ln>
           <a:effectLst/>
@@ -22668,8 +21351,8 @@
         </p:nvSpPr>
         <p:spPr>
           <a:xfrm>
-            <a:off x="996695" y="2743200"/>
-            <a:ext cx="1234440" cy="457200"/>
+            <a:off x="987552" y="2642616"/>
+            <a:ext cx="1188720" cy="457200"/>
           </a:xfrm>
           <a:prstGeom prst="rect">
             <a:avLst/>
@@ -22688,9 +21371,9 @@
               </a:spcAft>
             </a:pPr>
             <a:r>
-              <a:rPr sz="950" b="1">
-                <a:solidFill>
-                  <a:srgbClr val="A9583E"/>
+              <a:rPr sz="900" b="1">
+                <a:solidFill>
+                  <a:srgbClr val="07569D"/>
                 </a:solidFill>
                 <a:latin typeface="Pretendard"/>
                 <a:ea typeface="Pretendard"/>
@@ -22708,8 +21391,8 @@
         </p:nvSpPr>
         <p:spPr>
           <a:xfrm>
-            <a:off x="2286000" y="2743200"/>
-            <a:ext cx="2743200" cy="512064"/>
+            <a:off x="2221991" y="2642616"/>
+            <a:ext cx="2880360" cy="475488"/>
           </a:xfrm>
           <a:prstGeom prst="rect">
             <a:avLst/>
@@ -22728,14 +21411,14 @@
               </a:spcAft>
             </a:pPr>
             <a:r>
-              <a:rPr sz="850" b="0">
-                <a:solidFill>
-                  <a:srgbClr val="3D3D3A"/>
+              <a:rPr sz="800" b="0">
+                <a:solidFill>
+                  <a:srgbClr val="0F1F3A"/>
                 </a:solidFill>
                 <a:latin typeface="Pretendard"/>
                 <a:ea typeface="Pretendard"/>
               </a:rPr>
-              <a:t>연합뉴스 · 쿠키뉴스 등 지역 경기/금리 부담 기사 (Pain Radar 수집 대상)</a:t>
+              <a:t>연합뉴스 · 쿠키뉴스 등 지역 경기/금리 부담 기사 (위험 신호 수집 대상)</a:t>
             </a:r>
           </a:p>
         </p:txBody>
@@ -22748,8 +21431,8 @@
         </p:nvSpPr>
         <p:spPr>
           <a:xfrm>
-            <a:off x="5056632" y="2743200"/>
-            <a:ext cx="1188720" cy="512064"/>
+            <a:off x="5129784" y="2642616"/>
+            <a:ext cx="1115568" cy="475488"/>
           </a:xfrm>
           <a:prstGeom prst="rect">
             <a:avLst/>
@@ -22768,9 +21451,9 @@
               </a:spcAft>
             </a:pPr>
             <a:r>
-              <a:rPr sz="750" b="0">
-                <a:solidFill>
-                  <a:srgbClr val="8E8B82"/>
+              <a:rPr sz="700" b="0">
+                <a:solidFill>
+                  <a:srgbClr val="637797"/>
                 </a:solidFill>
                 <a:latin typeface="Pretendard"/>
                 <a:ea typeface="Pretendard"/>
@@ -22788,8 +21471,8 @@
         </p:nvSpPr>
         <p:spPr>
           <a:xfrm>
-            <a:off x="868680" y="3383280"/>
-            <a:ext cx="5486400" cy="640080"/>
+            <a:off x="868680" y="3236976"/>
+            <a:ext cx="5486400" cy="585216"/>
           </a:xfrm>
           <a:prstGeom prst="roundRect">
             <a:avLst>
@@ -22797,11 +21480,11 @@
             </a:avLst>
           </a:prstGeom>
           <a:solidFill>
-            <a:srgbClr val="FAF9F5"/>
+            <a:srgbClr val="FFFFFF"/>
           </a:solidFill>
           <a:ln w="9525">
             <a:solidFill>
-              <a:srgbClr val="E6DFD8"/>
+              <a:srgbClr val="D6E3F1"/>
             </a:solidFill>
           </a:ln>
           <a:effectLst/>
@@ -22836,8 +21519,8 @@
         </p:nvSpPr>
         <p:spPr>
           <a:xfrm>
-            <a:off x="996695" y="3456432"/>
-            <a:ext cx="1234440" cy="457200"/>
+            <a:off x="987552" y="3300984"/>
+            <a:ext cx="1188720" cy="457200"/>
           </a:xfrm>
           <a:prstGeom prst="rect">
             <a:avLst/>
@@ -22856,9 +21539,9 @@
               </a:spcAft>
             </a:pPr>
             <a:r>
-              <a:rPr sz="950" b="1">
-                <a:solidFill>
-                  <a:srgbClr val="A9583E"/>
+              <a:rPr sz="900" b="1">
+                <a:solidFill>
+                  <a:srgbClr val="07569D"/>
                 </a:solidFill>
                 <a:latin typeface="Pretendard"/>
                 <a:ea typeface="Pretendard"/>
@@ -22876,8 +21559,8 @@
         </p:nvSpPr>
         <p:spPr>
           <a:xfrm>
-            <a:off x="2286000" y="3456432"/>
-            <a:ext cx="2743200" cy="512064"/>
+            <a:off x="2221991" y="3300984"/>
+            <a:ext cx="2880360" cy="475488"/>
           </a:xfrm>
           <a:prstGeom prst="rect">
             <a:avLst/>
@@ -22896,9 +21579,9 @@
               </a:spcAft>
             </a:pPr>
             <a:r>
-              <a:rPr sz="850" b="0">
-                <a:solidFill>
-                  <a:srgbClr val="3D3D3A"/>
+              <a:rPr sz="800" b="0">
+                <a:solidFill>
+                  <a:srgbClr val="0F1F3A"/>
                 </a:solidFill>
                 <a:latin typeface="Pretendard"/>
                 <a:ea typeface="Pretendard"/>
@@ -22916,8 +21599,8 @@
         </p:nvSpPr>
         <p:spPr>
           <a:xfrm>
-            <a:off x="5056632" y="3456432"/>
-            <a:ext cx="1188720" cy="512064"/>
+            <a:off x="5129784" y="3300984"/>
+            <a:ext cx="1115568" cy="475488"/>
           </a:xfrm>
           <a:prstGeom prst="rect">
             <a:avLst/>
@@ -22936,9 +21619,9 @@
               </a:spcAft>
             </a:pPr>
             <a:r>
-              <a:rPr sz="750" b="0">
-                <a:solidFill>
-                  <a:srgbClr val="8E8B82"/>
+              <a:rPr sz="700" b="0">
+                <a:solidFill>
+                  <a:srgbClr val="637797"/>
                 </a:solidFill>
                 <a:latin typeface="Pretendard"/>
                 <a:ea typeface="Pretendard"/>
@@ -22956,8 +21639,8 @@
         </p:nvSpPr>
         <p:spPr>
           <a:xfrm>
-            <a:off x="868680" y="4096512"/>
-            <a:ext cx="5486400" cy="640080"/>
+            <a:off x="868680" y="3895344"/>
+            <a:ext cx="5486400" cy="585216"/>
           </a:xfrm>
           <a:prstGeom prst="roundRect">
             <a:avLst>
@@ -22965,11 +21648,11 @@
             </a:avLst>
           </a:prstGeom>
           <a:solidFill>
-            <a:srgbClr val="FAF9F5"/>
+            <a:srgbClr val="FFFFFF"/>
           </a:solidFill>
           <a:ln w="9525">
             <a:solidFill>
-              <a:srgbClr val="E6DFD8"/>
+              <a:srgbClr val="D6E3F1"/>
             </a:solidFill>
           </a:ln>
           <a:effectLst/>
@@ -23004,8 +21687,8 @@
         </p:nvSpPr>
         <p:spPr>
           <a:xfrm>
-            <a:off x="996695" y="4169664"/>
-            <a:ext cx="1234440" cy="457200"/>
+            <a:off x="987552" y="3959352"/>
+            <a:ext cx="1188720" cy="457200"/>
           </a:xfrm>
           <a:prstGeom prst="rect">
             <a:avLst/>
@@ -23024,9 +21707,9 @@
               </a:spcAft>
             </a:pPr>
             <a:r>
-              <a:rPr sz="950" b="1">
-                <a:solidFill>
-                  <a:srgbClr val="A9583E"/>
+              <a:rPr sz="900" b="1">
+                <a:solidFill>
+                  <a:srgbClr val="07569D"/>
                 </a:solidFill>
                 <a:latin typeface="Pretendard"/>
                 <a:ea typeface="Pretendard"/>
@@ -23044,8 +21727,8 @@
         </p:nvSpPr>
         <p:spPr>
           <a:xfrm>
-            <a:off x="2286000" y="4169664"/>
-            <a:ext cx="2743200" cy="512064"/>
+            <a:off x="2221991" y="3959352"/>
+            <a:ext cx="2880360" cy="475488"/>
           </a:xfrm>
           <a:prstGeom prst="rect">
             <a:avLst/>
@@ -23064,9 +21747,9 @@
               </a:spcAft>
             </a:pPr>
             <a:r>
-              <a:rPr sz="850" b="0">
-                <a:solidFill>
-                  <a:srgbClr val="3D3D3A"/>
+              <a:rPr sz="800" b="0">
+                <a:solidFill>
+                  <a:srgbClr val="0F1F3A"/>
                 </a:solidFill>
                 <a:latin typeface="Pretendard"/>
                 <a:ea typeface="Pretendard"/>
@@ -23084,8 +21767,8 @@
         </p:nvSpPr>
         <p:spPr>
           <a:xfrm>
-            <a:off x="5056632" y="4169664"/>
-            <a:ext cx="1188720" cy="512064"/>
+            <a:off x="5129784" y="3959352"/>
+            <a:ext cx="1115568" cy="475488"/>
           </a:xfrm>
           <a:prstGeom prst="rect">
             <a:avLst/>
@@ -23104,9 +21787,9 @@
               </a:spcAft>
             </a:pPr>
             <a:r>
-              <a:rPr sz="750" b="0">
-                <a:solidFill>
-                  <a:srgbClr val="8E8B82"/>
+              <a:rPr sz="700" b="0">
+                <a:solidFill>
+                  <a:srgbClr val="637797"/>
                 </a:solidFill>
                 <a:latin typeface="Pretendard"/>
                 <a:ea typeface="Pretendard"/>
@@ -23125,7 +21808,7 @@
         <p:spPr>
           <a:xfrm>
             <a:off x="6675120" y="1664208"/>
-            <a:ext cx="4800600" cy="237744"/>
+            <a:ext cx="4800600" cy="219456"/>
           </a:xfrm>
           <a:prstGeom prst="rect">
             <a:avLst/>
@@ -23144,9 +21827,9 @@
               </a:spcAft>
             </a:pPr>
             <a:r>
-              <a:rPr sz="1150" b="1">
-                <a:solidFill>
-                  <a:srgbClr val="141413"/>
+              <a:rPr sz="1100" b="1">
+                <a:solidFill>
+                  <a:srgbClr val="0F1F3A"/>
                 </a:solidFill>
                 <a:latin typeface="Pretendard"/>
                 <a:ea typeface="Pretendard"/>
@@ -23164,8 +21847,8 @@
         </p:nvSpPr>
         <p:spPr>
           <a:xfrm>
-            <a:off x="6675120" y="1956816"/>
-            <a:ext cx="4800600" cy="2706624"/>
+            <a:off x="6675120" y="1920240"/>
+            <a:ext cx="4800600" cy="2633472"/>
           </a:xfrm>
           <a:prstGeom prst="roundRect">
             <a:avLst>
@@ -23173,7 +21856,7 @@
             </a:avLst>
           </a:prstGeom>
           <a:solidFill>
-            <a:srgbClr val="181715"/>
+            <a:srgbClr val="091C4D"/>
           </a:solidFill>
           <a:ln>
             <a:noFill/>
@@ -23210,8 +21893,8 @@
         </p:nvSpPr>
         <p:spPr>
           <a:xfrm>
-            <a:off x="6839712" y="2066544"/>
-            <a:ext cx="4471416" cy="201168"/>
+            <a:off x="6821424" y="2029968"/>
+            <a:ext cx="4507992" cy="182880"/>
           </a:xfrm>
           <a:prstGeom prst="rect">
             <a:avLst/>
@@ -23230,14 +21913,14 @@
               </a:spcAft>
             </a:pPr>
             <a:r>
-              <a:rPr sz="950" b="1">
-                <a:solidFill>
-                  <a:srgbClr val="5DB8A6"/>
+              <a:rPr sz="900" b="1">
+                <a:solidFill>
+                  <a:srgbClr val="1CA9D6"/>
                 </a:solidFill>
                 <a:latin typeface="Pretendard"/>
                 <a:ea typeface="Pretendard"/>
               </a:rPr>
-              <a:t>$ 현재 MVP  (예선 · 구현 완료)</a:t>
+              <a:t>현재 MVP  (예선 · 구현 완료)</a:t>
             </a:r>
           </a:p>
         </p:txBody>
@@ -23250,8 +21933,8 @@
         </p:nvSpPr>
         <p:spPr>
           <a:xfrm>
-            <a:off x="6949440" y="2286000"/>
-            <a:ext cx="4361688" cy="182880"/>
+            <a:off x="6931152" y="2249424"/>
+            <a:ext cx="4398264" cy="182880"/>
           </a:xfrm>
           <a:prstGeom prst="rect">
             <a:avLst/>
@@ -23270,9 +21953,9 @@
               </a:spcAft>
             </a:pPr>
             <a:r>
-              <a:rPr sz="850" b="0">
-                <a:solidFill>
-                  <a:srgbClr val="A09D96"/>
+              <a:rPr sz="800" b="0">
+                <a:solidFill>
+                  <a:srgbClr val="9DB1CE"/>
                 </a:solidFill>
                 <a:latin typeface="Pretendard"/>
                 <a:ea typeface="Pretendard"/>
@@ -23290,8 +21973,8 @@
         </p:nvSpPr>
         <p:spPr>
           <a:xfrm>
-            <a:off x="6949440" y="2505456"/>
-            <a:ext cx="4361688" cy="182880"/>
+            <a:off x="6931152" y="2459736"/>
+            <a:ext cx="4398264" cy="182880"/>
           </a:xfrm>
           <a:prstGeom prst="rect">
             <a:avLst/>
@@ -23310,14 +21993,14 @@
               </a:spcAft>
             </a:pPr>
             <a:r>
-              <a:rPr sz="850" b="0">
-                <a:solidFill>
-                  <a:srgbClr val="A09D96"/>
+              <a:rPr sz="800" b="0">
+                <a:solidFill>
+                  <a:srgbClr val="9DB1CE"/>
                 </a:solidFill>
                 <a:latin typeface="Pretendard"/>
                 <a:ea typeface="Pretendard"/>
               </a:rPr>
-              <a:t>· 상태 모델: Case · AgentRun · Approval · Audit 상호 연동</a:t>
+              <a:t>· 상태 모델: 케이스 · 에이전트 실행 · 승인 · 감사 상호 연동</a:t>
             </a:r>
           </a:p>
         </p:txBody>
@@ -23330,8 +22013,8 @@
         </p:nvSpPr>
         <p:spPr>
           <a:xfrm>
-            <a:off x="6949440" y="2724912"/>
-            <a:ext cx="4361688" cy="182880"/>
+            <a:off x="6931152" y="2670048"/>
+            <a:ext cx="4398264" cy="182880"/>
           </a:xfrm>
           <a:prstGeom prst="rect">
             <a:avLst/>
@@ -23350,9 +22033,9 @@
               </a:spcAft>
             </a:pPr>
             <a:r>
-              <a:rPr sz="850" b="0">
-                <a:solidFill>
-                  <a:srgbClr val="A09D96"/>
+              <a:rPr sz="800" b="0">
+                <a:solidFill>
+                  <a:srgbClr val="9DB1CE"/>
                 </a:solidFill>
                 <a:latin typeface="Pretendard"/>
                 <a:ea typeface="Pretendard"/>
@@ -23370,8 +22053,8 @@
         </p:nvSpPr>
         <p:spPr>
           <a:xfrm>
-            <a:off x="6839712" y="3035808"/>
-            <a:ext cx="4471416" cy="201168"/>
+            <a:off x="6821424" y="2953512"/>
+            <a:ext cx="4507992" cy="182880"/>
           </a:xfrm>
           <a:prstGeom prst="rect">
             <a:avLst/>
@@ -23390,14 +22073,14 @@
               </a:spcAft>
             </a:pPr>
             <a:r>
-              <a:rPr sz="950" b="1">
-                <a:solidFill>
-                  <a:srgbClr val="E8A55A"/>
+              <a:rPr sz="900" b="1">
+                <a:solidFill>
+                  <a:srgbClr val="1CA9D6"/>
                 </a:solidFill>
                 <a:latin typeface="Pretendard"/>
                 <a:ea typeface="Pretendard"/>
               </a:rPr>
-              <a:t>$ 본선 목표 아키텍처</a:t>
+              <a:t>본선 목표 아키텍처</a:t>
             </a:r>
           </a:p>
         </p:txBody>
@@ -23410,8 +22093,8 @@
         </p:nvSpPr>
         <p:spPr>
           <a:xfrm>
-            <a:off x="6949440" y="3273552"/>
-            <a:ext cx="4361688" cy="182880"/>
+            <a:off x="6931152" y="3172968"/>
+            <a:ext cx="4398264" cy="182880"/>
           </a:xfrm>
           <a:prstGeom prst="rect">
             <a:avLst/>
@@ -23430,9 +22113,9 @@
               </a:spcAft>
             </a:pPr>
             <a:r>
-              <a:rPr sz="850" b="0">
-                <a:solidFill>
-                  <a:srgbClr val="A09D96"/>
+              <a:rPr sz="800" b="0">
+                <a:solidFill>
+                  <a:srgbClr val="9DB1CE"/>
                 </a:solidFill>
                 <a:latin typeface="Pretendard"/>
                 <a:ea typeface="Pretendard"/>
@@ -23450,8 +22133,8 @@
         </p:nvSpPr>
         <p:spPr>
           <a:xfrm>
-            <a:off x="6949440" y="3493008"/>
-            <a:ext cx="4361688" cy="182880"/>
+            <a:off x="6931152" y="3383279"/>
+            <a:ext cx="4398264" cy="182880"/>
           </a:xfrm>
           <a:prstGeom prst="rect">
             <a:avLst/>
@@ -23470,9 +22153,9 @@
               </a:spcAft>
             </a:pPr>
             <a:r>
-              <a:rPr sz="850" b="0">
-                <a:solidFill>
-                  <a:srgbClr val="A09D96"/>
+              <a:rPr sz="800" b="0">
+                <a:solidFill>
+                  <a:srgbClr val="9DB1CE"/>
                 </a:solidFill>
                 <a:latin typeface="Pretendard"/>
                 <a:ea typeface="Pretendard"/>
@@ -23490,8 +22173,8 @@
         </p:nvSpPr>
         <p:spPr>
           <a:xfrm>
-            <a:off x="6949440" y="3712464"/>
-            <a:ext cx="4361688" cy="182880"/>
+            <a:off x="6931152" y="3593591"/>
+            <a:ext cx="4398264" cy="182880"/>
           </a:xfrm>
           <a:prstGeom prst="rect">
             <a:avLst/>
@@ -23510,9 +22193,9 @@
               </a:spcAft>
             </a:pPr>
             <a:r>
-              <a:rPr sz="850" b="0">
-                <a:solidFill>
-                  <a:srgbClr val="A09D96"/>
+              <a:rPr sz="800" b="0">
+                <a:solidFill>
+                  <a:srgbClr val="9DB1CE"/>
                 </a:solidFill>
                 <a:latin typeface="Pretendard"/>
                 <a:ea typeface="Pretendard"/>
@@ -23530,8 +22213,8 @@
         </p:nvSpPr>
         <p:spPr>
           <a:xfrm>
-            <a:off x="6949440" y="3931920"/>
-            <a:ext cx="4361688" cy="182880"/>
+            <a:off x="6931152" y="3803904"/>
+            <a:ext cx="4398264" cy="182880"/>
           </a:xfrm>
           <a:prstGeom prst="rect">
             <a:avLst/>
@@ -23550,14 +22233,14 @@
               </a:spcAft>
             </a:pPr>
             <a:r>
-              <a:rPr sz="850" b="0">
-                <a:solidFill>
-                  <a:srgbClr val="A09D96"/>
+              <a:rPr sz="800" b="0">
+                <a:solidFill>
+                  <a:srgbClr val="9DB1CE"/>
                 </a:solidFill>
                 <a:latin typeface="Pretendard"/>
                 <a:ea typeface="Pretendard"/>
               </a:rPr>
-              <a:t>· Multi-Agent — Orchestrator가 전문 Agent에 스킬 주입 · 배정</a:t>
+              <a:t>· Multi-Agent — 오케스트레이터가 전문 에이전트에 스킬 주입</a:t>
             </a:r>
           </a:p>
         </p:txBody>
@@ -23570,8 +22253,8 @@
         </p:nvSpPr>
         <p:spPr>
           <a:xfrm>
-            <a:off x="6949440" y="4151376"/>
-            <a:ext cx="4361688" cy="182880"/>
+            <a:off x="6931152" y="4014216"/>
+            <a:ext cx="4398264" cy="182880"/>
           </a:xfrm>
           <a:prstGeom prst="rect">
             <a:avLst/>
@@ -23590,9 +22273,9 @@
               </a:spcAft>
             </a:pPr>
             <a:r>
-              <a:rPr sz="850" b="0">
-                <a:solidFill>
-                  <a:srgbClr val="A09D96"/>
+              <a:rPr sz="800" b="0">
+                <a:solidFill>
+                  <a:srgbClr val="9DB1CE"/>
                 </a:solidFill>
                 <a:latin typeface="Pretendard"/>
                 <a:ea typeface="Pretendard"/>
@@ -23610,8 +22293,8 @@
         </p:nvSpPr>
         <p:spPr>
           <a:xfrm>
-            <a:off x="868680" y="4828032"/>
-            <a:ext cx="10607040" cy="219456"/>
+            <a:off x="868680" y="4718304"/>
+            <a:ext cx="10607040" cy="201168"/>
           </a:xfrm>
           <a:prstGeom prst="rect">
             <a:avLst/>
@@ -23630,9 +22313,9 @@
               </a:spcAft>
             </a:pPr>
             <a:r>
-              <a:rPr sz="1150" b="1">
-                <a:solidFill>
-                  <a:srgbClr val="141413"/>
+              <a:rPr sz="1100" b="1">
+                <a:solidFill>
+                  <a:srgbClr val="0F1F3A"/>
                 </a:solidFill>
                 <a:latin typeface="Pretendard"/>
                 <a:ea typeface="Pretendard"/>
@@ -23650,8 +22333,8 @@
         </p:nvSpPr>
         <p:spPr>
           <a:xfrm>
-            <a:off x="868680" y="5084064"/>
-            <a:ext cx="3413759" cy="658368"/>
+            <a:off x="868680" y="4956048"/>
+            <a:ext cx="3413759" cy="621792"/>
           </a:xfrm>
           <a:prstGeom prst="roundRect">
             <a:avLst>
@@ -23659,11 +22342,11 @@
             </a:avLst>
           </a:prstGeom>
           <a:solidFill>
-            <a:srgbClr val="EFE9DE"/>
+            <a:srgbClr val="EDF7FF"/>
           </a:solidFill>
           <a:ln w="9525">
             <a:solidFill>
-              <a:srgbClr val="E6DFD8"/>
+              <a:srgbClr val="D6E3F1"/>
             </a:solidFill>
           </a:ln>
           <a:effectLst/>
@@ -23698,8 +22381,8 @@
         </p:nvSpPr>
         <p:spPr>
           <a:xfrm>
-            <a:off x="996695" y="5157216"/>
-            <a:ext cx="3157728" cy="201168"/>
+            <a:off x="987552" y="5020056"/>
+            <a:ext cx="3176015" cy="182880"/>
           </a:xfrm>
           <a:prstGeom prst="rect">
             <a:avLst/>
@@ -23718,9 +22401,9 @@
               </a:spcAft>
             </a:pPr>
             <a:r>
-              <a:rPr sz="950" b="1">
-                <a:solidFill>
-                  <a:srgbClr val="A9583E"/>
+              <a:rPr sz="900" b="1">
+                <a:solidFill>
+                  <a:srgbClr val="07569D"/>
                 </a:solidFill>
                 <a:latin typeface="Pretendard"/>
                 <a:ea typeface="Pretendard"/>
@@ -23738,8 +22421,8 @@
         </p:nvSpPr>
         <p:spPr>
           <a:xfrm>
-            <a:off x="996695" y="5358384"/>
-            <a:ext cx="3157728" cy="365760"/>
+            <a:off x="987552" y="5212080"/>
+            <a:ext cx="3176015" cy="329184"/>
           </a:xfrm>
           <a:prstGeom prst="rect">
             <a:avLst/>
@@ -23758,9 +22441,9 @@
               </a:spcAft>
             </a:pPr>
             <a:r>
-              <a:rPr sz="850" b="0">
-                <a:solidFill>
-                  <a:srgbClr val="3D3D3A"/>
+              <a:rPr sz="800" b="0">
+                <a:solidFill>
+                  <a:srgbClr val="0F1F3A"/>
                 </a:solidFill>
                 <a:latin typeface="Pretendard"/>
                 <a:ea typeface="Pretendard"/>
@@ -23778,8 +22461,8 @@
         </p:nvSpPr>
         <p:spPr>
           <a:xfrm>
-            <a:off x="4465320" y="5084064"/>
-            <a:ext cx="3413759" cy="658368"/>
+            <a:off x="4465320" y="4956048"/>
+            <a:ext cx="3413759" cy="621792"/>
           </a:xfrm>
           <a:prstGeom prst="roundRect">
             <a:avLst>
@@ -23787,11 +22470,11 @@
             </a:avLst>
           </a:prstGeom>
           <a:solidFill>
-            <a:srgbClr val="EFE9DE"/>
+            <a:srgbClr val="EDF7FF"/>
           </a:solidFill>
           <a:ln w="9525">
             <a:solidFill>
-              <a:srgbClr val="E6DFD8"/>
+              <a:srgbClr val="D6E3F1"/>
             </a:solidFill>
           </a:ln>
           <a:effectLst/>
@@ -23826,8 +22509,8 @@
         </p:nvSpPr>
         <p:spPr>
           <a:xfrm>
-            <a:off x="4593335" y="5157216"/>
-            <a:ext cx="3157728" cy="201168"/>
+            <a:off x="4584191" y="5020056"/>
+            <a:ext cx="3176015" cy="182880"/>
           </a:xfrm>
           <a:prstGeom prst="rect">
             <a:avLst/>
@@ -23846,9 +22529,9 @@
               </a:spcAft>
             </a:pPr>
             <a:r>
-              <a:rPr sz="950" b="1">
-                <a:solidFill>
-                  <a:srgbClr val="A9583E"/>
+              <a:rPr sz="900" b="1">
+                <a:solidFill>
+                  <a:srgbClr val="07569D"/>
                 </a:solidFill>
                 <a:latin typeface="Pretendard"/>
                 <a:ea typeface="Pretendard"/>
@@ -23866,8 +22549,8 @@
         </p:nvSpPr>
         <p:spPr>
           <a:xfrm>
-            <a:off x="4593335" y="5358384"/>
-            <a:ext cx="3157728" cy="365760"/>
+            <a:off x="4584191" y="5212080"/>
+            <a:ext cx="3176015" cy="329184"/>
           </a:xfrm>
           <a:prstGeom prst="rect">
             <a:avLst/>
@@ -23886,9 +22569,9 @@
               </a:spcAft>
             </a:pPr>
             <a:r>
-              <a:rPr sz="850" b="0">
-                <a:solidFill>
-                  <a:srgbClr val="3D3D3A"/>
+              <a:rPr sz="800" b="0">
+                <a:solidFill>
+                  <a:srgbClr val="0F1F3A"/>
                 </a:solidFill>
                 <a:latin typeface="Pretendard"/>
                 <a:ea typeface="Pretendard"/>
@@ -23906,8 +22589,8 @@
         </p:nvSpPr>
         <p:spPr>
           <a:xfrm>
-            <a:off x="8061960" y="5084064"/>
-            <a:ext cx="3413759" cy="658368"/>
+            <a:off x="8061960" y="4956048"/>
+            <a:ext cx="3413759" cy="621792"/>
           </a:xfrm>
           <a:prstGeom prst="roundRect">
             <a:avLst>
@@ -23915,11 +22598,11 @@
             </a:avLst>
           </a:prstGeom>
           <a:solidFill>
-            <a:srgbClr val="EFE9DE"/>
+            <a:srgbClr val="EDF7FF"/>
           </a:solidFill>
           <a:ln w="9525">
             <a:solidFill>
-              <a:srgbClr val="E6DFD8"/>
+              <a:srgbClr val="D6E3F1"/>
             </a:solidFill>
           </a:ln>
           <a:effectLst/>
@@ -23954,8 +22637,8 @@
         </p:nvSpPr>
         <p:spPr>
           <a:xfrm>
-            <a:off x="8189976" y="5157216"/>
-            <a:ext cx="3157728" cy="201168"/>
+            <a:off x="8180832" y="5020056"/>
+            <a:ext cx="3176015" cy="182880"/>
           </a:xfrm>
           <a:prstGeom prst="rect">
             <a:avLst/>
@@ -23974,9 +22657,9 @@
               </a:spcAft>
             </a:pPr>
             <a:r>
-              <a:rPr sz="950" b="1">
-                <a:solidFill>
-                  <a:srgbClr val="A9583E"/>
+              <a:rPr sz="900" b="1">
+                <a:solidFill>
+                  <a:srgbClr val="07569D"/>
                 </a:solidFill>
                 <a:latin typeface="Pretendard"/>
                 <a:ea typeface="Pretendard"/>
@@ -23994,8 +22677,8 @@
         </p:nvSpPr>
         <p:spPr>
           <a:xfrm>
-            <a:off x="8189976" y="5358384"/>
-            <a:ext cx="3157728" cy="365760"/>
+            <a:off x="8180832" y="5212080"/>
+            <a:ext cx="3176015" cy="329184"/>
           </a:xfrm>
           <a:prstGeom prst="rect">
             <a:avLst/>
@@ -24014,9 +22697,9 @@
               </a:spcAft>
             </a:pPr>
             <a:r>
-              <a:rPr sz="850" b="0">
-                <a:solidFill>
-                  <a:srgbClr val="3D3D3A"/>
+              <a:rPr sz="800" b="0">
+                <a:solidFill>
+                  <a:srgbClr val="0F1F3A"/>
                 </a:solidFill>
                 <a:latin typeface="Pretendard"/>
                 <a:ea typeface="Pretendard"/>
@@ -24822,7 +23505,7 @@
         <p:spPr>
           <a:xfrm>
             <a:off x="868680" y="1664208"/>
-            <a:ext cx="10607040" cy="237744"/>
+            <a:ext cx="10607040" cy="219456"/>
           </a:xfrm>
           <a:prstGeom prst="rect">
             <a:avLst/>
@@ -24841,19 +23524,19 @@
               </a:spcAft>
             </a:pPr>
             <a:r>
-              <a:rPr sz="1150" b="1">
-                <a:solidFill>
-                  <a:srgbClr val="141413"/>
+              <a:rPr sz="1100" b="1">
+                <a:solidFill>
+                  <a:srgbClr val="0F1F3A"/>
                 </a:solidFill>
                 <a:latin typeface="Pretendard"/>
                 <a:ea typeface="Pretendard"/>
               </a:rPr>
-              <a:t>대표 유스케이스 — 전세 Shield  </a:t>
+              <a:t>대표 유스케이스 — 전세 보호  </a:t>
             </a:r>
             <a:r>
-              <a:rPr sz="950" b="0">
-                <a:solidFill>
-                  <a:srgbClr val="6C6A64"/>
+              <a:rPr sz="900" b="0">
+                <a:solidFill>
+                  <a:srgbClr val="637797"/>
                 </a:solidFill>
                 <a:latin typeface="Pretendard"/>
                 <a:ea typeface="Pretendard"/>
@@ -24871,8 +23554,8 @@
         </p:nvSpPr>
         <p:spPr>
           <a:xfrm>
-            <a:off x="868680" y="1938528"/>
-            <a:ext cx="868680" cy="237744"/>
+            <a:off x="868680" y="1920240"/>
+            <a:ext cx="841248" cy="219456"/>
           </a:xfrm>
           <a:prstGeom prst="roundRect">
             <a:avLst>
@@ -24880,7 +23563,7 @@
             </a:avLst>
           </a:prstGeom>
           <a:solidFill>
-            <a:srgbClr val="EFE9DE"/>
+            <a:srgbClr val="EDF7FF"/>
           </a:solidFill>
           <a:ln>
             <a:noFill/>
@@ -24902,14 +23585,14 @@
           </a:fontRef>
         </p:style>
         <p:txBody>
-          <a:bodyPr rtlCol="0" anchor="ctr" wrap="square" lIns="50800" rIns="50800" tIns="12700" bIns="12700"/>
+          <a:bodyPr rtlCol="0" anchor="ctr" wrap="square" lIns="38100" rIns="38100" tIns="12700" bIns="12700"/>
           <a:lstStyle/>
           <a:p>
             <a:pPr algn="ctr"/>
             <a:r>
-              <a:rPr sz="800" b="1">
-                <a:solidFill>
-                  <a:srgbClr val="141413"/>
+              <a:rPr sz="750" b="1">
+                <a:solidFill>
+                  <a:srgbClr val="0F1F3A"/>
                 </a:solidFill>
                 <a:latin typeface="Pretendard"/>
                 <a:ea typeface="Pretendard"/>
@@ -24927,8 +23610,8 @@
         </p:nvSpPr>
         <p:spPr>
           <a:xfrm>
-            <a:off x="1828800" y="1938528"/>
-            <a:ext cx="868680" cy="237744"/>
+            <a:off x="1801368" y="1920240"/>
+            <a:ext cx="841248" cy="219456"/>
           </a:xfrm>
           <a:prstGeom prst="roundRect">
             <a:avLst>
@@ -24936,7 +23619,7 @@
             </a:avLst>
           </a:prstGeom>
           <a:solidFill>
-            <a:srgbClr val="CC785C"/>
+            <a:srgbClr val="0B6FB3"/>
           </a:solidFill>
           <a:ln>
             <a:noFill/>
@@ -24958,12 +23641,12 @@
           </a:fontRef>
         </p:style>
         <p:txBody>
-          <a:bodyPr rtlCol="0" anchor="ctr" wrap="square" lIns="50800" rIns="50800" tIns="12700" bIns="12700"/>
+          <a:bodyPr rtlCol="0" anchor="ctr" wrap="square" lIns="38100" rIns="38100" tIns="12700" bIns="12700"/>
           <a:lstStyle/>
           <a:p>
             <a:pPr algn="ctr"/>
             <a:r>
-              <a:rPr sz="800" b="1">
+              <a:rPr sz="750" b="1">
                 <a:solidFill>
                   <a:srgbClr val="FFFFFF"/>
                 </a:solidFill>
@@ -24983,8 +23666,8 @@
         </p:nvSpPr>
         <p:spPr>
           <a:xfrm>
-            <a:off x="2788920" y="1938528"/>
-            <a:ext cx="868680" cy="237744"/>
+            <a:off x="2734056" y="1920240"/>
+            <a:ext cx="841248" cy="219456"/>
           </a:xfrm>
           <a:prstGeom prst="roundRect">
             <a:avLst>
@@ -24992,7 +23675,7 @@
             </a:avLst>
           </a:prstGeom>
           <a:solidFill>
-            <a:srgbClr val="181715"/>
+            <a:srgbClr val="091C4D"/>
           </a:solidFill>
           <a:ln>
             <a:noFill/>
@@ -25014,19 +23697,19 @@
           </a:fontRef>
         </p:style>
         <p:txBody>
-          <a:bodyPr rtlCol="0" anchor="ctr" wrap="square" lIns="50800" rIns="50800" tIns="12700" bIns="12700"/>
+          <a:bodyPr rtlCol="0" anchor="ctr" wrap="square" lIns="38100" rIns="38100" tIns="12700" bIns="12700"/>
           <a:lstStyle/>
           <a:p>
             <a:pPr algn="ctr"/>
             <a:r>
-              <a:rPr sz="800" b="1">
-                <a:solidFill>
-                  <a:srgbClr val="FAF9F5"/>
+              <a:rPr sz="750" b="1">
+                <a:solidFill>
+                  <a:srgbClr val="EDF4FB"/>
                 </a:solidFill>
                 <a:latin typeface="Pretendard"/>
                 <a:ea typeface="Pretendard"/>
               </a:rPr>
-              <a:t>AI Agent</a:t>
+              <a:t>AI 에이전트</a:t>
             </a:r>
           </a:p>
         </p:txBody>
@@ -25039,8 +23722,8 @@
         </p:nvSpPr>
         <p:spPr>
           <a:xfrm>
-            <a:off x="3749039" y="1938528"/>
-            <a:ext cx="868680" cy="237744"/>
+            <a:off x="3666744" y="1920240"/>
+            <a:ext cx="841248" cy="219456"/>
           </a:xfrm>
           <a:prstGeom prst="roundRect">
             <a:avLst>
@@ -25048,7 +23731,7 @@
             </a:avLst>
           </a:prstGeom>
           <a:solidFill>
-            <a:srgbClr val="5DB8A6"/>
+            <a:srgbClr val="0F8F72"/>
           </a:solidFill>
           <a:ln>
             <a:noFill/>
@@ -25070,12 +23753,12 @@
           </a:fontRef>
         </p:style>
         <p:txBody>
-          <a:bodyPr rtlCol="0" anchor="ctr" wrap="square" lIns="50800" rIns="50800" tIns="12700" bIns="12700"/>
+          <a:bodyPr rtlCol="0" anchor="ctr" wrap="square" lIns="38100" rIns="38100" tIns="12700" bIns="12700"/>
           <a:lstStyle/>
           <a:p>
             <a:pPr algn="ctr"/>
             <a:r>
-              <a:rPr sz="800" b="1">
+              <a:rPr sz="750" b="1">
                 <a:solidFill>
                   <a:srgbClr val="FFFFFF"/>
                 </a:solidFill>
@@ -25095,8 +23778,8 @@
         </p:nvSpPr>
         <p:spPr>
           <a:xfrm>
-            <a:off x="868680" y="2286000"/>
-            <a:ext cx="1327186" cy="969264"/>
+            <a:off x="868680" y="2231136"/>
+            <a:ext cx="1342861" cy="841248"/>
           </a:xfrm>
           <a:prstGeom prst="roundRect">
             <a:avLst>
@@ -25104,11 +23787,11 @@
             </a:avLst>
           </a:prstGeom>
           <a:solidFill>
-            <a:srgbClr val="EFE9DE"/>
+            <a:srgbClr val="EDF7FF"/>
           </a:solidFill>
           <a:ln w="9525">
             <a:solidFill>
-              <a:srgbClr val="E6DFD8"/>
+              <a:srgbClr val="D6E3F1"/>
             </a:solidFill>
           </a:ln>
           <a:effectLst/>
@@ -25143,8 +23826,8 @@
         </p:nvSpPr>
         <p:spPr>
           <a:xfrm>
-            <a:off x="941832" y="2359152"/>
-            <a:ext cx="1180882" cy="219456"/>
+            <a:off x="941832" y="2286000"/>
+            <a:ext cx="1196557" cy="182880"/>
           </a:xfrm>
           <a:prstGeom prst="rect">
             <a:avLst/>
@@ -25163,14 +23846,14 @@
               </a:spcAft>
             </a:pPr>
             <a:r>
-              <a:rPr sz="1100" b="1">
-                <a:solidFill>
-                  <a:srgbClr val="141413"/>
+              <a:rPr sz="1000" b="1">
+                <a:solidFill>
+                  <a:srgbClr val="0F1F3A"/>
                 </a:solidFill>
                 <a:latin typeface="Pretendard"/>
                 <a:ea typeface="Pretendard"/>
               </a:rPr>
-              <a:t>①</a:t>
+              <a:t>1</a:t>
             </a:r>
           </a:p>
         </p:txBody>
@@ -25183,8 +23866,8 @@
         </p:nvSpPr>
         <p:spPr>
           <a:xfrm>
-            <a:off x="941832" y="2596896"/>
-            <a:ext cx="1180882" cy="548640"/>
+            <a:off x="941832" y="2487168"/>
+            <a:ext cx="1196557" cy="512064"/>
           </a:xfrm>
           <a:prstGeom prst="rect">
             <a:avLst/>
@@ -25203,9 +23886,9 @@
               </a:spcAft>
             </a:pPr>
             <a:r>
-              <a:rPr sz="850" b="1">
-                <a:solidFill>
-                  <a:srgbClr val="141413"/>
+              <a:rPr sz="800" b="1">
+                <a:solidFill>
+                  <a:srgbClr val="0F1F3A"/>
                 </a:solidFill>
                 <a:latin typeface="Pretendard"/>
                 <a:ea typeface="Pretendard"/>
@@ -25220,9 +23903,9 @@
               </a:spcAft>
             </a:pPr>
             <a:r>
-              <a:rPr sz="850" b="1">
-                <a:solidFill>
-                  <a:srgbClr val="141413"/>
+              <a:rPr sz="800" b="1">
+                <a:solidFill>
+                  <a:srgbClr val="0F1F3A"/>
                 </a:solidFill>
                 <a:latin typeface="Pretendard"/>
                 <a:ea typeface="Pretendard"/>
@@ -25240,15 +23923,15 @@
         </p:nvCxnSpPr>
         <p:spPr>
           <a:xfrm>
-            <a:off x="2209582" y="2770632"/>
-            <a:ext cx="192024" cy="0"/>
+            <a:off x="2225257" y="2651760"/>
+            <a:ext cx="173736" cy="0"/>
           </a:xfrm>
           <a:prstGeom prst="line">
             <a:avLst/>
           </a:prstGeom>
-          <a:ln w="15240">
+          <a:ln w="13970">
             <a:solidFill>
-              <a:srgbClr val="6C6A64"/>
+              <a:srgbClr val="637797"/>
             </a:solidFill>
             <a:tailEnd type="triangle" w="med" len="med"/>
           </a:ln>
@@ -25277,8 +23960,8 @@
         </p:nvSpPr>
         <p:spPr>
           <a:xfrm>
-            <a:off x="2415322" y="2286000"/>
-            <a:ext cx="1327186" cy="969264"/>
+            <a:off x="2412709" y="2231136"/>
+            <a:ext cx="1342861" cy="841248"/>
           </a:xfrm>
           <a:prstGeom prst="roundRect">
             <a:avLst>
@@ -25286,7 +23969,7 @@
             </a:avLst>
           </a:prstGeom>
           <a:solidFill>
-            <a:srgbClr val="CC785C"/>
+            <a:srgbClr val="0B6FB3"/>
           </a:solidFill>
           <a:ln>
             <a:noFill/>
@@ -25323,8 +24006,8 @@
         </p:nvSpPr>
         <p:spPr>
           <a:xfrm>
-            <a:off x="2488474" y="2359152"/>
-            <a:ext cx="1180882" cy="219456"/>
+            <a:off x="2485861" y="2286000"/>
+            <a:ext cx="1196557" cy="182880"/>
           </a:xfrm>
           <a:prstGeom prst="rect">
             <a:avLst/>
@@ -25343,14 +24026,14 @@
               </a:spcAft>
             </a:pPr>
             <a:r>
-              <a:rPr sz="1100" b="1">
+              <a:rPr sz="1000" b="1">
                 <a:solidFill>
                   <a:srgbClr val="FFFFFF"/>
                 </a:solidFill>
                 <a:latin typeface="Pretendard"/>
                 <a:ea typeface="Pretendard"/>
               </a:rPr>
-              <a:t>②</a:t>
+              <a:t>2</a:t>
             </a:r>
           </a:p>
         </p:txBody>
@@ -25363,8 +24046,8 @@
         </p:nvSpPr>
         <p:spPr>
           <a:xfrm>
-            <a:off x="2488474" y="2596896"/>
-            <a:ext cx="1180882" cy="548640"/>
+            <a:off x="2485861" y="2487168"/>
+            <a:ext cx="1196557" cy="512064"/>
           </a:xfrm>
           <a:prstGeom prst="rect">
             <a:avLst/>
@@ -25383,14 +24066,14 @@
               </a:spcAft>
             </a:pPr>
             <a:r>
-              <a:rPr sz="850" b="1">
+              <a:rPr sz="800" b="1">
                 <a:solidFill>
                   <a:srgbClr val="FFFFFF"/>
                 </a:solidFill>
                 <a:latin typeface="Pretendard"/>
                 <a:ea typeface="Pretendard"/>
               </a:rPr>
-              <a:t>Case 생성</a:t>
+              <a:t>케이스 생성</a:t>
             </a:r>
           </a:p>
           <a:p>
@@ -25400,7 +24083,7 @@
               </a:spcAft>
             </a:pPr>
             <a:r>
-              <a:rPr sz="850" b="1">
+              <a:rPr sz="800" b="1">
                 <a:solidFill>
                   <a:srgbClr val="FFFFFF"/>
                 </a:solidFill>
@@ -25420,15 +24103,15 @@
         </p:nvCxnSpPr>
         <p:spPr>
           <a:xfrm>
-            <a:off x="3756224" y="2770632"/>
-            <a:ext cx="192024" cy="0"/>
+            <a:off x="3769287" y="2651760"/>
+            <a:ext cx="173736" cy="0"/>
           </a:xfrm>
           <a:prstGeom prst="line">
             <a:avLst/>
           </a:prstGeom>
-          <a:ln w="15240">
+          <a:ln w="13970">
             <a:solidFill>
-              <a:srgbClr val="6C6A64"/>
+              <a:srgbClr val="637797"/>
             </a:solidFill>
             <a:tailEnd type="triangle" w="med" len="med"/>
           </a:ln>
@@ -25457,8 +24140,8 @@
         </p:nvSpPr>
         <p:spPr>
           <a:xfrm>
-            <a:off x="3961964" y="2286000"/>
-            <a:ext cx="1327186" cy="969264"/>
+            <a:off x="3956739" y="2231136"/>
+            <a:ext cx="1342861" cy="841248"/>
           </a:xfrm>
           <a:prstGeom prst="roundRect">
             <a:avLst>
@@ -25466,7 +24149,7 @@
             </a:avLst>
           </a:prstGeom>
           <a:solidFill>
-            <a:srgbClr val="181715"/>
+            <a:srgbClr val="091C4D"/>
           </a:solidFill>
           <a:ln>
             <a:noFill/>
@@ -25503,8 +24186,8 @@
         </p:nvSpPr>
         <p:spPr>
           <a:xfrm>
-            <a:off x="4035116" y="2359152"/>
-            <a:ext cx="1180882" cy="219456"/>
+            <a:off x="4029891" y="2286000"/>
+            <a:ext cx="1196557" cy="182880"/>
           </a:xfrm>
           <a:prstGeom prst="rect">
             <a:avLst/>
@@ -25523,14 +24206,14 @@
               </a:spcAft>
             </a:pPr>
             <a:r>
-              <a:rPr sz="1100" b="1">
-                <a:solidFill>
-                  <a:srgbClr val="FAF9F5"/>
+              <a:rPr sz="1000" b="1">
+                <a:solidFill>
+                  <a:srgbClr val="EDF4FB"/>
                 </a:solidFill>
                 <a:latin typeface="Pretendard"/>
                 <a:ea typeface="Pretendard"/>
               </a:rPr>
-              <a:t>③</a:t>
+              <a:t>3</a:t>
             </a:r>
           </a:p>
         </p:txBody>
@@ -25543,8 +24226,8 @@
         </p:nvSpPr>
         <p:spPr>
           <a:xfrm>
-            <a:off x="4035116" y="2596896"/>
-            <a:ext cx="1180882" cy="548640"/>
+            <a:off x="4029891" y="2487168"/>
+            <a:ext cx="1196557" cy="512064"/>
           </a:xfrm>
           <a:prstGeom prst="rect">
             <a:avLst/>
@@ -25563,9 +24246,9 @@
               </a:spcAft>
             </a:pPr>
             <a:r>
-              <a:rPr sz="850" b="1">
-                <a:solidFill>
-                  <a:srgbClr val="FAF9F5"/>
+              <a:rPr sz="800" b="1">
+                <a:solidFill>
+                  <a:srgbClr val="EDF4FB"/>
                 </a:solidFill>
                 <a:latin typeface="Pretendard"/>
                 <a:ea typeface="Pretendard"/>
@@ -25580,9 +24263,9 @@
               </a:spcAft>
             </a:pPr>
             <a:r>
-              <a:rPr sz="850" b="1">
-                <a:solidFill>
-                  <a:srgbClr val="FAF9F5"/>
+              <a:rPr sz="800" b="1">
+                <a:solidFill>
+                  <a:srgbClr val="EDF4FB"/>
                 </a:solidFill>
                 <a:latin typeface="Pretendard"/>
                 <a:ea typeface="Pretendard"/>
@@ -25600,15 +24283,15 @@
         </p:nvCxnSpPr>
         <p:spPr>
           <a:xfrm>
-            <a:off x="5302866" y="2770632"/>
-            <a:ext cx="192024" cy="0"/>
+            <a:off x="5313317" y="2651760"/>
+            <a:ext cx="173736" cy="0"/>
           </a:xfrm>
           <a:prstGeom prst="line">
             <a:avLst/>
           </a:prstGeom>
-          <a:ln w="15240">
+          <a:ln w="13970">
             <a:solidFill>
-              <a:srgbClr val="6C6A64"/>
+              <a:srgbClr val="637797"/>
             </a:solidFill>
             <a:tailEnd type="triangle" w="med" len="med"/>
           </a:ln>
@@ -25637,8 +24320,8 @@
         </p:nvSpPr>
         <p:spPr>
           <a:xfrm>
-            <a:off x="5508606" y="2286000"/>
-            <a:ext cx="1327186" cy="969264"/>
+            <a:off x="5500769" y="2231136"/>
+            <a:ext cx="1342861" cy="841248"/>
           </a:xfrm>
           <a:prstGeom prst="roundRect">
             <a:avLst>
@@ -25646,7 +24329,7 @@
             </a:avLst>
           </a:prstGeom>
           <a:solidFill>
-            <a:srgbClr val="181715"/>
+            <a:srgbClr val="091C4D"/>
           </a:solidFill>
           <a:ln>
             <a:noFill/>
@@ -25683,8 +24366,8 @@
         </p:nvSpPr>
         <p:spPr>
           <a:xfrm>
-            <a:off x="5581758" y="2359152"/>
-            <a:ext cx="1180882" cy="219456"/>
+            <a:off x="5573921" y="2286000"/>
+            <a:ext cx="1196557" cy="182880"/>
           </a:xfrm>
           <a:prstGeom prst="rect">
             <a:avLst/>
@@ -25703,14 +24386,14 @@
               </a:spcAft>
             </a:pPr>
             <a:r>
-              <a:rPr sz="1100" b="1">
-                <a:solidFill>
-                  <a:srgbClr val="FAF9F5"/>
+              <a:rPr sz="1000" b="1">
+                <a:solidFill>
+                  <a:srgbClr val="EDF4FB"/>
                 </a:solidFill>
                 <a:latin typeface="Pretendard"/>
                 <a:ea typeface="Pretendard"/>
               </a:rPr>
-              <a:t>④</a:t>
+              <a:t>4</a:t>
             </a:r>
           </a:p>
         </p:txBody>
@@ -25723,8 +24406,8 @@
         </p:nvSpPr>
         <p:spPr>
           <a:xfrm>
-            <a:off x="5581758" y="2596896"/>
-            <a:ext cx="1180882" cy="548640"/>
+            <a:off x="5573921" y="2487168"/>
+            <a:ext cx="1196557" cy="512064"/>
           </a:xfrm>
           <a:prstGeom prst="rect">
             <a:avLst/>
@@ -25743,9 +24426,9 @@
               </a:spcAft>
             </a:pPr>
             <a:r>
-              <a:rPr sz="850" b="1">
-                <a:solidFill>
-                  <a:srgbClr val="FAF9F5"/>
+              <a:rPr sz="800" b="1">
+                <a:solidFill>
+                  <a:srgbClr val="EDF4FB"/>
                 </a:solidFill>
                 <a:latin typeface="Pretendard"/>
                 <a:ea typeface="Pretendard"/>
@@ -25760,9 +24443,9 @@
               </a:spcAft>
             </a:pPr>
             <a:r>
-              <a:rPr sz="850" b="1">
-                <a:solidFill>
-                  <a:srgbClr val="FAF9F5"/>
+              <a:rPr sz="800" b="1">
+                <a:solidFill>
+                  <a:srgbClr val="EDF4FB"/>
                 </a:solidFill>
                 <a:latin typeface="Pretendard"/>
                 <a:ea typeface="Pretendard"/>
@@ -25780,15 +24463,15 @@
         </p:nvCxnSpPr>
         <p:spPr>
           <a:xfrm>
-            <a:off x="6849509" y="2770632"/>
-            <a:ext cx="192024" cy="0"/>
+            <a:off x="6857346" y="2651760"/>
+            <a:ext cx="173736" cy="0"/>
           </a:xfrm>
           <a:prstGeom prst="line">
             <a:avLst/>
           </a:prstGeom>
-          <a:ln w="15240">
+          <a:ln w="13970">
             <a:solidFill>
-              <a:srgbClr val="6C6A64"/>
+              <a:srgbClr val="637797"/>
             </a:solidFill>
             <a:tailEnd type="triangle" w="med" len="med"/>
           </a:ln>
@@ -25817,8 +24500,8 @@
         </p:nvSpPr>
         <p:spPr>
           <a:xfrm>
-            <a:off x="7055249" y="2286000"/>
-            <a:ext cx="1327186" cy="969264"/>
+            <a:off x="7044798" y="2231136"/>
+            <a:ext cx="1342861" cy="841248"/>
           </a:xfrm>
           <a:prstGeom prst="roundRect">
             <a:avLst>
@@ -25826,7 +24509,7 @@
             </a:avLst>
           </a:prstGeom>
           <a:solidFill>
-            <a:srgbClr val="5DB8A6"/>
+            <a:srgbClr val="0F8F72"/>
           </a:solidFill>
           <a:ln>
             <a:noFill/>
@@ -25863,8 +24546,8 @@
         </p:nvSpPr>
         <p:spPr>
           <a:xfrm>
-            <a:off x="7128401" y="2359152"/>
-            <a:ext cx="1180882" cy="219456"/>
+            <a:off x="7117950" y="2286000"/>
+            <a:ext cx="1196557" cy="182880"/>
           </a:xfrm>
           <a:prstGeom prst="rect">
             <a:avLst/>
@@ -25883,14 +24566,14 @@
               </a:spcAft>
             </a:pPr>
             <a:r>
-              <a:rPr sz="1100" b="1">
+              <a:rPr sz="1000" b="1">
                 <a:solidFill>
                   <a:srgbClr val="FFFFFF"/>
                 </a:solidFill>
                 <a:latin typeface="Pretendard"/>
                 <a:ea typeface="Pretendard"/>
               </a:rPr>
-              <a:t>⑤</a:t>
+              <a:t>5</a:t>
             </a:r>
           </a:p>
         </p:txBody>
@@ -25903,8 +24586,8 @@
         </p:nvSpPr>
         <p:spPr>
           <a:xfrm>
-            <a:off x="7128401" y="2596896"/>
-            <a:ext cx="1180882" cy="548640"/>
+            <a:off x="7117950" y="2487168"/>
+            <a:ext cx="1196557" cy="512064"/>
           </a:xfrm>
           <a:prstGeom prst="rect">
             <a:avLst/>
@@ -25923,14 +24606,14 @@
               </a:spcAft>
             </a:pPr>
             <a:r>
-              <a:rPr sz="850" b="1">
+              <a:rPr sz="800" b="1">
                 <a:solidFill>
                   <a:srgbClr val="FFFFFF"/>
                 </a:solidFill>
                 <a:latin typeface="Pretendard"/>
                 <a:ea typeface="Pretendard"/>
               </a:rPr>
-              <a:t>Compliance</a:t>
+              <a:t>준법 검토</a:t>
             </a:r>
           </a:p>
           <a:p>
@@ -25940,14 +24623,14 @@
               </a:spcAft>
             </a:pPr>
             <a:r>
-              <a:rPr sz="850" b="1">
+              <a:rPr sz="800" b="1">
                 <a:solidFill>
                   <a:srgbClr val="FFFFFF"/>
                 </a:solidFill>
                 <a:latin typeface="Pretendard"/>
                 <a:ea typeface="Pretendard"/>
               </a:rPr>
-              <a:t>표현·준법 검토</a:t>
+              <a:t>표현·법률 리스크</a:t>
             </a:r>
           </a:p>
         </p:txBody>
@@ -25960,15 +24643,15 @@
         </p:nvCxnSpPr>
         <p:spPr>
           <a:xfrm>
-            <a:off x="8396151" y="2770632"/>
-            <a:ext cx="192024" cy="0"/>
+            <a:off x="8401376" y="2651760"/>
+            <a:ext cx="173736" cy="0"/>
           </a:xfrm>
           <a:prstGeom prst="line">
             <a:avLst/>
           </a:prstGeom>
-          <a:ln w="15240">
+          <a:ln w="13970">
             <a:solidFill>
-              <a:srgbClr val="6C6A64"/>
+              <a:srgbClr val="637797"/>
             </a:solidFill>
             <a:tailEnd type="triangle" w="med" len="med"/>
           </a:ln>
@@ -25997,8 +24680,8 @@
         </p:nvSpPr>
         <p:spPr>
           <a:xfrm>
-            <a:off x="8601891" y="2286000"/>
-            <a:ext cx="1327186" cy="969264"/>
+            <a:off x="8588828" y="2231136"/>
+            <a:ext cx="1342861" cy="841248"/>
           </a:xfrm>
           <a:prstGeom prst="roundRect">
             <a:avLst>
@@ -26006,7 +24689,7 @@
             </a:avLst>
           </a:prstGeom>
           <a:solidFill>
-            <a:srgbClr val="CC785C"/>
+            <a:srgbClr val="0B6FB3"/>
           </a:solidFill>
           <a:ln>
             <a:noFill/>
@@ -26043,8 +24726,8 @@
         </p:nvSpPr>
         <p:spPr>
           <a:xfrm>
-            <a:off x="8675043" y="2359152"/>
-            <a:ext cx="1180882" cy="219456"/>
+            <a:off x="8661980" y="2286000"/>
+            <a:ext cx="1196557" cy="182880"/>
           </a:xfrm>
           <a:prstGeom prst="rect">
             <a:avLst/>
@@ -26063,14 +24746,14 @@
               </a:spcAft>
             </a:pPr>
             <a:r>
-              <a:rPr sz="1100" b="1">
+              <a:rPr sz="1000" b="1">
                 <a:solidFill>
                   <a:srgbClr val="FFFFFF"/>
                 </a:solidFill>
                 <a:latin typeface="Pretendard"/>
                 <a:ea typeface="Pretendard"/>
               </a:rPr>
-              <a:t>⑥</a:t>
+              <a:t>6</a:t>
             </a:r>
           </a:p>
         </p:txBody>
@@ -26083,8 +24766,8 @@
         </p:nvSpPr>
         <p:spPr>
           <a:xfrm>
-            <a:off x="8675043" y="2596896"/>
-            <a:ext cx="1180882" cy="548640"/>
+            <a:off x="8661980" y="2487168"/>
+            <a:ext cx="1196557" cy="512064"/>
           </a:xfrm>
           <a:prstGeom prst="rect">
             <a:avLst/>
@@ -26103,7 +24786,7 @@
               </a:spcAft>
             </a:pPr>
             <a:r>
-              <a:rPr sz="850" b="1">
+              <a:rPr sz="800" b="1">
                 <a:solidFill>
                   <a:srgbClr val="FFFFFF"/>
                 </a:solidFill>
@@ -26120,14 +24803,14 @@
               </a:spcAft>
             </a:pPr>
             <a:r>
-              <a:rPr sz="850" b="1">
+              <a:rPr sz="800" b="1">
                 <a:solidFill>
                   <a:srgbClr val="FFFFFF"/>
                 </a:solidFill>
                 <a:latin typeface="Pretendard"/>
                 <a:ea typeface="Pretendard"/>
               </a:rPr>
-              <a:t>Approve</a:t>
+              <a:t>(사람 결정)</a:t>
             </a:r>
           </a:p>
         </p:txBody>
@@ -26140,15 +24823,15 @@
         </p:nvCxnSpPr>
         <p:spPr>
           <a:xfrm>
-            <a:off x="9942793" y="2770632"/>
-            <a:ext cx="192024" cy="0"/>
+            <a:off x="9945406" y="2651760"/>
+            <a:ext cx="173736" cy="0"/>
           </a:xfrm>
           <a:prstGeom prst="line">
             <a:avLst/>
           </a:prstGeom>
-          <a:ln w="15240">
+          <a:ln w="13970">
             <a:solidFill>
-              <a:srgbClr val="6C6A64"/>
+              <a:srgbClr val="637797"/>
             </a:solidFill>
             <a:tailEnd type="triangle" w="med" len="med"/>
           </a:ln>
@@ -26177,8 +24860,8 @@
         </p:nvSpPr>
         <p:spPr>
           <a:xfrm>
-            <a:off x="10148533" y="2286000"/>
-            <a:ext cx="1327186" cy="969264"/>
+            <a:off x="10132858" y="2231136"/>
+            <a:ext cx="1342861" cy="841248"/>
           </a:xfrm>
           <a:prstGeom prst="roundRect">
             <a:avLst>
@@ -26186,11 +24869,11 @@
             </a:avLst>
           </a:prstGeom>
           <a:solidFill>
-            <a:srgbClr val="EFE9DE"/>
+            <a:srgbClr val="EDF7FF"/>
           </a:solidFill>
           <a:ln w="9525">
             <a:solidFill>
-              <a:srgbClr val="E6DFD8"/>
+              <a:srgbClr val="D6E3F1"/>
             </a:solidFill>
           </a:ln>
           <a:effectLst/>
@@ -26225,8 +24908,8 @@
         </p:nvSpPr>
         <p:spPr>
           <a:xfrm>
-            <a:off x="10221685" y="2359152"/>
-            <a:ext cx="1180882" cy="219456"/>
+            <a:off x="10206010" y="2286000"/>
+            <a:ext cx="1196557" cy="182880"/>
           </a:xfrm>
           <a:prstGeom prst="rect">
             <a:avLst/>
@@ -26245,14 +24928,14 @@
               </a:spcAft>
             </a:pPr>
             <a:r>
-              <a:rPr sz="1100" b="1">
-                <a:solidFill>
-                  <a:srgbClr val="141413"/>
+              <a:rPr sz="1000" b="1">
+                <a:solidFill>
+                  <a:srgbClr val="0F1F3A"/>
                 </a:solidFill>
                 <a:latin typeface="Pretendard"/>
                 <a:ea typeface="Pretendard"/>
               </a:rPr>
-              <a:t>⑦</a:t>
+              <a:t>7</a:t>
             </a:r>
           </a:p>
         </p:txBody>
@@ -26265,8 +24948,8 @@
         </p:nvSpPr>
         <p:spPr>
           <a:xfrm>
-            <a:off x="10221685" y="2596896"/>
-            <a:ext cx="1180882" cy="548640"/>
+            <a:off x="10206010" y="2487168"/>
+            <a:ext cx="1196557" cy="512064"/>
           </a:xfrm>
           <a:prstGeom prst="rect">
             <a:avLst/>
@@ -26285,9 +24968,9 @@
               </a:spcAft>
             </a:pPr>
             <a:r>
-              <a:rPr sz="850" b="1">
-                <a:solidFill>
-                  <a:srgbClr val="141413"/>
+              <a:rPr sz="800" b="1">
+                <a:solidFill>
+                  <a:srgbClr val="0F1F3A"/>
                 </a:solidFill>
                 <a:latin typeface="Pretendard"/>
                 <a:ea typeface="Pretendard"/>
@@ -26302,9 +24985,9 @@
               </a:spcAft>
             </a:pPr>
             <a:r>
-              <a:rPr sz="850" b="1">
-                <a:solidFill>
-                  <a:srgbClr val="141413"/>
+              <a:rPr sz="800" b="1">
+                <a:solidFill>
+                  <a:srgbClr val="0F1F3A"/>
                 </a:solidFill>
                 <a:latin typeface="Pretendard"/>
                 <a:ea typeface="Pretendard"/>
@@ -26322,8 +25005,8 @@
         </p:nvSpPr>
         <p:spPr>
           <a:xfrm>
-            <a:off x="868680" y="3310128"/>
-            <a:ext cx="10607040" cy="201168"/>
+            <a:off x="868680" y="3118103"/>
+            <a:ext cx="10607040" cy="182880"/>
           </a:xfrm>
           <a:prstGeom prst="rect">
             <a:avLst/>
@@ -26342,9 +25025,9 @@
               </a:spcAft>
             </a:pPr>
             <a:r>
-              <a:rPr sz="850" b="1">
-                <a:solidFill>
-                  <a:srgbClr val="A9583E"/>
+              <a:rPr sz="800" b="1">
+                <a:solidFill>
+                  <a:srgbClr val="07569D"/>
                 </a:solidFill>
                 <a:latin typeface="Pretendard"/>
                 <a:ea typeface="Pretendard"/>
@@ -26352,9 +25035,9 @@
               <a:t>안전 정책: </a:t>
             </a:r>
             <a:r>
-              <a:rPr sz="850" b="0">
-                <a:solidFill>
-                  <a:srgbClr val="6C6A64"/>
+              <a:rPr sz="800" b="0">
+                <a:solidFill>
+                  <a:srgbClr val="637797"/>
                 </a:solidFill>
                 <a:latin typeface="Pretendard"/>
                 <a:ea typeface="Pretendard"/>
@@ -26380,15 +25063,15 @@
         </p:blipFill>
         <p:spPr>
           <a:xfrm>
-            <a:off x="868680" y="3621024"/>
-            <a:ext cx="5074920" cy="2026796"/>
+            <a:off x="868680" y="3346703"/>
+            <a:ext cx="3840480" cy="2160270"/>
           </a:xfrm>
           <a:prstGeom prst="rect">
             <a:avLst/>
           </a:prstGeom>
           <a:ln w="12700">
             <a:solidFill>
-              <a:srgbClr val="E6DFD8"/>
+              <a:srgbClr val="D6E3F1"/>
             </a:solidFill>
           </a:ln>
           <a:effectLst/>
@@ -26402,8 +25085,8 @@
         </p:nvSpPr>
         <p:spPr>
           <a:xfrm>
-            <a:off x="868680" y="5684396"/>
-            <a:ext cx="5074920" cy="182880"/>
+            <a:off x="868680" y="5534406"/>
+            <a:ext cx="3840480" cy="182880"/>
           </a:xfrm>
           <a:prstGeom prst="rect">
             <a:avLst/>
@@ -26422,28 +25105,98 @@
               </a:spcAft>
             </a:pPr>
             <a:r>
-              <a:rPr sz="800" b="0">
-                <a:solidFill>
-                  <a:srgbClr val="6C6A64"/>
+              <a:rPr sz="750" b="0">
+                <a:solidFill>
+                  <a:srgbClr val="637797"/>
                 </a:solidFill>
                 <a:latin typeface="Pretendard"/>
                 <a:ea typeface="Pretendard"/>
               </a:rPr>
-              <a:t>MVP 전세 Shield 화면 — 5대 진단 기능과 케이스(JBG-201) 연동</a:t>
+              <a:t>전세 보호 화면 — 5대 진단과 케이스(JBG-201) 연동</a:t>
             </a:r>
           </a:p>
         </p:txBody>
       </p:sp>
-      <p:sp>
-        <p:nvSpPr>
-          <p:cNvPr id="53" name="Rounded Rectangle 52"/>
+      <p:pic>
+        <p:nvPicPr>
+          <p:cNvPr id="53" name="Picture 52" descr="runs.png"/>
+          <p:cNvPicPr>
+            <a:picLocks noChangeAspect="1"/>
+          </p:cNvPicPr>
+          <p:nvPr/>
+        </p:nvPicPr>
+        <p:blipFill>
+          <a:blip r:embed="rId5"/>
+          <a:stretch>
+            <a:fillRect/>
+          </a:stretch>
+        </p:blipFill>
+        <p:spPr>
+          <a:xfrm>
+            <a:off x="4937760" y="3493008"/>
+            <a:ext cx="3291840" cy="1851660"/>
+          </a:xfrm>
+          <a:prstGeom prst="rect">
+            <a:avLst/>
+          </a:prstGeom>
+          <a:ln w="12700">
+            <a:solidFill>
+              <a:srgbClr val="D6E3F1"/>
+            </a:solidFill>
+          </a:ln>
+          <a:effectLst/>
+        </p:spPr>
+      </p:pic>
+      <p:sp>
+        <p:nvSpPr>
+          <p:cNvPr id="54" name="TextBox 53"/>
+          <p:cNvSpPr txBox="1"/>
+          <p:nvPr/>
+        </p:nvSpPr>
+        <p:spPr>
+          <a:xfrm>
+            <a:off x="4937760" y="5372100"/>
+            <a:ext cx="3291840" cy="182880"/>
+          </a:xfrm>
+          <a:prstGeom prst="rect">
+            <a:avLst/>
+          </a:prstGeom>
+          <a:noFill/>
+        </p:spPr>
+        <p:txBody>
+          <a:bodyPr wrap="square" anchor="t" lIns="0" rIns="0" tIns="0" bIns="0">
+            <a:spAutoFit/>
+          </a:bodyPr>
+          <a:lstStyle/>
+          <a:p>
+            <a:pPr algn="l">
+              <a:spcAft>
+                <a:spcPts val="200"/>
+              </a:spcAft>
+            </a:pPr>
+            <a:r>
+              <a:rPr sz="750" b="0">
+                <a:solidFill>
+                  <a:srgbClr val="637797"/>
+                </a:solidFill>
+                <a:latin typeface="Pretendard"/>
+                <a:ea typeface="Pretendard"/>
+              </a:rPr>
+              <a:t>실행 이력 — 에이전트 로그와 상태 전이</a:t>
+            </a:r>
+          </a:p>
+        </p:txBody>
+      </p:sp>
+      <p:sp>
+        <p:nvSpPr>
+          <p:cNvPr id="55" name="Rounded Rectangle 54"/>
           <p:cNvSpPr/>
           <p:nvPr/>
         </p:nvSpPr>
         <p:spPr>
           <a:xfrm>
-            <a:off x="6263640" y="3621024"/>
-            <a:ext cx="5212080" cy="2176272"/>
+            <a:off x="8458200" y="3346703"/>
+            <a:ext cx="3017519" cy="2361438"/>
           </a:xfrm>
           <a:prstGeom prst="roundRect">
             <a:avLst>
@@ -26451,11 +25204,11 @@
             </a:avLst>
           </a:prstGeom>
           <a:solidFill>
-            <a:srgbClr val="F5F0E8"/>
+            <a:srgbClr val="F6F9FD"/>
           </a:solidFill>
           <a:ln w="9525">
             <a:solidFill>
-              <a:srgbClr val="E6DFD8"/>
+              <a:srgbClr val="D6E3F1"/>
             </a:solidFill>
           </a:ln>
           <a:effectLst/>
@@ -26484,14 +25237,14 @@
       </p:sp>
       <p:sp>
         <p:nvSpPr>
-          <p:cNvPr id="54" name="TextBox 53"/>
+          <p:cNvPr id="56" name="TextBox 55"/>
           <p:cNvSpPr txBox="1"/>
           <p:nvPr/>
         </p:nvSpPr>
         <p:spPr>
           <a:xfrm>
-            <a:off x="6409944" y="3712463"/>
-            <a:ext cx="4919472" cy="219456"/>
+            <a:off x="8586216" y="3428999"/>
+            <a:ext cx="2761487" cy="365760"/>
           </a:xfrm>
           <a:prstGeom prst="rect">
             <a:avLst/>
@@ -26510,9 +25263,9 @@
               </a:spcAft>
             </a:pPr>
             <a:r>
-              <a:rPr sz="1000" b="1">
-                <a:solidFill>
-                  <a:srgbClr val="141413"/>
+              <a:rPr sz="900" b="1">
+                <a:solidFill>
+                  <a:srgbClr val="0F1F3A"/>
                 </a:solidFill>
                 <a:latin typeface="Pretendard"/>
                 <a:ea typeface="Pretendard"/>
@@ -26524,14 +25277,14 @@
       </p:sp>
       <p:sp>
         <p:nvSpPr>
-          <p:cNvPr id="55" name="TextBox 54"/>
+          <p:cNvPr id="57" name="TextBox 56"/>
           <p:cNvSpPr txBox="1"/>
           <p:nvPr/>
         </p:nvSpPr>
         <p:spPr>
           <a:xfrm>
-            <a:off x="6409944" y="3986784"/>
-            <a:ext cx="4919472" cy="310896"/>
+            <a:off x="8586216" y="3730752"/>
+            <a:ext cx="2761487" cy="310896"/>
           </a:xfrm>
           <a:prstGeom prst="rect">
             <a:avLst/>
@@ -26550,9 +25303,9 @@
               </a:spcAft>
             </a:pPr>
             <a:r>
-              <a:rPr sz="850" b="1">
-                <a:solidFill>
-                  <a:srgbClr val="A9583E"/>
+              <a:rPr sz="800" b="1">
+                <a:solidFill>
+                  <a:srgbClr val="07569D"/>
                 </a:solidFill>
                 <a:latin typeface="Pretendard"/>
                 <a:ea typeface="Pretendard"/>
@@ -26560,28 +25313,28 @@
               <a:t>1. </a:t>
             </a:r>
             <a:r>
-              <a:rPr sz="850" b="0">
-                <a:solidFill>
-                  <a:srgbClr val="3D3D3A"/>
+              <a:rPr sz="800" b="0">
+                <a:solidFill>
+                  <a:srgbClr val="0F1F3A"/>
                 </a:solidFill>
                 <a:latin typeface="Pretendard"/>
                 <a:ea typeface="Pretendard"/>
               </a:rPr>
-              <a:t>전주 카페 사장님 케이스에 매출 둔화 + 금리 부담 신호 감지 (Pain Radar)</a:t>
+              <a:t>전주 카페 케이스에 매출 둔화 + 금리 부담 신호 감지</a:t>
             </a:r>
           </a:p>
         </p:txBody>
       </p:sp>
       <p:sp>
         <p:nvSpPr>
-          <p:cNvPr id="56" name="TextBox 55"/>
+          <p:cNvPr id="58" name="TextBox 57"/>
           <p:cNvSpPr txBox="1"/>
           <p:nvPr/>
         </p:nvSpPr>
         <p:spPr>
           <a:xfrm>
-            <a:off x="6409944" y="4407408"/>
-            <a:ext cx="4919472" cy="310896"/>
+            <a:off x="8586216" y="4160520"/>
+            <a:ext cx="2761487" cy="310896"/>
           </a:xfrm>
           <a:prstGeom prst="rect">
             <a:avLst/>
@@ -26600,9 +25353,9 @@
               </a:spcAft>
             </a:pPr>
             <a:r>
-              <a:rPr sz="850" b="1">
-                <a:solidFill>
-                  <a:srgbClr val="A9583E"/>
+              <a:rPr sz="800" b="1">
+                <a:solidFill>
+                  <a:srgbClr val="07569D"/>
                 </a:solidFill>
                 <a:latin typeface="Pretendard"/>
                 <a:ea typeface="Pretendard"/>
@@ -26610,28 +25363,28 @@
               <a:t>2. </a:t>
             </a:r>
             <a:r>
-              <a:rPr sz="850" b="0">
-                <a:solidFill>
-                  <a:srgbClr val="3D3D3A"/>
+              <a:rPr sz="800" b="0">
+                <a:solidFill>
+                  <a:srgbClr val="0F1F3A"/>
                 </a:solidFill>
                 <a:latin typeface="Pretendard"/>
                 <a:ea typeface="Pretendard"/>
               </a:rPr>
-              <a:t>Cashflow Triage가 상환 스트레스 판단 → Policy Match가 정책금융·서류 체크리스트 생성</a:t>
+              <a:t>상환 위험 분류 → 정책금융·서류 체크리스트 생성</a:t>
             </a:r>
           </a:p>
         </p:txBody>
       </p:sp>
       <p:sp>
         <p:nvSpPr>
-          <p:cNvPr id="57" name="TextBox 56"/>
+          <p:cNvPr id="59" name="TextBox 58"/>
           <p:cNvSpPr txBox="1"/>
           <p:nvPr/>
         </p:nvSpPr>
         <p:spPr>
           <a:xfrm>
-            <a:off x="6409944" y="4828032"/>
-            <a:ext cx="4919472" cy="310896"/>
+            <a:off x="8586216" y="4590288"/>
+            <a:ext cx="2761487" cy="310896"/>
           </a:xfrm>
           <a:prstGeom prst="rect">
             <a:avLst/>
@@ -26650,9 +25403,9 @@
               </a:spcAft>
             </a:pPr>
             <a:r>
-              <a:rPr sz="850" b="1">
-                <a:solidFill>
-                  <a:srgbClr val="A9583E"/>
+              <a:rPr sz="800" b="1">
+                <a:solidFill>
+                  <a:srgbClr val="07569D"/>
                 </a:solidFill>
                 <a:latin typeface="Pretendard"/>
                 <a:ea typeface="Pretendard"/>
@@ -26660,28 +25413,28 @@
               <a:t>3. </a:t>
             </a:r>
             <a:r>
-              <a:rPr sz="850" b="0">
-                <a:solidFill>
-                  <a:srgbClr val="3D3D3A"/>
+              <a:rPr sz="800" b="0">
+                <a:solidFill>
+                  <a:srgbClr val="0F1F3A"/>
                 </a:solidFill>
                 <a:latin typeface="Pretendard"/>
                 <a:ea typeface="Pretendard"/>
               </a:rPr>
-              <a:t>RM Copilot이 콜백 초안 작성 → Compliance 검토 → RM 승인 후 고객 안내</a:t>
+              <a:t>콜백 초안 작성 → 준법 검토 → RM 승인 후 안내</a:t>
             </a:r>
           </a:p>
         </p:txBody>
       </p:sp>
       <p:sp>
         <p:nvSpPr>
-          <p:cNvPr id="58" name="TextBox 57"/>
+          <p:cNvPr id="60" name="TextBox 59"/>
           <p:cNvSpPr txBox="1"/>
           <p:nvPr/>
         </p:nvSpPr>
         <p:spPr>
           <a:xfrm>
-            <a:off x="6409944" y="5248656"/>
-            <a:ext cx="4919472" cy="310896"/>
+            <a:off x="8586216" y="5020055"/>
+            <a:ext cx="2761487" cy="310896"/>
           </a:xfrm>
           <a:prstGeom prst="rect">
             <a:avLst/>
@@ -26700,9 +25453,9 @@
               </a:spcAft>
             </a:pPr>
             <a:r>
-              <a:rPr sz="850" b="1">
-                <a:solidFill>
-                  <a:srgbClr val="A9583E"/>
+              <a:rPr sz="800" b="1">
+                <a:solidFill>
+                  <a:srgbClr val="07569D"/>
                 </a:solidFill>
                 <a:latin typeface="Pretendard"/>
                 <a:ea typeface="Pretendard"/>
@@ -26710,14 +25463,14 @@
               <a:t>4. </a:t>
             </a:r>
             <a:r>
-              <a:rPr sz="850" b="0">
-                <a:solidFill>
-                  <a:srgbClr val="3D3D3A"/>
+              <a:rPr sz="800" b="0">
+                <a:solidFill>
+                  <a:srgbClr val="0F1F3A"/>
                 </a:solidFill>
                 <a:latin typeface="Pretendard"/>
                 <a:ea typeface="Pretendard"/>
               </a:rPr>
-              <a:t>전 과정이 Audit Ledger에 기록 — 사후관리 누락과 책임소재 문제 해소</a:t>
+              <a:t>전 과정 감사 기록 — 누락·책임소재 문제 해소</a:t>
             </a:r>
           </a:p>
         </p:txBody>
@@ -27461,7 +26214,7 @@
         <p:spPr>
           <a:xfrm>
             <a:off x="868680" y="1682496"/>
-            <a:ext cx="2514600" cy="1170432"/>
+            <a:ext cx="2514600" cy="1024128"/>
           </a:xfrm>
           <a:prstGeom prst="roundRect">
             <a:avLst>
@@ -27469,11 +26222,11 @@
             </a:avLst>
           </a:prstGeom>
           <a:solidFill>
-            <a:srgbClr val="F5F0E8"/>
+            <a:srgbClr val="F6F9FD"/>
           </a:solidFill>
           <a:ln w="9525">
             <a:solidFill>
-              <a:srgbClr val="E6DFD8"/>
+              <a:srgbClr val="D6E3F1"/>
             </a:solidFill>
           </a:ln>
           <a:effectLst/>
@@ -27508,8 +26261,8 @@
         </p:nvSpPr>
         <p:spPr>
           <a:xfrm>
-            <a:off x="996695" y="1773936"/>
-            <a:ext cx="2258568" cy="329184"/>
+            <a:off x="987552" y="1764792"/>
+            <a:ext cx="2276856" cy="292608"/>
           </a:xfrm>
           <a:prstGeom prst="rect">
             <a:avLst/>
@@ -27528,9 +26281,9 @@
               </a:spcAft>
             </a:pPr>
             <a:r>
-              <a:rPr sz="2000" b="1">
-                <a:solidFill>
-                  <a:srgbClr val="A9583E"/>
+              <a:rPr sz="1700" b="1">
+                <a:solidFill>
+                  <a:srgbClr val="07569D"/>
                 </a:solidFill>
                 <a:latin typeface="Pretendard"/>
                 <a:ea typeface="Pretendard"/>
@@ -27548,8 +26301,8 @@
         </p:nvSpPr>
         <p:spPr>
           <a:xfrm>
-            <a:off x="996695" y="2139696"/>
-            <a:ext cx="2258568" cy="219456"/>
+            <a:off x="987552" y="2084832"/>
+            <a:ext cx="2276856" cy="201168"/>
           </a:xfrm>
           <a:prstGeom prst="rect">
             <a:avLst/>
@@ -27568,9 +26321,9 @@
               </a:spcAft>
             </a:pPr>
             <a:r>
-              <a:rPr sz="900" b="1">
-                <a:solidFill>
-                  <a:srgbClr val="141413"/>
+              <a:rPr sz="850" b="1">
+                <a:solidFill>
+                  <a:srgbClr val="0F1F3A"/>
                 </a:solidFill>
                 <a:latin typeface="Pretendard"/>
                 <a:ea typeface="Pretendard"/>
@@ -27588,8 +26341,8 @@
         </p:nvSpPr>
         <p:spPr>
           <a:xfrm>
-            <a:off x="996695" y="2395728"/>
-            <a:ext cx="2258568" cy="402336"/>
+            <a:off x="987552" y="2304288"/>
+            <a:ext cx="2276856" cy="365760"/>
           </a:xfrm>
           <a:prstGeom prst="rect">
             <a:avLst/>
@@ -27608,14 +26361,14 @@
               </a:spcAft>
             </a:pPr>
             <a:r>
-              <a:rPr sz="800" b="0">
-                <a:solidFill>
-                  <a:srgbClr val="6C6A64"/>
+              <a:rPr sz="750" b="0">
+                <a:solidFill>
+                  <a:srgbClr val="637797"/>
                 </a:solidFill>
                 <a:latin typeface="Pretendard"/>
                 <a:ea typeface="Pretendard"/>
               </a:rPr>
-              <a:t>RM이 케이스 화면 하나로 원인·근거·다음 행동 파악</a:t>
+              <a:t>케이스 화면 하나로 원인·근거·다음 행동 파악</a:t>
             </a:r>
           </a:p>
         </p:txBody>
@@ -27629,7 +26382,7 @@
         <p:spPr>
           <a:xfrm>
             <a:off x="3566160" y="1682496"/>
-            <a:ext cx="2514600" cy="1170432"/>
+            <a:ext cx="2514600" cy="1024128"/>
           </a:xfrm>
           <a:prstGeom prst="roundRect">
             <a:avLst>
@@ -27637,11 +26390,11 @@
             </a:avLst>
           </a:prstGeom>
           <a:solidFill>
-            <a:srgbClr val="F5F0E8"/>
+            <a:srgbClr val="F6F9FD"/>
           </a:solidFill>
           <a:ln w="9525">
             <a:solidFill>
-              <a:srgbClr val="E6DFD8"/>
+              <a:srgbClr val="D6E3F1"/>
             </a:solidFill>
           </a:ln>
           <a:effectLst/>
@@ -27676,8 +26429,8 @@
         </p:nvSpPr>
         <p:spPr>
           <a:xfrm>
-            <a:off x="3694176" y="1773936"/>
-            <a:ext cx="2258568" cy="329184"/>
+            <a:off x="3685032" y="1764792"/>
+            <a:ext cx="2276856" cy="292608"/>
           </a:xfrm>
           <a:prstGeom prst="rect">
             <a:avLst/>
@@ -27696,9 +26449,9 @@
               </a:spcAft>
             </a:pPr>
             <a:r>
-              <a:rPr sz="2000" b="1">
-                <a:solidFill>
-                  <a:srgbClr val="A9583E"/>
+              <a:rPr sz="1700" b="1">
+                <a:solidFill>
+                  <a:srgbClr val="07569D"/>
                 </a:solidFill>
                 <a:latin typeface="Pretendard"/>
                 <a:ea typeface="Pretendard"/>
@@ -27716,8 +26469,8 @@
         </p:nvSpPr>
         <p:spPr>
           <a:xfrm>
-            <a:off x="3694176" y="2139696"/>
-            <a:ext cx="2258568" cy="219456"/>
+            <a:off x="3685032" y="2084832"/>
+            <a:ext cx="2276856" cy="201168"/>
           </a:xfrm>
           <a:prstGeom prst="rect">
             <a:avLst/>
@@ -27736,9 +26489,9 @@
               </a:spcAft>
             </a:pPr>
             <a:r>
-              <a:rPr sz="900" b="1">
-                <a:solidFill>
-                  <a:srgbClr val="141413"/>
+              <a:rPr sz="850" b="1">
+                <a:solidFill>
+                  <a:srgbClr val="0F1F3A"/>
                 </a:solidFill>
                 <a:latin typeface="Pretendard"/>
                 <a:ea typeface="Pretendard"/>
@@ -27756,8 +26509,8 @@
         </p:nvSpPr>
         <p:spPr>
           <a:xfrm>
-            <a:off x="3694176" y="2395728"/>
-            <a:ext cx="2258568" cy="402336"/>
+            <a:off x="3685032" y="2304288"/>
+            <a:ext cx="2276856" cy="365760"/>
           </a:xfrm>
           <a:prstGeom prst="rect">
             <a:avLst/>
@@ -27776,14 +26529,14 @@
               </a:spcAft>
             </a:pPr>
             <a:r>
-              <a:rPr sz="800" b="0">
-                <a:solidFill>
-                  <a:srgbClr val="6C6A64"/>
+              <a:rPr sz="750" b="0">
+                <a:solidFill>
+                  <a:srgbClr val="637797"/>
                 </a:solidFill>
                 <a:latin typeface="Pretendard"/>
                 <a:ea typeface="Pretendard"/>
               </a:rPr>
-              <a:t>모든 Agent 판단에 출처 링크 또는 내부 이벤트 연결</a:t>
+              <a:t>모든 판단에 출처 링크 또는 내부 이벤트 연결</a:t>
             </a:r>
           </a:p>
         </p:txBody>
@@ -27797,7 +26550,7 @@
         <p:spPr>
           <a:xfrm>
             <a:off x="6263640" y="1682496"/>
-            <a:ext cx="2514600" cy="1170432"/>
+            <a:ext cx="2514600" cy="1024128"/>
           </a:xfrm>
           <a:prstGeom prst="roundRect">
             <a:avLst>
@@ -27805,11 +26558,11 @@
             </a:avLst>
           </a:prstGeom>
           <a:solidFill>
-            <a:srgbClr val="F5F0E8"/>
+            <a:srgbClr val="F6F9FD"/>
           </a:solidFill>
           <a:ln w="9525">
             <a:solidFill>
-              <a:srgbClr val="E6DFD8"/>
+              <a:srgbClr val="D6E3F1"/>
             </a:solidFill>
           </a:ln>
           <a:effectLst/>
@@ -27844,8 +26597,8 @@
         </p:nvSpPr>
         <p:spPr>
           <a:xfrm>
-            <a:off x="6391656" y="1773936"/>
-            <a:ext cx="2258568" cy="329184"/>
+            <a:off x="6382512" y="1764792"/>
+            <a:ext cx="2276856" cy="292608"/>
           </a:xfrm>
           <a:prstGeom prst="rect">
             <a:avLst/>
@@ -27864,9 +26617,9 @@
               </a:spcAft>
             </a:pPr>
             <a:r>
-              <a:rPr sz="2000" b="1">
-                <a:solidFill>
-                  <a:srgbClr val="A9583E"/>
+              <a:rPr sz="1700" b="1">
+                <a:solidFill>
+                  <a:srgbClr val="07569D"/>
                 </a:solidFill>
                 <a:latin typeface="Pretendard"/>
                 <a:ea typeface="Pretendard"/>
@@ -27884,8 +26637,8 @@
         </p:nvSpPr>
         <p:spPr>
           <a:xfrm>
-            <a:off x="6391656" y="2139696"/>
-            <a:ext cx="2258568" cy="219456"/>
+            <a:off x="6382512" y="2084832"/>
+            <a:ext cx="2276856" cy="201168"/>
           </a:xfrm>
           <a:prstGeom prst="rect">
             <a:avLst/>
@@ -27904,9 +26657,9 @@
               </a:spcAft>
             </a:pPr>
             <a:r>
-              <a:rPr sz="900" b="1">
-                <a:solidFill>
-                  <a:srgbClr val="141413"/>
+              <a:rPr sz="850" b="1">
+                <a:solidFill>
+                  <a:srgbClr val="0F1F3A"/>
                 </a:solidFill>
                 <a:latin typeface="Pretendard"/>
                 <a:ea typeface="Pretendard"/>
@@ -27924,8 +26677,8 @@
         </p:nvSpPr>
         <p:spPr>
           <a:xfrm>
-            <a:off x="6391656" y="2395728"/>
-            <a:ext cx="2258568" cy="402336"/>
+            <a:off x="6382512" y="2304288"/>
+            <a:ext cx="2276856" cy="365760"/>
           </a:xfrm>
           <a:prstGeom prst="rect">
             <a:avLst/>
@@ -27944,14 +26697,14 @@
               </a:spcAft>
             </a:pPr>
             <a:r>
-              <a:rPr sz="800" b="0">
-                <a:solidFill>
-                  <a:srgbClr val="6C6A64"/>
+              <a:rPr sz="750" b="0">
+                <a:solidFill>
+                  <a:srgbClr val="637797"/>
                 </a:solidFill>
                 <a:latin typeface="Pretendard"/>
                 <a:ea typeface="Pretendard"/>
               </a:rPr>
-              <a:t>승인 게이트 없이는 외부 안내 불가 — 내부통제 내장</a:t>
+              <a:t>승인 게이트 없이는 외부 안내 불가</a:t>
             </a:r>
           </a:p>
         </p:txBody>
@@ -27965,7 +26718,7 @@
         <p:spPr>
           <a:xfrm>
             <a:off x="8961120" y="1682496"/>
-            <a:ext cx="2514600" cy="1170432"/>
+            <a:ext cx="2514600" cy="1024128"/>
           </a:xfrm>
           <a:prstGeom prst="roundRect">
             <a:avLst>
@@ -27973,11 +26726,11 @@
             </a:avLst>
           </a:prstGeom>
           <a:solidFill>
-            <a:srgbClr val="F5F0E8"/>
+            <a:srgbClr val="F6F9FD"/>
           </a:solidFill>
           <a:ln w="9525">
             <a:solidFill>
-              <a:srgbClr val="E6DFD8"/>
+              <a:srgbClr val="D6E3F1"/>
             </a:solidFill>
           </a:ln>
           <a:effectLst/>
@@ -28012,8 +26765,8 @@
         </p:nvSpPr>
         <p:spPr>
           <a:xfrm>
-            <a:off x="9089136" y="1773936"/>
-            <a:ext cx="2258568" cy="329184"/>
+            <a:off x="9079992" y="1764792"/>
+            <a:ext cx="2276856" cy="292608"/>
           </a:xfrm>
           <a:prstGeom prst="rect">
             <a:avLst/>
@@ -28032,9 +26785,9 @@
               </a:spcAft>
             </a:pPr>
             <a:r>
-              <a:rPr sz="2000" b="1">
-                <a:solidFill>
-                  <a:srgbClr val="A9583E"/>
+              <a:rPr sz="1700" b="1">
+                <a:solidFill>
+                  <a:srgbClr val="07569D"/>
                 </a:solidFill>
                 <a:latin typeface="Pretendard"/>
                 <a:ea typeface="Pretendard"/>
@@ -28052,8 +26805,8 @@
         </p:nvSpPr>
         <p:spPr>
           <a:xfrm>
-            <a:off x="9089136" y="2139696"/>
-            <a:ext cx="2258568" cy="219456"/>
+            <a:off x="9079992" y="2084832"/>
+            <a:ext cx="2276856" cy="201168"/>
           </a:xfrm>
           <a:prstGeom prst="rect">
             <a:avLst/>
@@ -28072,9 +26825,9 @@
               </a:spcAft>
             </a:pPr>
             <a:r>
-              <a:rPr sz="900" b="1">
-                <a:solidFill>
-                  <a:srgbClr val="141413"/>
+              <a:rPr sz="850" b="1">
+                <a:solidFill>
+                  <a:srgbClr val="0F1F3A"/>
                 </a:solidFill>
                 <a:latin typeface="Pretendard"/>
                 <a:ea typeface="Pretendard"/>
@@ -28092,8 +26845,8 @@
         </p:nvSpPr>
         <p:spPr>
           <a:xfrm>
-            <a:off x="9089136" y="2395728"/>
-            <a:ext cx="2258568" cy="402336"/>
+            <a:off x="9079992" y="2304288"/>
+            <a:ext cx="2276856" cy="365760"/>
           </a:xfrm>
           <a:prstGeom prst="rect">
             <a:avLst/>
@@ -28112,14 +26865,14 @@
               </a:spcAft>
             </a:pPr>
             <a:r>
-              <a:rPr sz="800" b="0">
-                <a:solidFill>
-                  <a:srgbClr val="6C6A64"/>
+              <a:rPr sz="750" b="0">
+                <a:solidFill>
+                  <a:srgbClr val="637797"/>
                 </a:solidFill>
                 <a:latin typeface="Pretendard"/>
                 <a:ea typeface="Pretendard"/>
               </a:rPr>
-              <a:t>Fraud Shield가 자동 차단, 보안 escalation만 허용</a:t>
+              <a:t>사기 차단 에이전트가 자동 차단 · 보안 보고만</a:t>
             </a:r>
           </a:p>
         </p:txBody>
@@ -28132,8 +26885,8 @@
         </p:nvSpPr>
         <p:spPr>
           <a:xfrm>
-            <a:off x="868680" y="2889504"/>
-            <a:ext cx="10607040" cy="182880"/>
+            <a:off x="868680" y="2743200"/>
+            <a:ext cx="10607040" cy="164592"/>
           </a:xfrm>
           <a:prstGeom prst="rect">
             <a:avLst/>
@@ -28152,9 +26905,9 @@
               </a:spcAft>
             </a:pPr>
             <a:r>
-              <a:rPr sz="800" b="0">
-                <a:solidFill>
-                  <a:srgbClr val="8E8B82"/>
+              <a:rPr sz="750" b="0">
+                <a:solidFill>
+                  <a:srgbClr val="637797"/>
                 </a:solidFill>
                 <a:latin typeface="Pretendard"/>
                 <a:ea typeface="Pretendard"/>
@@ -28172,8 +26925,8 @@
         </p:nvSpPr>
         <p:spPr>
           <a:xfrm>
-            <a:off x="868680" y="3200400"/>
-            <a:ext cx="6035040" cy="219456"/>
+            <a:off x="868680" y="3035808"/>
+            <a:ext cx="6035040" cy="201168"/>
           </a:xfrm>
           <a:prstGeom prst="rect">
             <a:avLst/>
@@ -28192,9 +26945,9 @@
               </a:spcAft>
             </a:pPr>
             <a:r>
-              <a:rPr sz="1150" b="1">
-                <a:solidFill>
-                  <a:srgbClr val="141413"/>
+              <a:rPr sz="1100" b="1">
+                <a:solidFill>
+                  <a:srgbClr val="0F1F3A"/>
                 </a:solidFill>
                 <a:latin typeface="Pretendard"/>
                 <a:ea typeface="Pretendard"/>
@@ -28212,8 +26965,8 @@
         </p:nvSpPr>
         <p:spPr>
           <a:xfrm>
-            <a:off x="868680" y="3474720"/>
-            <a:ext cx="1405889" cy="1024128"/>
+            <a:off x="868680" y="3273552"/>
+            <a:ext cx="1405889" cy="950976"/>
           </a:xfrm>
           <a:prstGeom prst="roundRect">
             <a:avLst>
@@ -28225,7 +26978,7 @@
           </a:solidFill>
           <a:ln w="9525">
             <a:solidFill>
-              <a:srgbClr val="E6DFD8"/>
+              <a:srgbClr val="D6E3F1"/>
             </a:solidFill>
           </a:ln>
           <a:effectLst/>
@@ -28260,8 +27013,8 @@
         </p:nvSpPr>
         <p:spPr>
           <a:xfrm>
-            <a:off x="868680" y="3474720"/>
-            <a:ext cx="1405889" cy="274320"/>
+            <a:off x="868680" y="3273552"/>
+            <a:ext cx="1405889" cy="256032"/>
           </a:xfrm>
           <a:prstGeom prst="roundRect">
             <a:avLst>
@@ -28269,7 +27022,7 @@
             </a:avLst>
           </a:prstGeom>
           <a:solidFill>
-            <a:srgbClr val="5DB8A6"/>
+            <a:srgbClr val="0F8F72"/>
           </a:solidFill>
           <a:ln>
             <a:noFill/>
@@ -28306,8 +27059,8 @@
         </p:nvSpPr>
         <p:spPr>
           <a:xfrm>
-            <a:off x="941832" y="3515868"/>
-            <a:ext cx="1259586" cy="201168"/>
+            <a:off x="932688" y="3314700"/>
+            <a:ext cx="1277874" cy="182880"/>
           </a:xfrm>
           <a:prstGeom prst="rect">
             <a:avLst/>
@@ -28326,7 +27079,7 @@
               </a:spcAft>
             </a:pPr>
             <a:r>
-              <a:rPr sz="850" b="1">
+              <a:rPr sz="800" b="1">
                 <a:solidFill>
                   <a:srgbClr val="FFFFFF"/>
                 </a:solidFill>
@@ -28346,8 +27099,8 @@
         </p:nvSpPr>
         <p:spPr>
           <a:xfrm>
-            <a:off x="960120" y="3840480"/>
-            <a:ext cx="1223010" cy="603504"/>
+            <a:off x="950976" y="3602736"/>
+            <a:ext cx="1241298" cy="548640"/>
           </a:xfrm>
           <a:prstGeom prst="rect">
             <a:avLst/>
@@ -28366,9 +27119,9 @@
               </a:spcAft>
             </a:pPr>
             <a:r>
-              <a:rPr sz="800" b="0">
-                <a:solidFill>
-                  <a:srgbClr val="3D3D3A"/>
+              <a:rPr sz="750" b="0">
+                <a:solidFill>
+                  <a:srgbClr val="0F1F3A"/>
                 </a:solidFill>
                 <a:latin typeface="Pretendard"/>
                 <a:ea typeface="Pretendard"/>
@@ -28383,14 +27136,14 @@
               </a:spcAft>
             </a:pPr>
             <a:r>
-              <a:rPr sz="800" b="0">
-                <a:solidFill>
-                  <a:srgbClr val="3D3D3A"/>
+              <a:rPr sz="750" b="0">
+                <a:solidFill>
+                  <a:srgbClr val="0F1F3A"/>
                 </a:solidFill>
                 <a:latin typeface="Pretendard"/>
                 <a:ea typeface="Pretendard"/>
               </a:rPr>
-              <a:t>7개 시나리오 검증 · GitHub 공개</a:t>
+              <a:t>시나리오 검증 · GitHub 공개</a:t>
             </a:r>
           </a:p>
         </p:txBody>
@@ -28403,15 +27156,15 @@
         </p:nvCxnSpPr>
         <p:spPr>
           <a:xfrm>
-            <a:off x="2279141" y="3986784"/>
+            <a:off x="2279141" y="3749040"/>
             <a:ext cx="128017" cy="0"/>
           </a:xfrm>
           <a:prstGeom prst="line">
             <a:avLst/>
           </a:prstGeom>
-          <a:ln w="15240">
+          <a:ln w="13970">
             <a:solidFill>
-              <a:srgbClr val="6C6A64"/>
+              <a:srgbClr val="637797"/>
             </a:solidFill>
             <a:tailEnd type="triangle" w="med" len="med"/>
           </a:ln>
@@ -28440,8 +27193,8 @@
         </p:nvSpPr>
         <p:spPr>
           <a:xfrm>
-            <a:off x="2411729" y="3474720"/>
-            <a:ext cx="1405889" cy="1024128"/>
+            <a:off x="2411729" y="3273552"/>
+            <a:ext cx="1405889" cy="950976"/>
           </a:xfrm>
           <a:prstGeom prst="roundRect">
             <a:avLst>
@@ -28453,7 +27206,7 @@
           </a:solidFill>
           <a:ln w="9525">
             <a:solidFill>
-              <a:srgbClr val="E6DFD8"/>
+              <a:srgbClr val="D6E3F1"/>
             </a:solidFill>
           </a:ln>
           <a:effectLst/>
@@ -28488,8 +27241,8 @@
         </p:nvSpPr>
         <p:spPr>
           <a:xfrm>
-            <a:off x="2411729" y="3474720"/>
-            <a:ext cx="1405889" cy="274320"/>
+            <a:off x="2411729" y="3273552"/>
+            <a:ext cx="1405889" cy="256032"/>
           </a:xfrm>
           <a:prstGeom prst="roundRect">
             <a:avLst>
@@ -28497,7 +27250,7 @@
             </a:avLst>
           </a:prstGeom>
           <a:solidFill>
-            <a:srgbClr val="CC785C"/>
+            <a:srgbClr val="0B6FB3"/>
           </a:solidFill>
           <a:ln>
             <a:noFill/>
@@ -28534,8 +27287,8 @@
         </p:nvSpPr>
         <p:spPr>
           <a:xfrm>
-            <a:off x="2484882" y="3515868"/>
-            <a:ext cx="1259586" cy="201168"/>
+            <a:off x="2475737" y="3314700"/>
+            <a:ext cx="1277874" cy="182880"/>
           </a:xfrm>
           <a:prstGeom prst="rect">
             <a:avLst/>
@@ -28554,7 +27307,7 @@
               </a:spcAft>
             </a:pPr>
             <a:r>
-              <a:rPr sz="850" b="1">
+              <a:rPr sz="800" b="1">
                 <a:solidFill>
                   <a:srgbClr val="FFFFFF"/>
                 </a:solidFill>
@@ -28574,8 +27327,8 @@
         </p:nvSpPr>
         <p:spPr>
           <a:xfrm>
-            <a:off x="2503170" y="3840480"/>
-            <a:ext cx="1223010" cy="603504"/>
+            <a:off x="2494025" y="3602736"/>
+            <a:ext cx="1241298" cy="548640"/>
           </a:xfrm>
           <a:prstGeom prst="rect">
             <a:avLst/>
@@ -28594,9 +27347,9 @@
               </a:spcAft>
             </a:pPr>
             <a:r>
-              <a:rPr sz="800" b="0">
-                <a:solidFill>
-                  <a:srgbClr val="3D3D3A"/>
+              <a:rPr sz="750" b="0">
+                <a:solidFill>
+                  <a:srgbClr val="0F1F3A"/>
                 </a:solidFill>
                 <a:latin typeface="Pretendard"/>
                 <a:ea typeface="Pretendard"/>
@@ -28611,9 +27364,9 @@
               </a:spcAft>
             </a:pPr>
             <a:r>
-              <a:rPr sz="800" b="0">
-                <a:solidFill>
-                  <a:srgbClr val="3D3D3A"/>
+              <a:rPr sz="750" b="0">
+                <a:solidFill>
+                  <a:srgbClr val="0F1F3A"/>
                 </a:solidFill>
                 <a:latin typeface="Pretendard"/>
                 <a:ea typeface="Pretendard"/>
@@ -28631,15 +27384,15 @@
         </p:nvCxnSpPr>
         <p:spPr>
           <a:xfrm>
-            <a:off x="3822191" y="3986784"/>
+            <a:off x="3822191" y="3749040"/>
             <a:ext cx="128016" cy="0"/>
           </a:xfrm>
           <a:prstGeom prst="line">
             <a:avLst/>
           </a:prstGeom>
-          <a:ln w="15240">
+          <a:ln w="13970">
             <a:solidFill>
-              <a:srgbClr val="6C6A64"/>
+              <a:srgbClr val="637797"/>
             </a:solidFill>
             <a:tailEnd type="triangle" w="med" len="med"/>
           </a:ln>
@@ -28668,8 +27421,8 @@
         </p:nvSpPr>
         <p:spPr>
           <a:xfrm>
-            <a:off x="3954779" y="3474720"/>
-            <a:ext cx="1405889" cy="1024128"/>
+            <a:off x="3954779" y="3273552"/>
+            <a:ext cx="1405889" cy="950976"/>
           </a:xfrm>
           <a:prstGeom prst="roundRect">
             <a:avLst>
@@ -28681,7 +27434,7 @@
           </a:solidFill>
           <a:ln w="9525">
             <a:solidFill>
-              <a:srgbClr val="E6DFD8"/>
+              <a:srgbClr val="D6E3F1"/>
             </a:solidFill>
           </a:ln>
           <a:effectLst/>
@@ -28716,8 +27469,8 @@
         </p:nvSpPr>
         <p:spPr>
           <a:xfrm>
-            <a:off x="3954779" y="3474720"/>
-            <a:ext cx="1405889" cy="274320"/>
+            <a:off x="3954779" y="3273552"/>
+            <a:ext cx="1405889" cy="256032"/>
           </a:xfrm>
           <a:prstGeom prst="roundRect">
             <a:avLst>
@@ -28725,7 +27478,7 @@
             </a:avLst>
           </a:prstGeom>
           <a:solidFill>
-            <a:srgbClr val="A9583E"/>
+            <a:srgbClr val="123D82"/>
           </a:solidFill>
           <a:ln>
             <a:noFill/>
@@ -28762,8 +27515,8 @@
         </p:nvSpPr>
         <p:spPr>
           <a:xfrm>
-            <a:off x="4027931" y="3515868"/>
-            <a:ext cx="1259586" cy="201168"/>
+            <a:off x="4018787" y="3314700"/>
+            <a:ext cx="1277874" cy="182880"/>
           </a:xfrm>
           <a:prstGeom prst="rect">
             <a:avLst/>
@@ -28782,7 +27535,7 @@
               </a:spcAft>
             </a:pPr>
             <a:r>
-              <a:rPr sz="850" b="1">
+              <a:rPr sz="800" b="1">
                 <a:solidFill>
                   <a:srgbClr val="FFFFFF"/>
                 </a:solidFill>
@@ -28802,8 +27555,8 @@
         </p:nvSpPr>
         <p:spPr>
           <a:xfrm>
-            <a:off x="4046219" y="3840480"/>
-            <a:ext cx="1223010" cy="603504"/>
+            <a:off x="4037075" y="3602736"/>
+            <a:ext cx="1241298" cy="548640"/>
           </a:xfrm>
           <a:prstGeom prst="rect">
             <a:avLst/>
@@ -28822,9 +27575,9 @@
               </a:spcAft>
             </a:pPr>
             <a:r>
-              <a:rPr sz="800" b="0">
-                <a:solidFill>
-                  <a:srgbClr val="3D3D3A"/>
+              <a:rPr sz="750" b="0">
+                <a:solidFill>
+                  <a:srgbClr val="0F1F3A"/>
                 </a:solidFill>
                 <a:latin typeface="Pretendard"/>
                 <a:ea typeface="Pretendard"/>
@@ -28839,9 +27592,9 @@
               </a:spcAft>
             </a:pPr>
             <a:r>
-              <a:rPr sz="800" b="0">
-                <a:solidFill>
-                  <a:srgbClr val="3D3D3A"/>
+              <a:rPr sz="750" b="0">
+                <a:solidFill>
+                  <a:srgbClr val="0F1F3A"/>
                 </a:solidFill>
                 <a:latin typeface="Pretendard"/>
                 <a:ea typeface="Pretendard"/>
@@ -28859,15 +27612,15 @@
         </p:nvCxnSpPr>
         <p:spPr>
           <a:xfrm>
-            <a:off x="5365241" y="3986784"/>
+            <a:off x="5365241" y="3749040"/>
             <a:ext cx="128016" cy="0"/>
           </a:xfrm>
           <a:prstGeom prst="line">
             <a:avLst/>
           </a:prstGeom>
-          <a:ln w="15240">
+          <a:ln w="13970">
             <a:solidFill>
-              <a:srgbClr val="6C6A64"/>
+              <a:srgbClr val="637797"/>
             </a:solidFill>
             <a:tailEnd type="triangle" w="med" len="med"/>
           </a:ln>
@@ -28896,8 +27649,8 @@
         </p:nvSpPr>
         <p:spPr>
           <a:xfrm>
-            <a:off x="5497829" y="3474720"/>
-            <a:ext cx="1405889" cy="1024128"/>
+            <a:off x="5497829" y="3273552"/>
+            <a:ext cx="1405889" cy="950976"/>
           </a:xfrm>
           <a:prstGeom prst="roundRect">
             <a:avLst>
@@ -28909,7 +27662,7 @@
           </a:solidFill>
           <a:ln w="9525">
             <a:solidFill>
-              <a:srgbClr val="E6DFD8"/>
+              <a:srgbClr val="D6E3F1"/>
             </a:solidFill>
           </a:ln>
           <a:effectLst/>
@@ -28944,8 +27697,8 @@
         </p:nvSpPr>
         <p:spPr>
           <a:xfrm>
-            <a:off x="5497829" y="3474720"/>
-            <a:ext cx="1405889" cy="274320"/>
+            <a:off x="5497829" y="3273552"/>
+            <a:ext cx="1405889" cy="256032"/>
           </a:xfrm>
           <a:prstGeom prst="roundRect">
             <a:avLst>
@@ -28953,7 +27706,7 @@
             </a:avLst>
           </a:prstGeom>
           <a:solidFill>
-            <a:srgbClr val="181715"/>
+            <a:srgbClr val="091C4D"/>
           </a:solidFill>
           <a:ln>
             <a:noFill/>
@@ -28990,8 +27743,8 @@
         </p:nvSpPr>
         <p:spPr>
           <a:xfrm>
-            <a:off x="5570981" y="3515868"/>
-            <a:ext cx="1259586" cy="201168"/>
+            <a:off x="5561838" y="3314700"/>
+            <a:ext cx="1277874" cy="182880"/>
           </a:xfrm>
           <a:prstGeom prst="rect">
             <a:avLst/>
@@ -29010,7 +27763,7 @@
               </a:spcAft>
             </a:pPr>
             <a:r>
-              <a:rPr sz="850" b="1">
+              <a:rPr sz="800" b="1">
                 <a:solidFill>
                   <a:srgbClr val="FFFFFF"/>
                 </a:solidFill>
@@ -29030,8 +27783,8 @@
         </p:nvSpPr>
         <p:spPr>
           <a:xfrm>
-            <a:off x="5589269" y="3840480"/>
-            <a:ext cx="1223010" cy="603504"/>
+            <a:off x="5580125" y="3602736"/>
+            <a:ext cx="1241298" cy="548640"/>
           </a:xfrm>
           <a:prstGeom prst="rect">
             <a:avLst/>
@@ -29050,9 +27803,9 @@
               </a:spcAft>
             </a:pPr>
             <a:r>
-              <a:rPr sz="800" b="0">
-                <a:solidFill>
-                  <a:srgbClr val="3D3D3A"/>
+              <a:rPr sz="750" b="0">
+                <a:solidFill>
+                  <a:srgbClr val="0F1F3A"/>
                 </a:solidFill>
                 <a:latin typeface="Pretendard"/>
                 <a:ea typeface="Pretendard"/>
@@ -29067,14 +27820,14 @@
               </a:spcAft>
             </a:pPr>
             <a:r>
-              <a:rPr sz="800" b="0">
-                <a:solidFill>
-                  <a:srgbClr val="3D3D3A"/>
+              <a:rPr sz="750" b="0">
+                <a:solidFill>
+                  <a:srgbClr val="0F1F3A"/>
                 </a:solidFill>
                 <a:latin typeface="Pretendard"/>
                 <a:ea typeface="Pretendard"/>
               </a:rPr>
-              <a:t>전세 Shield 우선 출시</a:t>
+              <a:t>전세 보호 우선 출시</a:t>
             </a:r>
           </a:p>
         </p:txBody>
@@ -29087,8 +27840,8 @@
         </p:nvSpPr>
         <p:spPr>
           <a:xfrm>
-            <a:off x="7223759" y="3200400"/>
-            <a:ext cx="4251960" cy="219456"/>
+            <a:off x="7223759" y="3035808"/>
+            <a:ext cx="4251960" cy="201168"/>
           </a:xfrm>
           <a:prstGeom prst="rect">
             <a:avLst/>
@@ -29107,9 +27860,9 @@
               </a:spcAft>
             </a:pPr>
             <a:r>
-              <a:rPr sz="1150" b="1">
-                <a:solidFill>
-                  <a:srgbClr val="141413"/>
+              <a:rPr sz="1100" b="1">
+                <a:solidFill>
+                  <a:srgbClr val="0F1F3A"/>
                 </a:solidFill>
                 <a:latin typeface="Pretendard"/>
                 <a:ea typeface="Pretendard"/>
@@ -29127,8 +27880,8 @@
         </p:nvSpPr>
         <p:spPr>
           <a:xfrm>
-            <a:off x="7223759" y="3474720"/>
-            <a:ext cx="4251960" cy="274320"/>
+            <a:off x="7223759" y="3291840"/>
+            <a:ext cx="4251960" cy="256032"/>
           </a:xfrm>
           <a:prstGeom prst="rect">
             <a:avLst/>
@@ -29147,9 +27900,9 @@
               </a:spcAft>
             </a:pPr>
             <a:r>
-              <a:rPr sz="869" b="1">
-                <a:solidFill>
-                  <a:srgbClr val="141413"/>
+              <a:rPr sz="800" b="1">
+                <a:solidFill>
+                  <a:srgbClr val="0F1F3A"/>
                 </a:solidFill>
                 <a:latin typeface="Pretendard"/>
                 <a:ea typeface="Pretendard"/>
@@ -29157,9 +27910,9 @@
               <a:t>· 환각 · 오판 — </a:t>
             </a:r>
             <a:r>
-              <a:rPr sz="869" b="0">
-                <a:solidFill>
-                  <a:srgbClr val="3D3D3A"/>
+              <a:rPr sz="800" b="0">
+                <a:solidFill>
+                  <a:srgbClr val="637797"/>
                 </a:solidFill>
                 <a:latin typeface="Pretendard"/>
                 <a:ea typeface="Pretendard"/>
@@ -29177,8 +27930,8 @@
         </p:nvSpPr>
         <p:spPr>
           <a:xfrm>
-            <a:off x="7223759" y="3749039"/>
-            <a:ext cx="4251960" cy="274320"/>
+            <a:off x="7223759" y="3538728"/>
+            <a:ext cx="4251960" cy="256032"/>
           </a:xfrm>
           <a:prstGeom prst="rect">
             <a:avLst/>
@@ -29197,9 +27950,9 @@
               </a:spcAft>
             </a:pPr>
             <a:r>
-              <a:rPr sz="869" b="1">
-                <a:solidFill>
-                  <a:srgbClr val="141413"/>
+              <a:rPr sz="800" b="1">
+                <a:solidFill>
+                  <a:srgbClr val="0F1F3A"/>
                 </a:solidFill>
                 <a:latin typeface="Pretendard"/>
                 <a:ea typeface="Pretendard"/>
@@ -29207,9 +27960,9 @@
               <a:t>· 개인정보 · 보안 — </a:t>
             </a:r>
             <a:r>
-              <a:rPr sz="869" b="0">
-                <a:solidFill>
-                  <a:srgbClr val="3D3D3A"/>
+              <a:rPr sz="800" b="0">
+                <a:solidFill>
+                  <a:srgbClr val="637797"/>
                 </a:solidFill>
                 <a:latin typeface="Pretendard"/>
                 <a:ea typeface="Pretendard"/>
@@ -29227,8 +27980,8 @@
         </p:nvSpPr>
         <p:spPr>
           <a:xfrm>
-            <a:off x="7223759" y="4023359"/>
-            <a:ext cx="4251960" cy="274320"/>
+            <a:off x="7223759" y="3785616"/>
+            <a:ext cx="4251960" cy="256032"/>
           </a:xfrm>
           <a:prstGeom prst="rect">
             <a:avLst/>
@@ -29247,9 +28000,9 @@
               </a:spcAft>
             </a:pPr>
             <a:r>
-              <a:rPr sz="869" b="1">
-                <a:solidFill>
-                  <a:srgbClr val="141413"/>
+              <a:rPr sz="800" b="1">
+                <a:solidFill>
+                  <a:srgbClr val="0F1F3A"/>
                 </a:solidFill>
                 <a:latin typeface="Pretendard"/>
                 <a:ea typeface="Pretendard"/>
@@ -29257,9 +28010,9 @@
               <a:t>· 책임소재 · 설명가능성 — </a:t>
             </a:r>
             <a:r>
-              <a:rPr sz="869" b="0">
-                <a:solidFill>
-                  <a:srgbClr val="3D3D3A"/>
+              <a:rPr sz="800" b="0">
+                <a:solidFill>
+                  <a:srgbClr val="637797"/>
                 </a:solidFill>
                 <a:latin typeface="Pretendard"/>
                 <a:ea typeface="Pretendard"/>
@@ -29277,8 +28030,8 @@
         </p:nvSpPr>
         <p:spPr>
           <a:xfrm>
-            <a:off x="7223759" y="4297679"/>
-            <a:ext cx="4251960" cy="274320"/>
+            <a:off x="7223759" y="4032504"/>
+            <a:ext cx="4251960" cy="256032"/>
           </a:xfrm>
           <a:prstGeom prst="rect">
             <a:avLst/>
@@ -29297,9 +28050,9 @@
               </a:spcAft>
             </a:pPr>
             <a:r>
-              <a:rPr sz="869" b="1">
-                <a:solidFill>
-                  <a:srgbClr val="141413"/>
+              <a:rPr sz="800" b="1">
+                <a:solidFill>
+                  <a:srgbClr val="0F1F3A"/>
                 </a:solidFill>
                 <a:latin typeface="Pretendard"/>
                 <a:ea typeface="Pretendard"/>
@@ -29307,9 +28060,9 @@
               <a:t>· 저작권 · 라이선스 — </a:t>
             </a:r>
             <a:r>
-              <a:rPr sz="869" b="0">
-                <a:solidFill>
-                  <a:srgbClr val="3D3D3A"/>
+              <a:rPr sz="800" b="0">
+                <a:solidFill>
+                  <a:srgbClr val="637797"/>
                 </a:solidFill>
                 <a:latin typeface="Pretendard"/>
                 <a:ea typeface="Pretendard"/>
@@ -29327,8 +28080,8 @@
         </p:nvSpPr>
         <p:spPr>
           <a:xfrm>
-            <a:off x="868680" y="4681728"/>
-            <a:ext cx="10607040" cy="713232"/>
+            <a:off x="868680" y="4370832"/>
+            <a:ext cx="10607040" cy="658368"/>
           </a:xfrm>
           <a:prstGeom prst="roundRect">
             <a:avLst>
@@ -29336,7 +28089,7 @@
             </a:avLst>
           </a:prstGeom>
           <a:solidFill>
-            <a:srgbClr val="181715"/>
+            <a:srgbClr val="091C4D"/>
           </a:solidFill>
           <a:ln>
             <a:noFill/>
@@ -29373,8 +28126,8 @@
         </p:nvSpPr>
         <p:spPr>
           <a:xfrm>
-            <a:off x="1097280" y="4791456"/>
-            <a:ext cx="10149840" cy="237744"/>
+            <a:off x="1097280" y="4471416"/>
+            <a:ext cx="10149840" cy="219456"/>
           </a:xfrm>
           <a:prstGeom prst="rect">
             <a:avLst/>
@@ -29393,24 +28146,24 @@
               </a:spcAft>
             </a:pPr>
             <a:r>
-              <a:rPr sz="950" b="1">
-                <a:solidFill>
-                  <a:srgbClr val="CC785C"/>
+              <a:rPr sz="900" b="1">
+                <a:solidFill>
+                  <a:srgbClr val="1CA9D6"/>
                 </a:solidFill>
                 <a:latin typeface="Pretendard"/>
                 <a:ea typeface="Pretendard"/>
               </a:rPr>
-              <a:t>계열사 확장: </a:t>
+              <a:t>계열사 확장:  </a:t>
             </a:r>
             <a:r>
-              <a:rPr sz="950" b="0">
-                <a:solidFill>
-                  <a:srgbClr val="FAF9F5"/>
+              <a:rPr sz="900" b="0">
+                <a:solidFill>
+                  <a:srgbClr val="EDF4FB"/>
                 </a:solidFill>
                 <a:latin typeface="Pretendard"/>
                 <a:ea typeface="Pretendard"/>
               </a:rPr>
-              <a:t>전북은행(지역 SME · 전세 Shield)  →  광주은행(가계 · 청년)  →  JB우리캐피탈(할부 · 리스 사후관리)</a:t>
+              <a:t>전북은행(지역 SME · 전세 보호)  →  광주은행(가계 · 청년)  →  JB우리캐피탈(할부 · 리스 사후관리)</a:t>
             </a:r>
           </a:p>
         </p:txBody>
@@ -29423,8 +28176,8 @@
         </p:nvSpPr>
         <p:spPr>
           <a:xfrm>
-            <a:off x="1097280" y="5065776"/>
-            <a:ext cx="10149840" cy="219456"/>
+            <a:off x="1097280" y="4736592"/>
+            <a:ext cx="10149840" cy="201168"/>
           </a:xfrm>
           <a:prstGeom prst="rect">
             <a:avLst/>
@@ -29443,9 +28196,9 @@
               </a:spcAft>
             </a:pPr>
             <a:r>
-              <a:rPr sz="850" b="0">
-                <a:solidFill>
-                  <a:srgbClr val="A09D96"/>
+              <a:rPr sz="800" b="0">
+                <a:solidFill>
+                  <a:srgbClr val="9DB1CE"/>
                 </a:solidFill>
                 <a:latin typeface="Pretendard"/>
                 <a:ea typeface="Pretendard"/>

--- a/proposal/[LocalGuard] JB금융그룹 Fin AI Challenge MVP제안서.pptx
+++ b/proposal/[LocalGuard] JB금융그룹 Fin AI Challenge MVP제안서.pptx
@@ -26820,7 +26820,7 @@
                 <a:latin typeface="Pretendard"/>
                 <a:ea typeface="Pretendard"/>
               </a:rPr>
-              <a:t>사후관리 누락 (후속 태스크 자동 등록)</a:t>
+              <a:t>사후관리 누락 0건</a:t>
             </a:r>
           </a:p>
         </p:txBody>
@@ -26860,7 +26860,7 @@
                 <a:latin typeface="Pretendard"/>
                 <a:ea typeface="Pretendard"/>
               </a:rPr>
-              <a:t>고위험 사기 케이스 외부 발송도 이상거래 탐지·차단 에이전트가 자동 차단</a:t>
+              <a:t>후속 태스크 자동 등록 · 사기 외부발송 차단</a:t>
             </a:r>
           </a:p>
         </p:txBody>
